--- a/lecons/F3/27_FORM4_LESSON23_Wave_Action_in_Coastal_Areas.pptx
+++ b/lecons/F3/27_FORM4_LESSON23_Wave_Action_in_Coastal_Areas.pptx
@@ -51,9 +51,14 @@
     <p:sldId id="299" r:id="rId45"/>
     <p:sldId id="300" r:id="rId46"/>
     <p:sldId id="301" r:id="rId47"/>
+    <p:sldId id="302" r:id="rId48"/>
+    <p:sldId id="303" r:id="rId49"/>
+    <p:sldId id="304" r:id="rId50"/>
+    <p:sldId id="305" r:id="rId51"/>
+    <p:sldId id="306" r:id="rId52"/>
   </p:sldIdLst>
   <p:notesMasterIdLst>
-    <p:notesMasterId r:id="rId48"/>
+    <p:notesMasterId r:id="rId53"/>
   </p:notesMasterIdLst>
   <p:sldSz cx="12192000" cy="6858000"/>
   <p:notesSz cx="6858000" cy="12192000"/>
@@ -635,7 +640,7 @@
           <a:p>
             <a:r>
               <a:rPr lang="en-US" dirty="0"/>
-              <a:t>Listen carefully to this situation from real life. On a windy day, Moussa sees small waves on the Benue. His cousin in Kribi says that the waves of the Atlantic Ocean are much bigger and stronger. Think about it, because I am going to ask you some questions.</a:t>
+              <a:t>Listen carefully to this situation from real life. On a windy day, Moussa sees small waves on the Benue. His cousin in Kribi says that the waves of the Atlantic Ocean are much bigger, and that some of them bring sand to the beach while others take it away. Moussa asks: "What makes waves, and why are they not all the same?" Think about it, because I am going to ask you some questions.</a:t>
             </a:r>
             <a:endParaRPr lang="en-US" dirty="0"/>
           </a:p>
@@ -811,7 +816,7 @@
           <a:p>
             <a:r>
               <a:rPr lang="en-US" dirty="0"/>
-              <a:t>Good. Moussa does not know why some waves are bigger than others.</a:t>
+              <a:t>Good. Moussa does not know what causes waves and why some build beaches while others destroy them.</a:t>
             </a:r>
             <a:endParaRPr lang="en-US" dirty="0"/>
           </a:p>
@@ -899,7 +904,7 @@
           <a:p>
             <a:r>
               <a:rPr lang="en-US" dirty="0"/>
-              <a:t>Question 2: What makes the waves? Think for a moment, then raise your hand to answer.</a:t>
+              <a:t>Question 2: Where are the waves bigger: on the Benue or on the Atlantic? Think for a moment, then raise your hand to answer.</a:t>
             </a:r>
             <a:endParaRPr lang="en-US" dirty="0"/>
           </a:p>
@@ -987,7 +992,7 @@
           <a:p>
             <a:r>
               <a:rPr lang="en-US" dirty="0"/>
-              <a:t>Good. The wind blowing on the water.</a:t>
+              <a:t>Good. On the Atlantic Ocean.</a:t>
             </a:r>
             <a:endParaRPr lang="en-US" dirty="0"/>
           </a:p>
@@ -1075,7 +1080,7 @@
           <a:p>
             <a:r>
               <a:rPr lang="en-US" dirty="0"/>
-              <a:t>Question 3: Why are sea waves bigger? Think for a moment, then raise your hand to answer.</a:t>
+              <a:t>Question 3: What causes most waves? Think for a moment, then raise your hand to answer.</a:t>
             </a:r>
             <a:endParaRPr lang="en-US" dirty="0"/>
           </a:p>
@@ -1163,7 +1168,7 @@
           <a:p>
             <a:r>
               <a:rPr lang="en-US" dirty="0"/>
-              <a:t>Good. The wind blows longer over a very large area of water.</a:t>
+              <a:t>Good. The wind blowing over the water.</a:t>
             </a:r>
             <a:endParaRPr lang="en-US" dirty="0"/>
           </a:p>
@@ -1427,7 +1432,7 @@
           <a:p>
             <a:r>
               <a:rPr lang="en-US" dirty="0"/>
-              <a:t>Activity 1. Look carefully at this picture: waves on the coast. Observe every detail before I ask the question.</a:t>
+              <a:t>Activity 1. Look carefully at this picture: waves on the sea. Observe every detail before I ask the question.</a:t>
             </a:r>
             <a:endParaRPr lang="en-US" dirty="0"/>
           </a:p>
@@ -1691,7 +1696,7 @@
           <a:p>
             <a:r>
               <a:rPr lang="en-US" dirty="0"/>
-              <a:t>Let us check the answer together. The wind blowing on the sea.</a:t>
+              <a:t>Let us check the answer together. The wind blowing over the surface of the sea.</a:t>
             </a:r>
             <a:endParaRPr lang="en-US" dirty="0"/>
           </a:p>
@@ -1779,7 +1784,7 @@
           <a:p>
             <a:r>
               <a:rPr lang="en-US" dirty="0"/>
-              <a:t>Activity 2. Look carefully at this animation: animation: the water goes up the beach and comes back. Watch the animation to the end; it will play again.</a:t>
+              <a:t>Activity 2. Look carefully at this animation: animation: a wave breaks on the beach. Watch the animation to the end; it will play again.</a:t>
             </a:r>
             <a:endParaRPr lang="en-US" dirty="0"/>
           </a:p>
@@ -1867,7 +1872,7 @@
           <a:p>
             <a:r>
               <a:rPr lang="en-US" dirty="0"/>
-              <a:t>Here is the question for Activity 2: What do we call the water going up the beach? And coming back? Take one minute to think and write your answer in your rough notebook.</a:t>
+              <a:t>Here is the question for Activity 2: What do we call the water that rushes up the beach? Take one minute to think and write your answer in your rough notebook.</a:t>
             </a:r>
             <a:endParaRPr lang="en-US" dirty="0"/>
           </a:p>
@@ -1955,7 +1960,7 @@
           <a:p>
             <a:r>
               <a:rPr lang="en-US" dirty="0"/>
-              <a:t>Let us check the answer together. Up: the swash. Back: the backwash.</a:t>
+              <a:t>Let us check the answer together. The swash.</a:t>
             </a:r>
             <a:endParaRPr lang="en-US" dirty="0"/>
           </a:p>
@@ -2043,7 +2048,7 @@
           <a:p>
             <a:r>
               <a:rPr lang="en-US" dirty="0"/>
-              <a:t>Activity 3. Look carefully at this picture: big waves in a storm. Observe every detail before I ask the question.</a:t>
+              <a:t>Here is the next question: What do we call the water that flows back? Take one minute to think and write your answer in your rough notebook.</a:t>
             </a:r>
             <a:endParaRPr lang="en-US" dirty="0"/>
           </a:p>
@@ -2131,7 +2136,7 @@
           <a:p>
             <a:r>
               <a:rPr lang="en-US" dirty="0"/>
-              <a:t>Here is the question for Activity 3: These high waves take sand away from the beach. What type of waves are they? Take one minute to think and write your answer in your rough notebook.</a:t>
+              <a:t>Let us check the answer together. The backwash.</a:t>
             </a:r>
             <a:endParaRPr lang="en-US" dirty="0"/>
           </a:p>
@@ -2219,7 +2224,7 @@
           <a:p>
             <a:r>
               <a:rPr lang="en-US" dirty="0"/>
-              <a:t>Let us check the answer together. Destructive waves.</a:t>
+              <a:t>Activity 3. Look carefully at this picture: high waves on a beach. Observe every detail before I ask the question.</a:t>
             </a:r>
             <a:endParaRPr lang="en-US" dirty="0"/>
           </a:p>
@@ -2307,7 +2312,7 @@
           <a:p>
             <a:r>
               <a:rPr lang="en-US" dirty="0"/>
-              <a:t>Now we are going to copy the board summary. Write the title and the headings neatly in your notebooks. I will give you enough time for each slide, so do not rush.</a:t>
+              <a:t>Here is the question for Activity 3: These high waves take sand away from the beach. What type of waves are they? Take one minute to think and write your answer in your rough notebook.</a:t>
             </a:r>
             <a:endParaRPr lang="en-US" dirty="0"/>
           </a:p>
@@ -2395,7 +2400,7 @@
           <a:p>
             <a:r>
               <a:rPr lang="en-US" dirty="0"/>
-              <a:t>Let us copy Meaning of Waves. Waves and their parts are defined as follows. On this slide we have Wave and Swash. Write each point on a new line, with the key term first, and explain it in your own words when we revise. When you finish, we go to the next slide.</a:t>
+              <a:t>Let us check the answer together. Destructive waves.</a:t>
             </a:r>
             <a:endParaRPr lang="en-US" dirty="0"/>
           </a:p>
@@ -2571,7 +2576,7 @@
           <a:p>
             <a:r>
               <a:rPr lang="en-US" dirty="0"/>
-              <a:t>We continue with Meaning of Waves. On this slide we have Backwash and Fetch. Write each point on a new line, with the key term first, and explain it in your own words when we revise.</a:t>
+              <a:t>Now we are going to copy the board summary. Write the title and the headings neatly in your notebooks. I will give you enough time for each slide, so do not rush.</a:t>
             </a:r>
             <a:endParaRPr lang="en-US" dirty="0"/>
           </a:p>
@@ -2659,7 +2664,7 @@
           <a:p>
             <a:r>
               <a:rPr lang="en-US" dirty="0"/>
-              <a:t>Let us copy Strength of Waves. The strength of waves depends on the following factors. On this slide we have Wind speed and Duration. Write each point on a new line, with the key term first, and explain it in your own words when we revise. When you finish, we go to the next slide.</a:t>
+              <a:t>Let us copy the definitions. The key terms of this lesson are defined as follows. On this slide we have Wave and Swash. Write each point on a new line, with the key term first, and explain it in your own words when we revise. When you finish, we go to the next slide.</a:t>
             </a:r>
             <a:endParaRPr lang="en-US" dirty="0"/>
           </a:p>
@@ -2747,7 +2752,7 @@
           <a:p>
             <a:r>
               <a:rPr lang="en-US" dirty="0"/>
-              <a:t>We continue with Strength of Waves. On this slide we have Fetch. Write each point on a new line, with the key term first, and explain it in your own words when we revise.</a:t>
+              <a:t>We continue with the definitions. On this slide we have Backwash and Fetch. Write each point on a new line, with the key term first, and explain it in your own words when we revise.</a:t>
             </a:r>
             <a:endParaRPr lang="en-US" dirty="0"/>
           </a:p>
@@ -2835,7 +2840,7 @@
           <a:p>
             <a:r>
               <a:rPr lang="en-US" dirty="0"/>
-              <a:t>Let us copy Types of Waves. There are two types of waves. On this slide we have Constructive waves and Destructive waves. Write each point on a new line, with the key term first, and explain it in your own words when we revise.</a:t>
+              <a:t>Let us copy Formation of Waves. Waves are formed as follows. Copy the point on Wind friction on the left, then draw the diagram on the right: waves on the sea. Give it a title and label it clearly.</a:t>
             </a:r>
             <a:endParaRPr lang="en-US" dirty="0"/>
           </a:p>
@@ -2923,7 +2928,7 @@
           <a:p>
             <a:r>
               <a:rPr lang="en-US" dirty="0"/>
-              <a:t>Now draw this illustration in your notebook: constructive and destructive waves. Give it a title and label it clearly.</a:t>
+              <a:t>We continue with Formation of Waves. On this slide we have Breaking. Write each point on a new line, with the key term first, and explain it in your own words when we revise.</a:t>
             </a:r>
             <a:endParaRPr lang="en-US" dirty="0"/>
           </a:p>
@@ -3011,7 +3016,7 @@
           <a:p>
             <a:r>
               <a:rPr lang="en-US" dirty="0"/>
-              <a:t>Now let us check what you have understood. Question 1: What is the swash? Answer in your exercise book.</a:t>
+              <a:t>Copy the point on Swash and backwash on the left, then draw the diagram on the right: the swash. Give it a title and label it clearly.</a:t>
             </a:r>
             <a:endParaRPr lang="en-US" dirty="0"/>
           </a:p>
@@ -3099,7 +3104,7 @@
           <a:p>
             <a:r>
               <a:rPr lang="en-US" dirty="0"/>
-              <a:t>The expected answer is: the water that goes up the beach. If you got it right, well done.</a:t>
+              <a:t>Let us copy Factors of the Strength of Waves. The strength of waves depends on the following factors. On this slide we have Wind speed and Duration of the wind. Write each point on a new line, with the key term first, and explain it in your own words when we revise. When you finish, we go to the next slide.</a:t>
             </a:r>
             <a:endParaRPr lang="en-US" dirty="0"/>
           </a:p>
@@ -3187,7 +3192,7 @@
           <a:p>
             <a:r>
               <a:rPr lang="en-US" dirty="0"/>
-              <a:t>Now let us check what you have understood. Question 2: Give one difference between constructive and destructive waves. Answer in your exercise book.</a:t>
+              <a:t>We continue with Factors of the Strength of Waves. On this slide we have Length of the fetch and Depth of the sea. Write each point on a new line, with the key term first, and explain it in your own words when we revise.</a:t>
             </a:r>
             <a:endParaRPr lang="en-US" dirty="0"/>
           </a:p>
@@ -3275,7 +3280,7 @@
           <a:p>
             <a:r>
               <a:rPr lang="en-US" dirty="0"/>
-              <a:t>The expected answer is: constructive waves build the beach; destructive waves destroy it. If you got it right, well done.</a:t>
+              <a:t>Let us copy Types of Waves. There are two types of waves. Copy the point on Constructive waves on the left, then draw the diagram on the right: constructive and destructive waves. Give it a title and label it clearly.</a:t>
             </a:r>
             <a:endParaRPr lang="en-US" dirty="0"/>
           </a:p>
@@ -3363,7 +3368,7 @@
           <a:p>
             <a:r>
               <a:rPr lang="en-US" dirty="0"/>
-              <a:t>For those who need more practice, fill in the blanks in your exercise book. The answers are: number 1, wind; number 2, backwash; number 3, destructive.</a:t>
+              <a:t>Copy the point on Destructive waves on the left, then draw the diagram on the right: high waves. Give it a title and label it clearly.</a:t>
             </a:r>
             <a:endParaRPr lang="en-US" dirty="0"/>
           </a:p>
@@ -3539,7 +3544,7 @@
           <a:p>
             <a:r>
               <a:rPr lang="en-US" dirty="0"/>
-              <a:t>For your homework: Look at photos of the coast of Limbe or Kribi. Draw a rocky part of the coast and name any holes, arches or rocks in the sea that you see. We shall correct it at the beginning of our next lesson.</a:t>
+              <a:t>Now let us check what you have understood. Question 1: What is the swash? Answer in your exercise book.</a:t>
             </a:r>
             <a:endParaRPr lang="en-US" dirty="0"/>
           </a:p>
@@ -3627,7 +3632,7 @@
           <a:p>
             <a:r>
               <a:rPr lang="en-US" dirty="0"/>
-              <a:t>Our next lesson will be on Lesson 24: Main Erosional Processes and Features of Wave Action. Thank you for your attention, and see you next time.</a:t>
+              <a:t>The expected answer is: the water that goes up the beach. If you got it right, well done.</a:t>
             </a:r>
             <a:endParaRPr lang="en-US" dirty="0"/>
           </a:p>
@@ -3715,7 +3720,7 @@
           <a:p>
             <a:r>
               <a:rPr lang="en-US" dirty="0"/>
-              <a:t>Let us play the bilingual game. I say a word in English, and you give me the French word. Then we do the reverse.</a:t>
+              <a:t>Now let us check what you have understood. Question 2: Give one difference between constructive and destructive waves. Answer in your exercise book.</a:t>
             </a:r>
             <a:endParaRPr lang="en-US" dirty="0"/>
           </a:p>
@@ -3803,7 +3808,7 @@
           <a:p>
             <a:r>
               <a:rPr lang="en-US" dirty="0"/>
-              <a:t>I record this information in the official logbook of the class after the lesson.</a:t>
+              <a:t>The expected answer is: constructive waves build the beach; destructive waves destroy it. If you got it right, well done.</a:t>
             </a:r>
             <a:endParaRPr lang="en-US" dirty="0"/>
           </a:p>
@@ -3891,7 +3896,7 @@
           <a:p>
             <a:r>
               <a:rPr lang="en-US" dirty="0"/>
-              <a:t>I complete the second page of the logbook: the matter taught, the evaluation, the homework and the attendance.</a:t>
+              <a:t>For those who need more practice, fill in the blanks in your exercise book. The answers are: number 1, wind; number 2, backwash; number 3, destructive.</a:t>
             </a:r>
             <a:endParaRPr lang="en-US" dirty="0"/>
           </a:p>
@@ -3979,7 +3984,7 @@
           <a:p>
             <a:r>
               <a:rPr lang="en-US" dirty="0"/>
-              <a:t>This slide is for me, the teacher: it gives the timing of the lesson and what to do if the projector is not available.</a:t>
+              <a:t>For your homework: Look at photos of the coast of Limbe or Kribi. Draw a rocky part of the coast and name any holes, arches or rocks in the sea that you see. We shall correct it at the beginning of our next lesson.</a:t>
             </a:r>
             <a:endParaRPr lang="en-US" dirty="0"/>
           </a:p>
@@ -4067,7 +4072,7 @@
           <a:p>
             <a:r>
               <a:rPr lang="en-US" dirty="0"/>
-              <a:t>These are the references and picture credits used to prepare this lesson.</a:t>
+              <a:t>Our next lesson will be on Lesson 24: Main Erosional Processes and Features of Wave Action. Thank you for your attention, and see you next time.</a:t>
             </a:r>
             <a:endParaRPr lang="en-US" dirty="0"/>
           </a:p>
@@ -4091,6 +4096,270 @@
             <a:fld id="{F7021451-1387-4CA6-816F-3879F97B5CBC}" type="slidenum">
               <a:rPr lang="en-US"/>
               <a:t>46</a:t>
+            </a:fld>
+            <a:endParaRPr lang="en-US"/>
+          </a:p>
+        </p:txBody>
+      </p:sp>
+    </p:spTree>
+    <p:extLst>
+      <p:ext uri="{BB962C8B-B14F-4D97-AF65-F5344CB8AC3E}">
+        <p14:creationId xmlns:p14="http://schemas.microsoft.com/office/powerpoint/2010/main" val="1024086991"/>
+      </p:ext>
+    </p:extLst>
+  </p:cSld>
+  <p:clrMapOvr>
+    <a:masterClrMapping/>
+  </p:clrMapOvr>
+</p:notes>
+</file>
+
+<file path=ppt/notesSlides/notesSlide47.xml><?xml version="1.0" encoding="utf-8"?>
+<p:notes xmlns:a="http://schemas.openxmlformats.org/drawingml/2006/main" xmlns:r="http://schemas.openxmlformats.org/officeDocument/2006/relationships" xmlns:p="http://schemas.openxmlformats.org/presentationml/2006/main">
+  <p:cSld>
+    <p:spTree>
+      <p:nvGrpSpPr>
+        <p:cNvPr id="1" name=""/>
+        <p:cNvGrpSpPr/>
+        <p:nvPr/>
+      </p:nvGrpSpPr>
+      <p:grpSpPr>
+        <a:xfrm>
+          <a:off x="0" y="0"/>
+          <a:ext cx="0" cy="0"/>
+          <a:chOff x="0" y="0"/>
+          <a:chExt cx="0" cy="0"/>
+        </a:xfrm>
+      </p:grpSpPr>
+      <p:sp>
+        <p:nvSpPr>
+          <p:cNvPr id="2" name="Slide Image Placeholder 1"/>
+          <p:cNvSpPr>
+            <a:spLocks noGrp="1" noRot="1" noChangeAspect="1"/>
+          </p:cNvSpPr>
+          <p:nvPr>
+            <p:ph type="sldImg"/>
+          </p:nvPr>
+        </p:nvSpPr>
+        <p:spPr/>
+      </p:sp>
+      <p:sp>
+        <p:nvSpPr>
+          <p:cNvPr id="3" name="Notes Placeholder 2"/>
+          <p:cNvSpPr>
+            <a:spLocks noGrp="1"/>
+          </p:cNvSpPr>
+          <p:nvPr>
+            <p:ph type="body" idx="1"/>
+          </p:nvPr>
+        </p:nvSpPr>
+        <p:spPr/>
+        <p:txBody>
+          <a:bodyPr/>
+          <a:lstStyle/>
+          <a:p>
+            <a:r>
+              <a:rPr lang="en-US" dirty="0"/>
+              <a:t>Let us play the bilingual game. I say a word in English, and you give me the French word. Then we do the reverse.</a:t>
+            </a:r>
+            <a:endParaRPr lang="en-US" dirty="0"/>
+          </a:p>
+        </p:txBody>
+      </p:sp>
+      <p:sp>
+        <p:nvSpPr>
+          <p:cNvPr id="4" name="Slide Number Placeholder 3"/>
+          <p:cNvSpPr>
+            <a:spLocks noGrp="1"/>
+          </p:cNvSpPr>
+          <p:nvPr>
+            <p:ph type="sldNum" sz="quarter" idx="10"/>
+          </p:nvPr>
+        </p:nvSpPr>
+        <p:spPr/>
+        <p:txBody>
+          <a:bodyPr/>
+          <a:lstStyle/>
+          <a:p>
+            <a:fld id="{F7021451-1387-4CA6-816F-3879F97B5CBC}" type="slidenum">
+              <a:rPr lang="en-US"/>
+              <a:t>47</a:t>
+            </a:fld>
+            <a:endParaRPr lang="en-US"/>
+          </a:p>
+        </p:txBody>
+      </p:sp>
+    </p:spTree>
+    <p:extLst>
+      <p:ext uri="{BB962C8B-B14F-4D97-AF65-F5344CB8AC3E}">
+        <p14:creationId xmlns:p14="http://schemas.microsoft.com/office/powerpoint/2010/main" val="1024086991"/>
+      </p:ext>
+    </p:extLst>
+  </p:cSld>
+  <p:clrMapOvr>
+    <a:masterClrMapping/>
+  </p:clrMapOvr>
+</p:notes>
+</file>
+
+<file path=ppt/notesSlides/notesSlide48.xml><?xml version="1.0" encoding="utf-8"?>
+<p:notes xmlns:a="http://schemas.openxmlformats.org/drawingml/2006/main" xmlns:r="http://schemas.openxmlformats.org/officeDocument/2006/relationships" xmlns:p="http://schemas.openxmlformats.org/presentationml/2006/main">
+  <p:cSld>
+    <p:spTree>
+      <p:nvGrpSpPr>
+        <p:cNvPr id="1" name=""/>
+        <p:cNvGrpSpPr/>
+        <p:nvPr/>
+      </p:nvGrpSpPr>
+      <p:grpSpPr>
+        <a:xfrm>
+          <a:off x="0" y="0"/>
+          <a:ext cx="0" cy="0"/>
+          <a:chOff x="0" y="0"/>
+          <a:chExt cx="0" cy="0"/>
+        </a:xfrm>
+      </p:grpSpPr>
+      <p:sp>
+        <p:nvSpPr>
+          <p:cNvPr id="2" name="Slide Image Placeholder 1"/>
+          <p:cNvSpPr>
+            <a:spLocks noGrp="1" noRot="1" noChangeAspect="1"/>
+          </p:cNvSpPr>
+          <p:nvPr>
+            <p:ph type="sldImg"/>
+          </p:nvPr>
+        </p:nvSpPr>
+        <p:spPr/>
+      </p:sp>
+      <p:sp>
+        <p:nvSpPr>
+          <p:cNvPr id="3" name="Notes Placeholder 2"/>
+          <p:cNvSpPr>
+            <a:spLocks noGrp="1"/>
+          </p:cNvSpPr>
+          <p:nvPr>
+            <p:ph type="body" idx="1"/>
+          </p:nvPr>
+        </p:nvSpPr>
+        <p:spPr/>
+        <p:txBody>
+          <a:bodyPr/>
+          <a:lstStyle/>
+          <a:p>
+            <a:r>
+              <a:rPr lang="en-US" dirty="0"/>
+              <a:t>I record this information in the official logbook of the class after the lesson.</a:t>
+            </a:r>
+            <a:endParaRPr lang="en-US" dirty="0"/>
+          </a:p>
+        </p:txBody>
+      </p:sp>
+      <p:sp>
+        <p:nvSpPr>
+          <p:cNvPr id="4" name="Slide Number Placeholder 3"/>
+          <p:cNvSpPr>
+            <a:spLocks noGrp="1"/>
+          </p:cNvSpPr>
+          <p:nvPr>
+            <p:ph type="sldNum" sz="quarter" idx="10"/>
+          </p:nvPr>
+        </p:nvSpPr>
+        <p:spPr/>
+        <p:txBody>
+          <a:bodyPr/>
+          <a:lstStyle/>
+          <a:p>
+            <a:fld id="{F7021451-1387-4CA6-816F-3879F97B5CBC}" type="slidenum">
+              <a:rPr lang="en-US"/>
+              <a:t>48</a:t>
+            </a:fld>
+            <a:endParaRPr lang="en-US"/>
+          </a:p>
+        </p:txBody>
+      </p:sp>
+    </p:spTree>
+    <p:extLst>
+      <p:ext uri="{BB962C8B-B14F-4D97-AF65-F5344CB8AC3E}">
+        <p14:creationId xmlns:p14="http://schemas.microsoft.com/office/powerpoint/2010/main" val="1024086991"/>
+      </p:ext>
+    </p:extLst>
+  </p:cSld>
+  <p:clrMapOvr>
+    <a:masterClrMapping/>
+  </p:clrMapOvr>
+</p:notes>
+</file>
+
+<file path=ppt/notesSlides/notesSlide49.xml><?xml version="1.0" encoding="utf-8"?>
+<p:notes xmlns:a="http://schemas.openxmlformats.org/drawingml/2006/main" xmlns:r="http://schemas.openxmlformats.org/officeDocument/2006/relationships" xmlns:p="http://schemas.openxmlformats.org/presentationml/2006/main">
+  <p:cSld>
+    <p:spTree>
+      <p:nvGrpSpPr>
+        <p:cNvPr id="1" name=""/>
+        <p:cNvGrpSpPr/>
+        <p:nvPr/>
+      </p:nvGrpSpPr>
+      <p:grpSpPr>
+        <a:xfrm>
+          <a:off x="0" y="0"/>
+          <a:ext cx="0" cy="0"/>
+          <a:chOff x="0" y="0"/>
+          <a:chExt cx="0" cy="0"/>
+        </a:xfrm>
+      </p:grpSpPr>
+      <p:sp>
+        <p:nvSpPr>
+          <p:cNvPr id="2" name="Slide Image Placeholder 1"/>
+          <p:cNvSpPr>
+            <a:spLocks noGrp="1" noRot="1" noChangeAspect="1"/>
+          </p:cNvSpPr>
+          <p:nvPr>
+            <p:ph type="sldImg"/>
+          </p:nvPr>
+        </p:nvSpPr>
+        <p:spPr/>
+      </p:sp>
+      <p:sp>
+        <p:nvSpPr>
+          <p:cNvPr id="3" name="Notes Placeholder 2"/>
+          <p:cNvSpPr>
+            <a:spLocks noGrp="1"/>
+          </p:cNvSpPr>
+          <p:nvPr>
+            <p:ph type="body" idx="1"/>
+          </p:nvPr>
+        </p:nvSpPr>
+        <p:spPr/>
+        <p:txBody>
+          <a:bodyPr/>
+          <a:lstStyle/>
+          <a:p>
+            <a:r>
+              <a:rPr lang="en-US" dirty="0"/>
+              <a:t>I complete the second page of the logbook: the matter taught, the evaluation, the homework and the attendance.</a:t>
+            </a:r>
+            <a:endParaRPr lang="en-US" dirty="0"/>
+          </a:p>
+        </p:txBody>
+      </p:sp>
+      <p:sp>
+        <p:nvSpPr>
+          <p:cNvPr id="4" name="Slide Number Placeholder 3"/>
+          <p:cNvSpPr>
+            <a:spLocks noGrp="1"/>
+          </p:cNvSpPr>
+          <p:nvPr>
+            <p:ph type="sldNum" sz="quarter" idx="10"/>
+          </p:nvPr>
+        </p:nvSpPr>
+        <p:spPr/>
+        <p:txBody>
+          <a:bodyPr/>
+          <a:lstStyle/>
+          <a:p>
+            <a:fld id="{F7021451-1387-4CA6-816F-3879F97B5CBC}" type="slidenum">
+              <a:rPr lang="en-US"/>
+              <a:t>49</a:t>
             </a:fld>
             <a:endParaRPr lang="en-US"/>
           </a:p>
@@ -4179,6 +4448,182 @@
             <a:fld id="{F7021451-1387-4CA6-816F-3879F97B5CBC}" type="slidenum">
               <a:rPr lang="en-US"/>
               <a:t>5</a:t>
+            </a:fld>
+            <a:endParaRPr lang="en-US"/>
+          </a:p>
+        </p:txBody>
+      </p:sp>
+    </p:spTree>
+    <p:extLst>
+      <p:ext uri="{BB962C8B-B14F-4D97-AF65-F5344CB8AC3E}">
+        <p14:creationId xmlns:p14="http://schemas.microsoft.com/office/powerpoint/2010/main" val="1024086991"/>
+      </p:ext>
+    </p:extLst>
+  </p:cSld>
+  <p:clrMapOvr>
+    <a:masterClrMapping/>
+  </p:clrMapOvr>
+</p:notes>
+</file>
+
+<file path=ppt/notesSlides/notesSlide50.xml><?xml version="1.0" encoding="utf-8"?>
+<p:notes xmlns:a="http://schemas.openxmlformats.org/drawingml/2006/main" xmlns:r="http://schemas.openxmlformats.org/officeDocument/2006/relationships" xmlns:p="http://schemas.openxmlformats.org/presentationml/2006/main">
+  <p:cSld>
+    <p:spTree>
+      <p:nvGrpSpPr>
+        <p:cNvPr id="1" name=""/>
+        <p:cNvGrpSpPr/>
+        <p:nvPr/>
+      </p:nvGrpSpPr>
+      <p:grpSpPr>
+        <a:xfrm>
+          <a:off x="0" y="0"/>
+          <a:ext cx="0" cy="0"/>
+          <a:chOff x="0" y="0"/>
+          <a:chExt cx="0" cy="0"/>
+        </a:xfrm>
+      </p:grpSpPr>
+      <p:sp>
+        <p:nvSpPr>
+          <p:cNvPr id="2" name="Slide Image Placeholder 1"/>
+          <p:cNvSpPr>
+            <a:spLocks noGrp="1" noRot="1" noChangeAspect="1"/>
+          </p:cNvSpPr>
+          <p:nvPr>
+            <p:ph type="sldImg"/>
+          </p:nvPr>
+        </p:nvSpPr>
+        <p:spPr/>
+      </p:sp>
+      <p:sp>
+        <p:nvSpPr>
+          <p:cNvPr id="3" name="Notes Placeholder 2"/>
+          <p:cNvSpPr>
+            <a:spLocks noGrp="1"/>
+          </p:cNvSpPr>
+          <p:nvPr>
+            <p:ph type="body" idx="1"/>
+          </p:nvPr>
+        </p:nvSpPr>
+        <p:spPr/>
+        <p:txBody>
+          <a:bodyPr/>
+          <a:lstStyle/>
+          <a:p>
+            <a:r>
+              <a:rPr lang="en-US" dirty="0"/>
+              <a:t>This slide is for me, the teacher: it gives the timing of the lesson and what to do if the projector is not available.</a:t>
+            </a:r>
+            <a:endParaRPr lang="en-US" dirty="0"/>
+          </a:p>
+        </p:txBody>
+      </p:sp>
+      <p:sp>
+        <p:nvSpPr>
+          <p:cNvPr id="4" name="Slide Number Placeholder 3"/>
+          <p:cNvSpPr>
+            <a:spLocks noGrp="1"/>
+          </p:cNvSpPr>
+          <p:nvPr>
+            <p:ph type="sldNum" sz="quarter" idx="10"/>
+          </p:nvPr>
+        </p:nvSpPr>
+        <p:spPr/>
+        <p:txBody>
+          <a:bodyPr/>
+          <a:lstStyle/>
+          <a:p>
+            <a:fld id="{F7021451-1387-4CA6-816F-3879F97B5CBC}" type="slidenum">
+              <a:rPr lang="en-US"/>
+              <a:t>50</a:t>
+            </a:fld>
+            <a:endParaRPr lang="en-US"/>
+          </a:p>
+        </p:txBody>
+      </p:sp>
+    </p:spTree>
+    <p:extLst>
+      <p:ext uri="{BB962C8B-B14F-4D97-AF65-F5344CB8AC3E}">
+        <p14:creationId xmlns:p14="http://schemas.microsoft.com/office/powerpoint/2010/main" val="1024086991"/>
+      </p:ext>
+    </p:extLst>
+  </p:cSld>
+  <p:clrMapOvr>
+    <a:masterClrMapping/>
+  </p:clrMapOvr>
+</p:notes>
+</file>
+
+<file path=ppt/notesSlides/notesSlide51.xml><?xml version="1.0" encoding="utf-8"?>
+<p:notes xmlns:a="http://schemas.openxmlformats.org/drawingml/2006/main" xmlns:r="http://schemas.openxmlformats.org/officeDocument/2006/relationships" xmlns:p="http://schemas.openxmlformats.org/presentationml/2006/main">
+  <p:cSld>
+    <p:spTree>
+      <p:nvGrpSpPr>
+        <p:cNvPr id="1" name=""/>
+        <p:cNvGrpSpPr/>
+        <p:nvPr/>
+      </p:nvGrpSpPr>
+      <p:grpSpPr>
+        <a:xfrm>
+          <a:off x="0" y="0"/>
+          <a:ext cx="0" cy="0"/>
+          <a:chOff x="0" y="0"/>
+          <a:chExt cx="0" cy="0"/>
+        </a:xfrm>
+      </p:grpSpPr>
+      <p:sp>
+        <p:nvSpPr>
+          <p:cNvPr id="2" name="Slide Image Placeholder 1"/>
+          <p:cNvSpPr>
+            <a:spLocks noGrp="1" noRot="1" noChangeAspect="1"/>
+          </p:cNvSpPr>
+          <p:nvPr>
+            <p:ph type="sldImg"/>
+          </p:nvPr>
+        </p:nvSpPr>
+        <p:spPr/>
+      </p:sp>
+      <p:sp>
+        <p:nvSpPr>
+          <p:cNvPr id="3" name="Notes Placeholder 2"/>
+          <p:cNvSpPr>
+            <a:spLocks noGrp="1"/>
+          </p:cNvSpPr>
+          <p:nvPr>
+            <p:ph type="body" idx="1"/>
+          </p:nvPr>
+        </p:nvSpPr>
+        <p:spPr/>
+        <p:txBody>
+          <a:bodyPr/>
+          <a:lstStyle/>
+          <a:p>
+            <a:r>
+              <a:rPr lang="en-US" dirty="0"/>
+              <a:t>These are the references and picture credits used to prepare this lesson.</a:t>
+            </a:r>
+            <a:endParaRPr lang="en-US" dirty="0"/>
+          </a:p>
+        </p:txBody>
+      </p:sp>
+      <p:sp>
+        <p:nvSpPr>
+          <p:cNvPr id="4" name="Slide Number Placeholder 3"/>
+          <p:cNvSpPr>
+            <a:spLocks noGrp="1"/>
+          </p:cNvSpPr>
+          <p:nvPr>
+            <p:ph type="sldNum" sz="quarter" idx="10"/>
+          </p:nvPr>
+        </p:nvSpPr>
+        <p:spPr/>
+        <p:txBody>
+          <a:bodyPr/>
+          <a:lstStyle/>
+          <a:p>
+            <a:fld id="{F7021451-1387-4CA6-816F-3879F97B5CBC}" type="slidenum">
+              <a:rPr lang="en-US"/>
+              <a:t>51</a:t>
             </a:fld>
             <a:endParaRPr lang="en-US"/>
           </a:p>
@@ -5887,7 +6332,7 @@
         <p:spPr>
           <a:xfrm>
             <a:off x="0" y="658368"/>
-            <a:ext cx="5120640" cy="5833872"/>
+            <a:ext cx="2468880" cy="5833872"/>
           </a:xfrm>
           <a:prstGeom prst="rect">
             <a:avLst/>
@@ -5902,8 +6347,8 @@
         </p:nvSpPr>
         <p:spPr>
           <a:xfrm>
-            <a:off x="5349240" y="1005840"/>
-            <a:ext cx="6522415" cy="731520"/>
+            <a:off x="2697480" y="1005840"/>
+            <a:ext cx="9174175" cy="731520"/>
           </a:xfrm>
           <a:prstGeom prst="rect">
             <a:avLst/>
@@ -5943,8 +6388,8 @@
         </p:nvSpPr>
         <p:spPr>
           <a:xfrm>
-            <a:off x="5349240" y="1783080"/>
-            <a:ext cx="6522415" cy="4663440"/>
+            <a:off x="2697480" y="1783080"/>
+            <a:ext cx="9174175" cy="4663440"/>
           </a:xfrm>
           <a:prstGeom prst="rect">
             <a:avLst/>
@@ -5971,7 +6416,7 @@
                 <a:ea typeface="Times New Roman" pitchFamily="34" charset="-122"/>
                 <a:cs typeface="Times New Roman" pitchFamily="34" charset="-120"/>
               </a:rPr>
-              <a:t>On a windy day, Moussa sees small waves on the Benue. His cousin in Kribi says that the waves of the Atlantic Ocean are much bigger and stronger.</a:t>
+              <a:t>On a windy day, Moussa sees small waves on the Benue. His cousin in Kribi says that the waves of the Atlantic Ocean are much bigger, and that some of them bring sand to the beach while others take it away. Moussa asks: "What makes waves, and why are they not all the same?"</a:t>
             </a:r>
             <a:endParaRPr lang="en-US" sz="4000" dirty="0"/>
           </a:p>
@@ -6409,7 +6854,7 @@
                 <a:ea typeface="Times New Roman" pitchFamily="34" charset="-122"/>
                 <a:cs typeface="Times New Roman" pitchFamily="34" charset="-120"/>
               </a:rPr>
-              <a:t>Moussa does not know why some waves are bigger than others.</a:t>
+              <a:t>Moussa does not know what causes waves and why some build beaches while others destroy them.</a:t>
             </a:r>
             <a:endParaRPr lang="en-US" sz="4000" dirty="0"/>
           </a:p>
@@ -6628,7 +7073,7 @@
                 <a:ea typeface="Times New Roman" pitchFamily="34" charset="-122"/>
                 <a:cs typeface="Times New Roman" pitchFamily="34" charset="-120"/>
               </a:rPr>
-              <a:t>What makes the waves?</a:t>
+              <a:t>Where are the waves bigger: on the Benue or on the Atlantic?</a:t>
             </a:r>
             <a:endParaRPr lang="en-US" sz="4000" dirty="0"/>
           </a:p>
@@ -6847,7 +7292,7 @@
                 <a:ea typeface="Times New Roman" pitchFamily="34" charset="-122"/>
                 <a:cs typeface="Times New Roman" pitchFamily="34" charset="-120"/>
               </a:rPr>
-              <a:t>The wind blowing on the water.</a:t>
+              <a:t>On the Atlantic Ocean.</a:t>
             </a:r>
             <a:endParaRPr lang="en-US" sz="4000" dirty="0"/>
           </a:p>
@@ -7066,7 +7511,7 @@
                 <a:ea typeface="Times New Roman" pitchFamily="34" charset="-122"/>
                 <a:cs typeface="Times New Roman" pitchFamily="34" charset="-120"/>
               </a:rPr>
-              <a:t>Why are sea waves bigger?</a:t>
+              <a:t>What causes most waves?</a:t>
             </a:r>
             <a:endParaRPr lang="en-US" sz="4000" dirty="0"/>
           </a:p>
@@ -7285,7 +7730,7 @@
                 <a:ea typeface="Times New Roman" pitchFamily="34" charset="-122"/>
                 <a:cs typeface="Times New Roman" pitchFamily="34" charset="-120"/>
               </a:rPr>
-              <a:t>The wind blows longer over a very large area of water.</a:t>
+              <a:t>The wind blowing over the water.</a:t>
             </a:r>
             <a:endParaRPr lang="en-US" sz="4000" dirty="0"/>
           </a:p>
@@ -7937,7 +8382,7 @@
                 <a:ea typeface="Times New Roman" pitchFamily="34" charset="-122"/>
                 <a:cs typeface="Times New Roman" pitchFamily="34" charset="-120"/>
               </a:rPr>
-              <a:t>Waves on the coast.</a:t>
+              <a:t>Waves on the sea.</a:t>
             </a:r>
             <a:endParaRPr lang="en-US" sz="1800" dirty="0"/>
           </a:p>
@@ -8970,7 +9415,7 @@
                 <a:ea typeface="Times New Roman" pitchFamily="34" charset="-122"/>
                 <a:cs typeface="Times New Roman" pitchFamily="34" charset="-120"/>
               </a:rPr>
-              <a:t>The wind blowing on the sea.</a:t>
+              <a:t>The wind blowing over the surface of the sea.</a:t>
             </a:r>
             <a:endParaRPr lang="en-US" sz="4000" dirty="0"/>
           </a:p>
@@ -9184,7 +9629,7 @@
                 <a:ea typeface="Times New Roman" pitchFamily="34" charset="-122"/>
                 <a:cs typeface="Times New Roman" pitchFamily="34" charset="-120"/>
               </a:rPr>
-              <a:t>Animation: the water goes up the beach and comes back.</a:t>
+              <a:t>Animation: a wave breaks on the beach.</a:t>
             </a:r>
             <a:endParaRPr lang="en-US" sz="1800" dirty="0"/>
           </a:p>
@@ -9361,7 +9806,7 @@
                 <a:ea typeface="Times New Roman" pitchFamily="34" charset="-122"/>
                 <a:cs typeface="Times New Roman" pitchFamily="34" charset="-120"/>
               </a:rPr>
-              <a:t>Activity 2: Question</a:t>
+              <a:t>Activity 2: Question 1</a:t>
             </a:r>
             <a:endParaRPr lang="en-US" sz="3600" dirty="0"/>
           </a:p>
@@ -9403,7 +9848,7 @@
                 <a:ea typeface="Times New Roman" pitchFamily="34" charset="-122"/>
                 <a:cs typeface="Times New Roman" pitchFamily="34" charset="-120"/>
               </a:rPr>
-              <a:t>What do we call the water going up the beach? And coming back?</a:t>
+              <a:t>What do we call the water that rushes up the beach?</a:t>
             </a:r>
             <a:endParaRPr lang="en-US" sz="4000" dirty="0"/>
           </a:p>
@@ -9580,7 +10025,7 @@
                 <a:ea typeface="Times New Roman" pitchFamily="34" charset="-122"/>
                 <a:cs typeface="Times New Roman" pitchFamily="34" charset="-120"/>
               </a:rPr>
-              <a:t>Activity 2: Answer</a:t>
+              <a:t>Activity 2: Answer 1</a:t>
             </a:r>
             <a:endParaRPr lang="en-US" sz="3600" dirty="0"/>
           </a:p>
@@ -9622,7 +10067,7 @@
                 <a:ea typeface="Times New Roman" pitchFamily="34" charset="-122"/>
                 <a:cs typeface="Times New Roman" pitchFamily="34" charset="-120"/>
               </a:rPr>
-              <a:t>Up: the swash. Back: the backwash.</a:t>
+              <a:t>The swash.</a:t>
             </a:r>
             <a:endParaRPr lang="en-US" sz="4000" dirty="0"/>
           </a:p>
@@ -9734,54 +10179,15 @@
                 <a:ea typeface="Calibri" pitchFamily="34" charset="-122"/>
                 <a:cs typeface="Calibri" pitchFamily="34" charset="-120"/>
               </a:rPr>
-              <a:t>2. TYPES OF WAVES</a:t>
+              <a:t>1. MEANING OF WAVES</a:t>
             </a:r>
             <a:endParaRPr lang="en-US" sz="1400" dirty="0"/>
-          </a:p>
-        </p:txBody>
-      </p:sp>
-      <p:sp>
-        <p:nvSpPr>
-          <p:cNvPr id="3" name="Text 1"/>
-          <p:cNvSpPr/>
-          <p:nvPr/>
-        </p:nvSpPr>
-        <p:spPr>
-          <a:xfrm>
-            <a:off x="457200" y="1005840"/>
-            <a:ext cx="11277295" cy="731520"/>
-          </a:xfrm>
-          <a:prstGeom prst="rect">
-            <a:avLst/>
-          </a:prstGeom>
-          <a:noFill/>
-          <a:ln/>
-        </p:spPr>
-        <p:txBody>
-          <a:bodyPr wrap="square" lIns="0" tIns="0" rIns="0" bIns="0" rtlCol="0" anchor="ctr"/>
-          <a:lstStyle/>
-          <a:p>
-            <a:pPr algn="ctr" indent="0" marL="0">
-              <a:buNone/>
-            </a:pPr>
-            <a:r>
-              <a:rPr lang="en-US" sz="3600" b="1" dirty="0">
-                <a:solidFill>
-                  <a:srgbClr val="990011"/>
-                </a:solidFill>
-                <a:latin typeface="Times New Roman" pitchFamily="34" charset="0"/>
-                <a:ea typeface="Times New Roman" pitchFamily="34" charset="-122"/>
-                <a:cs typeface="Times New Roman" pitchFamily="34" charset="-120"/>
-              </a:rPr>
-              <a:t>Activity 3</a:t>
-            </a:r>
-            <a:endParaRPr lang="en-US" sz="3600" dirty="0"/>
           </a:p>
         </p:txBody>
       </p:sp>
       <p:pic>
         <p:nvPicPr>
-          <p:cNvPr id="4" name="Image 0" descr="/home/claude/f4/img/v2/f4_bigwaves.jpg">    </p:cNvPr>
+          <p:cNvPr id="3" name="Image 0" descr="/home/claude/f4/img/minesec_sheet.png">    </p:cNvPr>
           <p:cNvPicPr>
             <a:picLocks noChangeAspect="1"/>
           </p:cNvPicPr>
@@ -9795,8 +10201,8 @@
         </p:blipFill>
         <p:spPr>
           <a:xfrm>
-            <a:off x="2246610" y="1783080"/>
-            <a:ext cx="7698475" cy="4270248"/>
+            <a:off x="0" y="658368"/>
+            <a:ext cx="5120640" cy="5833872"/>
           </a:xfrm>
           <a:prstGeom prst="rect">
             <a:avLst/>
@@ -9805,14 +10211,14 @@
       </p:pic>
       <p:sp>
         <p:nvSpPr>
-          <p:cNvPr id="5" name="Text 2"/>
+          <p:cNvPr id="4" name="Text 1"/>
           <p:cNvSpPr/>
           <p:nvPr/>
         </p:nvSpPr>
         <p:spPr>
           <a:xfrm>
-            <a:off x="457200" y="6089904"/>
-            <a:ext cx="11277295" cy="347472"/>
+            <a:off x="5349240" y="1005840"/>
+            <a:ext cx="6522415" cy="731520"/>
           </a:xfrm>
           <a:prstGeom prst="rect">
             <a:avLst/>
@@ -9821,24 +10227,68 @@
           <a:ln/>
         </p:spPr>
         <p:txBody>
-          <a:bodyPr wrap="square" lIns="0" tIns="0" rIns="0" bIns="0" rtlCol="0" anchor="ctr"/>
+          <a:bodyPr wrap="square" lIns="0" tIns="0" rIns="0" bIns="0" rtlCol="0" anchor="ctr">
+            <a:normAutofit/>
+          </a:bodyPr>
           <a:lstStyle/>
           <a:p>
             <a:pPr algn="ctr" indent="0" marL="0">
               <a:buNone/>
             </a:pPr>
             <a:r>
-              <a:rPr lang="en-US" sz="1800" i="1" dirty="0">
-                <a:solidFill>
-                  <a:srgbClr val="555555"/>
+              <a:rPr lang="en-US" sz="3600" b="1" dirty="0">
+                <a:solidFill>
+                  <a:srgbClr val="990011"/>
                 </a:solidFill>
                 <a:latin typeface="Times New Roman" pitchFamily="34" charset="0"/>
                 <a:ea typeface="Times New Roman" pitchFamily="34" charset="-122"/>
                 <a:cs typeface="Times New Roman" pitchFamily="34" charset="-120"/>
               </a:rPr>
-              <a:t>Big waves in a storm.</a:t>
-            </a:r>
-            <a:endParaRPr lang="en-US" sz="1800" dirty="0"/>
+              <a:t>Activity 2: Question 2</a:t>
+            </a:r>
+            <a:endParaRPr lang="en-US" sz="3600" dirty="0"/>
+          </a:p>
+        </p:txBody>
+      </p:sp>
+      <p:sp>
+        <p:nvSpPr>
+          <p:cNvPr id="5" name="Text 2"/>
+          <p:cNvSpPr/>
+          <p:nvPr/>
+        </p:nvSpPr>
+        <p:spPr>
+          <a:xfrm>
+            <a:off x="5349240" y="1783080"/>
+            <a:ext cx="6522415" cy="4663440"/>
+          </a:xfrm>
+          <a:prstGeom prst="rect">
+            <a:avLst/>
+          </a:prstGeom>
+          <a:noFill/>
+          <a:ln/>
+        </p:spPr>
+        <p:txBody>
+          <a:bodyPr wrap="square" lIns="0" tIns="0" rIns="0" bIns="0" rtlCol="0" anchor="t"/>
+          <a:lstStyle/>
+          <a:p>
+            <a:pPr algn="l" indent="0" marL="0">
+              <a:spcAft>
+                <a:spcPts val="800"/>
+              </a:spcAft>
+              <a:buNone/>
+            </a:pPr>
+            <a:r>
+              <a:rPr lang="en-US" sz="4000" dirty="0">
+                <a:solidFill>
+                  <a:srgbClr val="111111"/>
+                </a:solidFill>
+                <a:latin typeface="Times New Roman" pitchFamily="34" charset="0"/>
+                <a:ea typeface="Times New Roman" pitchFamily="34" charset="-122"/>
+                <a:cs typeface="Times New Roman" pitchFamily="34" charset="-120"/>
+              </a:rPr>
+              <a:t>What do we call the water that flows back?</a:t>
+            </a:r>
+            <a:endParaRPr lang="en-US" sz="4000" dirty="0"/>
           </a:p>
         </p:txBody>
       </p:sp>
@@ -9948,7 +10398,7 @@
                 <a:ea typeface="Calibri" pitchFamily="34" charset="-122"/>
                 <a:cs typeface="Calibri" pitchFamily="34" charset="-120"/>
               </a:rPr>
-              <a:t>2. TYPES OF WAVES</a:t>
+              <a:t>1. MEANING OF WAVES</a:t>
             </a:r>
             <a:endParaRPr lang="en-US" sz="1400" dirty="0"/>
           </a:p>
@@ -10013,7 +10463,7 @@
                 <a:ea typeface="Times New Roman" pitchFamily="34" charset="-122"/>
                 <a:cs typeface="Times New Roman" pitchFamily="34" charset="-120"/>
               </a:rPr>
-              <a:t>Activity 3: Question</a:t>
+              <a:t>Activity 2: Answer 2</a:t>
             </a:r>
             <a:endParaRPr lang="en-US" sz="3600" dirty="0"/>
           </a:p>
@@ -10055,7 +10505,7 @@
                 <a:ea typeface="Times New Roman" pitchFamily="34" charset="-122"/>
                 <a:cs typeface="Times New Roman" pitchFamily="34" charset="-120"/>
               </a:rPr>
-              <a:t>These high waves take sand away from the beach. What type of waves are they?</a:t>
+              <a:t>The backwash.</a:t>
             </a:r>
             <a:endParaRPr lang="en-US" sz="4000" dirty="0"/>
           </a:p>
@@ -10173,9 +10623,48 @@
           </a:p>
         </p:txBody>
       </p:sp>
+      <p:sp>
+        <p:nvSpPr>
+          <p:cNvPr id="3" name="Text 1"/>
+          <p:cNvSpPr/>
+          <p:nvPr/>
+        </p:nvSpPr>
+        <p:spPr>
+          <a:xfrm>
+            <a:off x="457200" y="1005840"/>
+            <a:ext cx="11277295" cy="731520"/>
+          </a:xfrm>
+          <a:prstGeom prst="rect">
+            <a:avLst/>
+          </a:prstGeom>
+          <a:noFill/>
+          <a:ln/>
+        </p:spPr>
+        <p:txBody>
+          <a:bodyPr wrap="square" lIns="0" tIns="0" rIns="0" bIns="0" rtlCol="0" anchor="ctr"/>
+          <a:lstStyle/>
+          <a:p>
+            <a:pPr algn="ctr" indent="0" marL="0">
+              <a:buNone/>
+            </a:pPr>
+            <a:r>
+              <a:rPr lang="en-US" sz="3600" b="1" dirty="0">
+                <a:solidFill>
+                  <a:srgbClr val="990011"/>
+                </a:solidFill>
+                <a:latin typeface="Times New Roman" pitchFamily="34" charset="0"/>
+                <a:ea typeface="Times New Roman" pitchFamily="34" charset="-122"/>
+                <a:cs typeface="Times New Roman" pitchFamily="34" charset="-120"/>
+              </a:rPr>
+              <a:t>Activity 3</a:t>
+            </a:r>
+            <a:endParaRPr lang="en-US" sz="3600" dirty="0"/>
+          </a:p>
+        </p:txBody>
+      </p:sp>
       <p:pic>
         <p:nvPicPr>
-          <p:cNvPr id="3" name="Image 0" descr="/home/claude/f4/img/minesec_sheet.png">    </p:cNvPr>
+          <p:cNvPr id="4" name="Image 0" descr="/home/claude/f4/img/v2/f4_bigwaves.jpg">    </p:cNvPr>
           <p:cNvPicPr>
             <a:picLocks noChangeAspect="1"/>
           </p:cNvPicPr>
@@ -10189,8 +10678,8 @@
         </p:blipFill>
         <p:spPr>
           <a:xfrm>
-            <a:off x="0" y="658368"/>
-            <a:ext cx="5120640" cy="5833872"/>
+            <a:off x="2246610" y="1783080"/>
+            <a:ext cx="7698475" cy="4270248"/>
           </a:xfrm>
           <a:prstGeom prst="rect">
             <a:avLst/>
@@ -10199,14 +10688,14 @@
       </p:pic>
       <p:sp>
         <p:nvSpPr>
-          <p:cNvPr id="4" name="Text 1"/>
+          <p:cNvPr id="5" name="Text 2"/>
           <p:cNvSpPr/>
           <p:nvPr/>
         </p:nvSpPr>
         <p:spPr>
           <a:xfrm>
-            <a:off x="5349240" y="1005840"/>
-            <a:ext cx="6522415" cy="731520"/>
+            <a:off x="457200" y="6089904"/>
+            <a:ext cx="11277295" cy="347472"/>
           </a:xfrm>
           <a:prstGeom prst="rect">
             <a:avLst/>
@@ -10215,68 +10704,24 @@
           <a:ln/>
         </p:spPr>
         <p:txBody>
-          <a:bodyPr wrap="square" lIns="0" tIns="0" rIns="0" bIns="0" rtlCol="0" anchor="ctr">
-            <a:normAutofit/>
-          </a:bodyPr>
+          <a:bodyPr wrap="square" lIns="0" tIns="0" rIns="0" bIns="0" rtlCol="0" anchor="ctr"/>
           <a:lstStyle/>
           <a:p>
             <a:pPr algn="ctr" indent="0" marL="0">
               <a:buNone/>
             </a:pPr>
             <a:r>
-              <a:rPr lang="en-US" sz="3600" b="1" dirty="0">
-                <a:solidFill>
-                  <a:srgbClr val="990011"/>
+              <a:rPr lang="en-US" sz="1800" i="1" dirty="0">
+                <a:solidFill>
+                  <a:srgbClr val="555555"/>
                 </a:solidFill>
                 <a:latin typeface="Times New Roman" pitchFamily="34" charset="0"/>
                 <a:ea typeface="Times New Roman" pitchFamily="34" charset="-122"/>
                 <a:cs typeface="Times New Roman" pitchFamily="34" charset="-120"/>
               </a:rPr>
-              <a:t>Activity 3: Answer</a:t>
-            </a:r>
-            <a:endParaRPr lang="en-US" sz="3600" dirty="0"/>
-          </a:p>
-        </p:txBody>
-      </p:sp>
-      <p:sp>
-        <p:nvSpPr>
-          <p:cNvPr id="5" name="Text 2"/>
-          <p:cNvSpPr/>
-          <p:nvPr/>
-        </p:nvSpPr>
-        <p:spPr>
-          <a:xfrm>
-            <a:off x="5349240" y="1783080"/>
-            <a:ext cx="6522415" cy="4663440"/>
-          </a:xfrm>
-          <a:prstGeom prst="rect">
-            <a:avLst/>
-          </a:prstGeom>
-          <a:noFill/>
-          <a:ln/>
-        </p:spPr>
-        <p:txBody>
-          <a:bodyPr wrap="square" lIns="0" tIns="0" rIns="0" bIns="0" rtlCol="0" anchor="t"/>
-          <a:lstStyle/>
-          <a:p>
-            <a:pPr algn="l" indent="0" marL="0">
-              <a:spcAft>
-                <a:spcPts val="800"/>
-              </a:spcAft>
-              <a:buNone/>
-            </a:pPr>
-            <a:r>
-              <a:rPr lang="en-US" sz="4000" dirty="0">
-                <a:solidFill>
-                  <a:srgbClr val="111111"/>
-                </a:solidFill>
-                <a:latin typeface="Times New Roman" pitchFamily="34" charset="0"/>
-                <a:ea typeface="Times New Roman" pitchFamily="34" charset="-122"/>
-                <a:cs typeface="Times New Roman" pitchFamily="34" charset="-120"/>
-              </a:rPr>
-              <a:t>Destructive waves.</a:t>
-            </a:r>
-            <a:endParaRPr lang="en-US" sz="4000" dirty="0"/>
+              <a:t>High waves on a beach.</a:t>
+            </a:r>
+            <a:endParaRPr lang="en-US" sz="1800" dirty="0"/>
           </a:p>
         </p:txBody>
       </p:sp>
@@ -10386,7 +10831,7 @@
                 <a:ea typeface="Calibri" pitchFamily="34" charset="-122"/>
                 <a:cs typeface="Calibri" pitchFamily="34" charset="-120"/>
               </a:rPr>
-              <a:t>BOARD SUMMARY</a:t>
+              <a:t>2. TYPES OF WAVES</a:t>
             </a:r>
             <a:endParaRPr lang="en-US" sz="1400" dirty="0"/>
           </a:p>
@@ -10451,7 +10896,7 @@
                 <a:ea typeface="Times New Roman" pitchFamily="34" charset="-122"/>
                 <a:cs typeface="Times New Roman" pitchFamily="34" charset="-120"/>
               </a:rPr>
-              <a:t>Board Summary</a:t>
+              <a:t>Activity 3: Question</a:t>
             </a:r>
             <a:endParaRPr lang="en-US" sz="3600" dirty="0"/>
           </a:p>
@@ -10485,7 +10930,7 @@
               <a:buNone/>
             </a:pPr>
             <a:r>
-              <a:rPr lang="en-US" sz="4000" b="1" dirty="0">
+              <a:rPr lang="en-US" sz="4000" dirty="0">
                 <a:solidFill>
                   <a:srgbClr val="111111"/>
                 </a:solidFill>
@@ -10493,47 +10938,7 @@
                 <a:ea typeface="Times New Roman" pitchFamily="34" charset="-122"/>
                 <a:cs typeface="Times New Roman" pitchFamily="34" charset="-120"/>
               </a:rPr>
-              <a:t>Topic: Denudation Processes, Landforms and Impacts on Man</a:t>
-            </a:r>
-            <a:endParaRPr lang="en-US" sz="4000" dirty="0"/>
-          </a:p>
-          <a:p>
-            <a:pPr algn="l" indent="0" marL="0">
-              <a:spcAft>
-                <a:spcPts val="800"/>
-              </a:spcAft>
-              <a:buNone/>
-            </a:pPr>
-            <a:r>
-              <a:rPr lang="en-US" sz="4000" b="1" dirty="0">
-                <a:solidFill>
-                  <a:srgbClr val="111111"/>
-                </a:solidFill>
-                <a:latin typeface="Times New Roman" pitchFamily="34" charset="0"/>
-                <a:ea typeface="Times New Roman" pitchFamily="34" charset="-122"/>
-                <a:cs typeface="Times New Roman" pitchFamily="34" charset="-120"/>
-              </a:rPr>
-              <a:t>Sub-topic: Wave Action along the Coast and Impacts on Man</a:t>
-            </a:r>
-            <a:endParaRPr lang="en-US" sz="4000" dirty="0"/>
-          </a:p>
-          <a:p>
-            <a:pPr algn="l" indent="0" marL="0">
-              <a:spcAft>
-                <a:spcPts val="800"/>
-              </a:spcAft>
-              <a:buNone/>
-            </a:pPr>
-            <a:r>
-              <a:rPr lang="en-US" sz="4000" b="1" dirty="0">
-                <a:solidFill>
-                  <a:srgbClr val="990011"/>
-                </a:solidFill>
-                <a:latin typeface="Times New Roman" pitchFamily="34" charset="0"/>
-                <a:ea typeface="Times New Roman" pitchFamily="34" charset="-122"/>
-                <a:cs typeface="Times New Roman" pitchFamily="34" charset="-120"/>
-              </a:rPr>
-              <a:t>Lesson 23: Wave Action in Coastal Areas</a:t>
+              <a:t>These high waves take sand away from the beach. What type of waves are they?</a:t>
             </a:r>
             <a:endParaRPr lang="en-US" sz="4000" dirty="0"/>
           </a:p>
@@ -10645,7 +11050,7 @@
                 <a:ea typeface="Calibri" pitchFamily="34" charset="-122"/>
                 <a:cs typeface="Calibri" pitchFamily="34" charset="-120"/>
               </a:rPr>
-              <a:t>BOARD SUMMARY</a:t>
+              <a:t>2. TYPES OF WAVES</a:t>
             </a:r>
             <a:endParaRPr lang="en-US" sz="1400" dirty="0"/>
           </a:p>
@@ -10668,7 +11073,7 @@
         <p:spPr>
           <a:xfrm>
             <a:off x="0" y="658368"/>
-            <a:ext cx="3840480" cy="5833872"/>
+            <a:ext cx="5120640" cy="5833872"/>
           </a:xfrm>
           <a:prstGeom prst="rect">
             <a:avLst/>
@@ -10683,8 +11088,8 @@
         </p:nvSpPr>
         <p:spPr>
           <a:xfrm>
-            <a:off x="4069080" y="1005840"/>
-            <a:ext cx="7802575" cy="731520"/>
+            <a:off x="5349240" y="1005840"/>
+            <a:ext cx="6522415" cy="731520"/>
           </a:xfrm>
           <a:prstGeom prst="rect">
             <a:avLst/>
@@ -10710,7 +11115,7 @@
                 <a:ea typeface="Times New Roman" pitchFamily="34" charset="-122"/>
                 <a:cs typeface="Times New Roman" pitchFamily="34" charset="-120"/>
               </a:rPr>
-              <a:t>1. Meaning of Waves</a:t>
+              <a:t>Activity 3: Answer</a:t>
             </a:r>
             <a:endParaRPr lang="en-US" sz="3600" dirty="0"/>
           </a:p>
@@ -10724,8 +11129,8 @@
         </p:nvSpPr>
         <p:spPr>
           <a:xfrm>
-            <a:off x="4069080" y="1783080"/>
-            <a:ext cx="7802575" cy="4663440"/>
+            <a:off x="5349240" y="1783080"/>
+            <a:ext cx="6522415" cy="4663440"/>
           </a:xfrm>
           <a:prstGeom prst="rect">
             <a:avLst/>
@@ -10744,7 +11149,7 @@
               <a:buNone/>
             </a:pPr>
             <a:r>
-              <a:rPr lang="en-US" sz="4000" i="1" dirty="0">
+              <a:rPr lang="en-US" sz="4000" dirty="0">
                 <a:solidFill>
                   <a:srgbClr val="111111"/>
                 </a:solidFill>
@@ -10752,81 +11157,7 @@
                 <a:ea typeface="Times New Roman" pitchFamily="34" charset="-122"/>
                 <a:cs typeface="Times New Roman" pitchFamily="34" charset="-120"/>
               </a:rPr>
-              <a:t>Waves and their parts are defined as follows:</a:t>
-            </a:r>
-            <a:endParaRPr lang="en-US" sz="4000" dirty="0"/>
-          </a:p>
-          <a:p>
-            <a:pPr algn="l" indent="0" marL="0">
-              <a:spcAft>
-                <a:spcPts val="800"/>
-              </a:spcAft>
-              <a:buNone/>
-            </a:pPr>
-            <a:r>
-              <a:rPr lang="en-US" sz="4000" b="1" dirty="0">
-                <a:solidFill>
-                  <a:srgbClr val="111111"/>
-                </a:solidFill>
-                <a:latin typeface="Times New Roman" pitchFamily="34" charset="0"/>
-                <a:ea typeface="Times New Roman" pitchFamily="34" charset="-122"/>
-                <a:cs typeface="Times New Roman" pitchFamily="34" charset="-120"/>
-              </a:rPr>
-              <a:t>Wave: </a:t>
-            </a:r>
-            <a:pPr algn="l" indent="0" marL="0">
-              <a:spcAft>
-                <a:spcPts val="800"/>
-              </a:spcAft>
-              <a:buNone/>
-            </a:pPr>
-            <a:r>
-              <a:rPr lang="en-US" sz="4000" dirty="0">
-                <a:solidFill>
-                  <a:srgbClr val="111111"/>
-                </a:solidFill>
-                <a:latin typeface="Times New Roman" pitchFamily="34" charset="0"/>
-                <a:ea typeface="Times New Roman" pitchFamily="34" charset="-122"/>
-                <a:cs typeface="Times New Roman" pitchFamily="34" charset="-120"/>
-              </a:rPr>
-              <a:t>It is a movement of the surface water of the sea caused by the wind.</a:t>
-            </a:r>
-            <a:endParaRPr lang="en-US" sz="4000" dirty="0"/>
-          </a:p>
-          <a:p>
-            <a:pPr algn="l" indent="0" marL="0">
-              <a:spcAft>
-                <a:spcPts val="800"/>
-              </a:spcAft>
-              <a:buNone/>
-            </a:pPr>
-            <a:r>
-              <a:rPr lang="en-US" sz="4000" b="1" dirty="0">
-                <a:solidFill>
-                  <a:srgbClr val="111111"/>
-                </a:solidFill>
-                <a:latin typeface="Times New Roman" pitchFamily="34" charset="0"/>
-                <a:ea typeface="Times New Roman" pitchFamily="34" charset="-122"/>
-                <a:cs typeface="Times New Roman" pitchFamily="34" charset="-120"/>
-              </a:rPr>
-              <a:t>Swash: </a:t>
-            </a:r>
-            <a:pPr algn="l" indent="0" marL="0">
-              <a:spcAft>
-                <a:spcPts val="800"/>
-              </a:spcAft>
-              <a:buNone/>
-            </a:pPr>
-            <a:r>
-              <a:rPr lang="en-US" sz="4000" dirty="0">
-                <a:solidFill>
-                  <a:srgbClr val="111111"/>
-                </a:solidFill>
-                <a:latin typeface="Times New Roman" pitchFamily="34" charset="0"/>
-                <a:ea typeface="Times New Roman" pitchFamily="34" charset="-122"/>
-                <a:cs typeface="Times New Roman" pitchFamily="34" charset="-120"/>
-              </a:rPr>
-              <a:t>It is the water that rushes up the beach after a wave breaks.</a:t>
+              <a:t>Destructive waves.</a:t>
             </a:r>
             <a:endParaRPr lang="en-US" sz="4000" dirty="0"/>
           </a:p>
@@ -12012,7 +12343,7 @@
                 <a:ea typeface="Times New Roman" pitchFamily="34" charset="-122"/>
                 <a:cs typeface="Times New Roman" pitchFamily="34" charset="-120"/>
               </a:rPr>
-              <a:t>1. Meaning of Waves (continued)</a:t>
+              <a:t>Board Summary</a:t>
             </a:r>
             <a:endParaRPr lang="en-US" sz="3600" dirty="0"/>
           </a:p>
@@ -12046,7 +12377,7 @@
               <a:buNone/>
             </a:pPr>
             <a:r>
-              <a:rPr lang="en-US" sz="4000" b="1" dirty="0">
+              <a:rPr lang="en-US" sz="3200" b="1" dirty="0">
                 <a:solidFill>
                   <a:srgbClr val="111111"/>
                 </a:solidFill>
@@ -12054,8 +12385,11 @@
                 <a:ea typeface="Times New Roman" pitchFamily="34" charset="-122"/>
                 <a:cs typeface="Times New Roman" pitchFamily="34" charset="-120"/>
               </a:rPr>
-              <a:t>Backwash: </a:t>
-            </a:r>
+              <a:t>Topic: Denudation Processes, Landforms and Impacts on Man</a:t>
+            </a:r>
+            <a:endParaRPr lang="en-US" sz="3200" dirty="0"/>
+          </a:p>
+          <a:p>
             <a:pPr algn="l" indent="0" marL="0">
               <a:spcAft>
                 <a:spcPts val="800"/>
@@ -12063,7 +12397,7 @@
               <a:buNone/>
             </a:pPr>
             <a:r>
-              <a:rPr lang="en-US" sz="4000" dirty="0">
+              <a:rPr lang="en-US" sz="3200" b="1" dirty="0">
                 <a:solidFill>
                   <a:srgbClr val="111111"/>
                 </a:solidFill>
@@ -12071,9 +12405,9 @@
                 <a:ea typeface="Times New Roman" pitchFamily="34" charset="-122"/>
                 <a:cs typeface="Times New Roman" pitchFamily="34" charset="-120"/>
               </a:rPr>
-              <a:t>It is the water that flows back down the beach to the sea.</a:t>
-            </a:r>
-            <a:endParaRPr lang="en-US" sz="4000" dirty="0"/>
+              <a:t>Sub-topic: Wave Action along the Coast and Impacts on Man</a:t>
+            </a:r>
+            <a:endParaRPr lang="en-US" sz="3200" dirty="0"/>
           </a:p>
           <a:p>
             <a:pPr algn="l" indent="0" marL="0">
@@ -12083,34 +12417,17 @@
               <a:buNone/>
             </a:pPr>
             <a:r>
-              <a:rPr lang="en-US" sz="4000" b="1" dirty="0">
-                <a:solidFill>
-                  <a:srgbClr val="111111"/>
+              <a:rPr lang="en-US" sz="3200" b="1" dirty="0">
+                <a:solidFill>
+                  <a:srgbClr val="990011"/>
                 </a:solidFill>
                 <a:latin typeface="Times New Roman" pitchFamily="34" charset="0"/>
                 <a:ea typeface="Times New Roman" pitchFamily="34" charset="-122"/>
                 <a:cs typeface="Times New Roman" pitchFamily="34" charset="-120"/>
               </a:rPr>
-              <a:t>Fetch: </a:t>
-            </a:r>
-            <a:pPr algn="l" indent="0" marL="0">
-              <a:spcAft>
-                <a:spcPts val="800"/>
-              </a:spcAft>
-              <a:buNone/>
-            </a:pPr>
-            <a:r>
-              <a:rPr lang="en-US" sz="4000" dirty="0">
-                <a:solidFill>
-                  <a:srgbClr val="111111"/>
-                </a:solidFill>
-                <a:latin typeface="Times New Roman" pitchFamily="34" charset="0"/>
-                <a:ea typeface="Times New Roman" pitchFamily="34" charset="-122"/>
-                <a:cs typeface="Times New Roman" pitchFamily="34" charset="-120"/>
-              </a:rPr>
-              <a:t>It is the distance of open sea over which the wind blows.</a:t>
-            </a:r>
-            <a:endParaRPr lang="en-US" sz="4000" dirty="0"/>
+              <a:t>Lesson 23: Wave Action in Coastal Areas</a:t>
+            </a:r>
+            <a:endParaRPr lang="en-US" sz="3200" dirty="0"/>
           </a:p>
         </p:txBody>
       </p:sp>
@@ -12243,7 +12560,7 @@
         <p:spPr>
           <a:xfrm>
             <a:off x="0" y="658368"/>
-            <a:ext cx="3840480" cy="5833872"/>
+            <a:ext cx="2468880" cy="5833872"/>
           </a:xfrm>
           <a:prstGeom prst="rect">
             <a:avLst/>
@@ -12258,8 +12575,8 @@
         </p:nvSpPr>
         <p:spPr>
           <a:xfrm>
-            <a:off x="4069080" y="1005840"/>
-            <a:ext cx="7802575" cy="731520"/>
+            <a:off x="2697480" y="1005840"/>
+            <a:ext cx="9174175" cy="731520"/>
           </a:xfrm>
           <a:prstGeom prst="rect">
             <a:avLst/>
@@ -12285,7 +12602,7 @@
                 <a:ea typeface="Times New Roman" pitchFamily="34" charset="-122"/>
                 <a:cs typeface="Times New Roman" pitchFamily="34" charset="-120"/>
               </a:rPr>
-              <a:t>2. Strength of Waves</a:t>
+              <a:t>DEFINITIONS</a:t>
             </a:r>
             <a:endParaRPr lang="en-US" sz="3600" dirty="0"/>
           </a:p>
@@ -12299,8 +12616,8 @@
         </p:nvSpPr>
         <p:spPr>
           <a:xfrm>
-            <a:off x="4069080" y="1783080"/>
-            <a:ext cx="7802575" cy="4663440"/>
+            <a:off x="2697480" y="1783080"/>
+            <a:ext cx="9174175" cy="4663440"/>
           </a:xfrm>
           <a:prstGeom prst="rect">
             <a:avLst/>
@@ -12327,7 +12644,7 @@
                 <a:ea typeface="Times New Roman" pitchFamily="34" charset="-122"/>
                 <a:cs typeface="Times New Roman" pitchFamily="34" charset="-120"/>
               </a:rPr>
-              <a:t>The strength of waves depends on the following factors:</a:t>
+              <a:t>The key terms of this lesson are defined as follows:</a:t>
             </a:r>
             <a:endParaRPr lang="en-US" sz="4000" dirty="0"/>
           </a:p>
@@ -12347,7 +12664,7 @@
                 <a:ea typeface="Times New Roman" pitchFamily="34" charset="-122"/>
                 <a:cs typeface="Times New Roman" pitchFamily="34" charset="-120"/>
               </a:rPr>
-              <a:t>Wind speed: </a:t>
+              <a:t>Wave: </a:t>
             </a:r>
             <a:pPr algn="l" indent="0" marL="0">
               <a:spcAft>
@@ -12364,7 +12681,7 @@
                 <a:ea typeface="Times New Roman" pitchFamily="34" charset="-122"/>
                 <a:cs typeface="Times New Roman" pitchFamily="34" charset="-120"/>
               </a:rPr>
-              <a:t>A stronger wind makes bigger waves.</a:t>
+              <a:t>It is an up-and-down movement of the surface water of the sea, caused mainly by the wind.</a:t>
             </a:r>
             <a:endParaRPr lang="en-US" sz="4000" dirty="0"/>
           </a:p>
@@ -12384,7 +12701,7 @@
                 <a:ea typeface="Times New Roman" pitchFamily="34" charset="-122"/>
                 <a:cs typeface="Times New Roman" pitchFamily="34" charset="-120"/>
               </a:rPr>
-              <a:t>Duration: </a:t>
+              <a:t>Swash: </a:t>
             </a:r>
             <a:pPr algn="l" indent="0" marL="0">
               <a:spcAft>
@@ -12401,7 +12718,7 @@
                 <a:ea typeface="Times New Roman" pitchFamily="34" charset="-122"/>
                 <a:cs typeface="Times New Roman" pitchFamily="34" charset="-120"/>
               </a:rPr>
-              <a:t>The longer the wind blows, the bigger the waves.</a:t>
+              <a:t>It is the water that rushes up the beach after a wave breaks.</a:t>
             </a:r>
             <a:endParaRPr lang="en-US" sz="4000" dirty="0"/>
           </a:p>
@@ -12578,7 +12895,7 @@
                 <a:ea typeface="Times New Roman" pitchFamily="34" charset="-122"/>
                 <a:cs typeface="Times New Roman" pitchFamily="34" charset="-120"/>
               </a:rPr>
-              <a:t>2. Strength of Waves (continued)</a:t>
+              <a:t>DEFINITIONS (continued)</a:t>
             </a:r>
             <a:endParaRPr lang="en-US" sz="3600" dirty="0"/>
           </a:p>
@@ -12620,7 +12937,7 @@
                 <a:ea typeface="Times New Roman" pitchFamily="34" charset="-122"/>
                 <a:cs typeface="Times New Roman" pitchFamily="34" charset="-120"/>
               </a:rPr>
-              <a:t>Fetch: </a:t>
+              <a:t>Backwash: </a:t>
             </a:r>
             <a:pPr algn="l" indent="0" marL="0">
               <a:spcAft>
@@ -12637,7 +12954,44 @@
                 <a:ea typeface="Times New Roman" pitchFamily="34" charset="-122"/>
                 <a:cs typeface="Times New Roman" pitchFamily="34" charset="-120"/>
               </a:rPr>
-              <a:t>A long fetch gives big and powerful waves.</a:t>
+              <a:t>It is the water that flows back down the beach to the sea.</a:t>
+            </a:r>
+            <a:endParaRPr lang="en-US" sz="4000" dirty="0"/>
+          </a:p>
+          <a:p>
+            <a:pPr algn="l" indent="0" marL="0">
+              <a:spcAft>
+                <a:spcPts val="800"/>
+              </a:spcAft>
+              <a:buNone/>
+            </a:pPr>
+            <a:r>
+              <a:rPr lang="en-US" sz="4000" b="1" dirty="0">
+                <a:solidFill>
+                  <a:srgbClr val="111111"/>
+                </a:solidFill>
+                <a:latin typeface="Times New Roman" pitchFamily="34" charset="0"/>
+                <a:ea typeface="Times New Roman" pitchFamily="34" charset="-122"/>
+                <a:cs typeface="Times New Roman" pitchFamily="34" charset="-120"/>
+              </a:rPr>
+              <a:t>Fetch: </a:t>
+            </a:r>
+            <a:pPr algn="l" indent="0" marL="0">
+              <a:spcAft>
+                <a:spcPts val="800"/>
+              </a:spcAft>
+              <a:buNone/>
+            </a:pPr>
+            <a:r>
+              <a:rPr lang="en-US" sz="4000" dirty="0">
+                <a:solidFill>
+                  <a:srgbClr val="111111"/>
+                </a:solidFill>
+                <a:latin typeface="Times New Roman" pitchFamily="34" charset="0"/>
+                <a:ea typeface="Times New Roman" pitchFamily="34" charset="-122"/>
+                <a:cs typeface="Times New Roman" pitchFamily="34" charset="-120"/>
+              </a:rPr>
+              <a:t>It is the distance of open sea over which the wind blows.</a:t>
             </a:r>
             <a:endParaRPr lang="en-US" sz="4000" dirty="0"/>
           </a:p>
@@ -12755,9 +13109,170 @@
           </a:p>
         </p:txBody>
       </p:sp>
+      <p:sp>
+        <p:nvSpPr>
+          <p:cNvPr id="3" name="Text 1"/>
+          <p:cNvSpPr/>
+          <p:nvPr/>
+        </p:nvSpPr>
+        <p:spPr>
+          <a:xfrm>
+            <a:off x="365760" y="1005840"/>
+            <a:ext cx="11460175" cy="731520"/>
+          </a:xfrm>
+          <a:prstGeom prst="rect">
+            <a:avLst/>
+          </a:prstGeom>
+          <a:noFill/>
+          <a:ln/>
+        </p:spPr>
+        <p:txBody>
+          <a:bodyPr wrap="square" lIns="0" tIns="0" rIns="0" bIns="0" rtlCol="0" anchor="ctr">
+            <a:normAutofit/>
+          </a:bodyPr>
+          <a:lstStyle/>
+          <a:p>
+            <a:pPr algn="ctr" indent="0" marL="0">
+              <a:buNone/>
+            </a:pPr>
+            <a:r>
+              <a:rPr lang="en-US" sz="3600" b="1" dirty="0">
+                <a:solidFill>
+                  <a:srgbClr val="990011"/>
+                </a:solidFill>
+                <a:latin typeface="Times New Roman" pitchFamily="34" charset="0"/>
+                <a:ea typeface="Times New Roman" pitchFamily="34" charset="-122"/>
+                <a:cs typeface="Times New Roman" pitchFamily="34" charset="-120"/>
+              </a:rPr>
+              <a:t>1. Meaning of Waves</a:t>
+            </a:r>
+            <a:endParaRPr lang="en-US" sz="3600" dirty="0"/>
+          </a:p>
+        </p:txBody>
+      </p:sp>
+      <p:sp>
+        <p:nvSpPr>
+          <p:cNvPr id="4" name="Text 2"/>
+          <p:cNvSpPr/>
+          <p:nvPr/>
+        </p:nvSpPr>
+        <p:spPr>
+          <a:xfrm>
+            <a:off x="365760" y="1737360"/>
+            <a:ext cx="5120640" cy="457200"/>
+          </a:xfrm>
+          <a:prstGeom prst="rect">
+            <a:avLst/>
+          </a:prstGeom>
+          <a:noFill/>
+          <a:ln/>
+        </p:spPr>
+        <p:txBody>
+          <a:bodyPr wrap="square" lIns="0" tIns="0" rIns="0" bIns="0" rtlCol="0" anchor="ctr">
+            <a:normAutofit/>
+          </a:bodyPr>
+          <a:lstStyle/>
+          <a:p>
+            <a:pPr algn="l" indent="0" marL="0">
+              <a:buNone/>
+            </a:pPr>
+            <a:r>
+              <a:rPr lang="en-US" sz="3000" b="1" dirty="0">
+                <a:solidFill>
+                  <a:srgbClr val="990011"/>
+                </a:solidFill>
+                <a:latin typeface="Times New Roman" pitchFamily="34" charset="0"/>
+                <a:ea typeface="Times New Roman" pitchFamily="34" charset="-122"/>
+                <a:cs typeface="Times New Roman" pitchFamily="34" charset="-120"/>
+              </a:rPr>
+              <a:t>A) Formation of Waves</a:t>
+            </a:r>
+            <a:endParaRPr lang="en-US" sz="3000" dirty="0"/>
+          </a:p>
+        </p:txBody>
+      </p:sp>
+      <p:sp>
+        <p:nvSpPr>
+          <p:cNvPr id="5" name="Text 3"/>
+          <p:cNvSpPr/>
+          <p:nvPr/>
+        </p:nvSpPr>
+        <p:spPr>
+          <a:xfrm>
+            <a:off x="365760" y="2240280"/>
+            <a:ext cx="4846320" cy="4160520"/>
+          </a:xfrm>
+          <a:prstGeom prst="rect">
+            <a:avLst/>
+          </a:prstGeom>
+          <a:noFill/>
+          <a:ln/>
+        </p:spPr>
+        <p:txBody>
+          <a:bodyPr wrap="square" lIns="0" tIns="0" rIns="0" bIns="0" rtlCol="0" anchor="t"/>
+          <a:lstStyle/>
+          <a:p>
+            <a:pPr algn="l" indent="0" marL="0">
+              <a:spcAft>
+                <a:spcPts val="800"/>
+              </a:spcAft>
+              <a:buNone/>
+            </a:pPr>
+            <a:r>
+              <a:rPr lang="en-US" sz="3600" i="1" dirty="0">
+                <a:solidFill>
+                  <a:srgbClr val="111111"/>
+                </a:solidFill>
+                <a:latin typeface="Times New Roman" pitchFamily="34" charset="0"/>
+                <a:ea typeface="Times New Roman" pitchFamily="34" charset="-122"/>
+                <a:cs typeface="Times New Roman" pitchFamily="34" charset="-120"/>
+              </a:rPr>
+              <a:t>Waves are formed as follows:</a:t>
+            </a:r>
+            <a:endParaRPr lang="en-US" sz="3600" dirty="0"/>
+          </a:p>
+          <a:p>
+            <a:pPr algn="l" indent="0" marL="0">
+              <a:spcAft>
+                <a:spcPts val="800"/>
+              </a:spcAft>
+              <a:buNone/>
+            </a:pPr>
+            <a:r>
+              <a:rPr lang="en-US" sz="3600" b="1" dirty="0">
+                <a:solidFill>
+                  <a:srgbClr val="111111"/>
+                </a:solidFill>
+                <a:latin typeface="Times New Roman" pitchFamily="34" charset="0"/>
+                <a:ea typeface="Times New Roman" pitchFamily="34" charset="-122"/>
+                <a:cs typeface="Times New Roman" pitchFamily="34" charset="-120"/>
+              </a:rPr>
+              <a:t>Wind friction: </a:t>
+            </a:r>
+            <a:pPr algn="l" indent="0" marL="0">
+              <a:spcAft>
+                <a:spcPts val="800"/>
+              </a:spcAft>
+              <a:buNone/>
+            </a:pPr>
+            <a:r>
+              <a:rPr lang="en-US" sz="3600" dirty="0">
+                <a:solidFill>
+                  <a:srgbClr val="111111"/>
+                </a:solidFill>
+                <a:latin typeface="Times New Roman" pitchFamily="34" charset="0"/>
+                <a:ea typeface="Times New Roman" pitchFamily="34" charset="-122"/>
+                <a:cs typeface="Times New Roman" pitchFamily="34" charset="-120"/>
+              </a:rPr>
+              <a:t>The wind blowing over the sea drags the surface water and makes it rise and fall.</a:t>
+            </a:r>
+            <a:endParaRPr lang="en-US" sz="3600" dirty="0"/>
+          </a:p>
+        </p:txBody>
+      </p:sp>
       <p:pic>
         <p:nvPicPr>
-          <p:cNvPr id="3" name="Image 0" descr="/home/claude/f4/img/minesec_sheet.png">    </p:cNvPr>
+          <p:cNvPr id="6" name="Image 0" descr="/home/claude/f4/img/v2/f4_waves.jpg">    </p:cNvPr>
           <p:cNvPicPr>
             <a:picLocks noChangeAspect="1"/>
           </p:cNvPicPr>
@@ -12771,8 +13286,8 @@
         </p:blipFill>
         <p:spPr>
           <a:xfrm>
-            <a:off x="0" y="658368"/>
-            <a:ext cx="3840480" cy="5833872"/>
+            <a:off x="5349240" y="2071212"/>
+            <a:ext cx="6659575" cy="3693983"/>
           </a:xfrm>
           <a:prstGeom prst="rect">
             <a:avLst/>
@@ -12781,14 +13296,14 @@
       </p:pic>
       <p:sp>
         <p:nvSpPr>
-          <p:cNvPr id="4" name="Text 1"/>
+          <p:cNvPr id="7" name="Text 4"/>
           <p:cNvSpPr/>
           <p:nvPr/>
         </p:nvSpPr>
         <p:spPr>
           <a:xfrm>
-            <a:off x="4069080" y="1005840"/>
-            <a:ext cx="7802575" cy="731520"/>
+            <a:off x="5349240" y="6089904"/>
+            <a:ext cx="6659575" cy="347472"/>
           </a:xfrm>
           <a:prstGeom prst="rect">
             <a:avLst/>
@@ -12797,142 +13312,24 @@
           <a:ln/>
         </p:spPr>
         <p:txBody>
-          <a:bodyPr wrap="square" lIns="0" tIns="0" rIns="0" bIns="0" rtlCol="0" anchor="ctr">
-            <a:normAutofit/>
-          </a:bodyPr>
+          <a:bodyPr wrap="square" lIns="0" tIns="0" rIns="0" bIns="0" rtlCol="0" anchor="ctr"/>
           <a:lstStyle/>
           <a:p>
             <a:pPr algn="ctr" indent="0" marL="0">
               <a:buNone/>
             </a:pPr>
             <a:r>
-              <a:rPr lang="en-US" sz="3600" b="1" dirty="0">
-                <a:solidFill>
-                  <a:srgbClr val="990011"/>
+              <a:rPr lang="en-US" sz="1600" i="1" dirty="0">
+                <a:solidFill>
+                  <a:srgbClr val="555555"/>
                 </a:solidFill>
                 <a:latin typeface="Times New Roman" pitchFamily="34" charset="0"/>
                 <a:ea typeface="Times New Roman" pitchFamily="34" charset="-122"/>
                 <a:cs typeface="Times New Roman" pitchFamily="34" charset="-120"/>
               </a:rPr>
-              <a:t>3. Types of Waves</a:t>
-            </a:r>
-            <a:endParaRPr lang="en-US" sz="3600" dirty="0"/>
-          </a:p>
-        </p:txBody>
-      </p:sp>
-      <p:sp>
-        <p:nvSpPr>
-          <p:cNvPr id="5" name="Text 2"/>
-          <p:cNvSpPr/>
-          <p:nvPr/>
-        </p:nvSpPr>
-        <p:spPr>
-          <a:xfrm>
-            <a:off x="4069080" y="1783080"/>
-            <a:ext cx="7802575" cy="4663440"/>
-          </a:xfrm>
-          <a:prstGeom prst="rect">
-            <a:avLst/>
-          </a:prstGeom>
-          <a:noFill/>
-          <a:ln/>
-        </p:spPr>
-        <p:txBody>
-          <a:bodyPr wrap="square" lIns="0" tIns="0" rIns="0" bIns="0" rtlCol="0" anchor="t"/>
-          <a:lstStyle/>
-          <a:p>
-            <a:pPr algn="l" indent="0" marL="0">
-              <a:spcAft>
-                <a:spcPts val="800"/>
-              </a:spcAft>
-              <a:buNone/>
-            </a:pPr>
-            <a:r>
-              <a:rPr lang="en-US" sz="4000" i="1" dirty="0">
-                <a:solidFill>
-                  <a:srgbClr val="111111"/>
-                </a:solidFill>
-                <a:latin typeface="Times New Roman" pitchFamily="34" charset="0"/>
-                <a:ea typeface="Times New Roman" pitchFamily="34" charset="-122"/>
-                <a:cs typeface="Times New Roman" pitchFamily="34" charset="-120"/>
-              </a:rPr>
-              <a:t>There are two types of waves:</a:t>
-            </a:r>
-            <a:endParaRPr lang="en-US" sz="4000" dirty="0"/>
-          </a:p>
-          <a:p>
-            <a:pPr algn="l" indent="0" marL="0">
-              <a:spcAft>
-                <a:spcPts val="800"/>
-              </a:spcAft>
-              <a:buNone/>
-            </a:pPr>
-            <a:r>
-              <a:rPr lang="en-US" sz="4000" b="1" dirty="0">
-                <a:solidFill>
-                  <a:srgbClr val="111111"/>
-                </a:solidFill>
-                <a:latin typeface="Times New Roman" pitchFamily="34" charset="0"/>
-                <a:ea typeface="Times New Roman" pitchFamily="34" charset="-122"/>
-                <a:cs typeface="Times New Roman" pitchFamily="34" charset="-120"/>
-              </a:rPr>
-              <a:t>Constructive waves: </a:t>
-            </a:r>
-            <a:pPr algn="l" indent="0" marL="0">
-              <a:spcAft>
-                <a:spcPts val="800"/>
-              </a:spcAft>
-              <a:buNone/>
-            </a:pPr>
-            <a:r>
-              <a:rPr lang="en-US" sz="4000" dirty="0">
-                <a:solidFill>
-                  <a:srgbClr val="111111"/>
-                </a:solidFill>
-                <a:latin typeface="Times New Roman" pitchFamily="34" charset="0"/>
-                <a:ea typeface="Times New Roman" pitchFamily="34" charset="-122"/>
-                <a:cs typeface="Times New Roman" pitchFamily="34" charset="-120"/>
-              </a:rPr>
-              <a:t>They are low waves with a strong swash, and they build up beaches.</a:t>
-            </a:r>
-            <a:endParaRPr lang="en-US" sz="4000" dirty="0"/>
-          </a:p>
-          <a:p>
-            <a:pPr algn="l" indent="0" marL="0">
-              <a:spcAft>
-                <a:spcPts val="800"/>
-              </a:spcAft>
-              <a:buNone/>
-            </a:pPr>
-            <a:r>
-              <a:rPr lang="en-US" sz="4000" b="1" dirty="0">
-                <a:solidFill>
-                  <a:srgbClr val="111111"/>
-                </a:solidFill>
-                <a:latin typeface="Times New Roman" pitchFamily="34" charset="0"/>
-                <a:ea typeface="Times New Roman" pitchFamily="34" charset="-122"/>
-                <a:cs typeface="Times New Roman" pitchFamily="34" charset="-120"/>
-              </a:rPr>
-              <a:t>Destructive waves: </a:t>
-            </a:r>
-            <a:pPr algn="l" indent="0" marL="0">
-              <a:spcAft>
-                <a:spcPts val="800"/>
-              </a:spcAft>
-              <a:buNone/>
-            </a:pPr>
-            <a:r>
-              <a:rPr lang="en-US" sz="4000" dirty="0">
-                <a:solidFill>
-                  <a:srgbClr val="111111"/>
-                </a:solidFill>
-                <a:latin typeface="Times New Roman" pitchFamily="34" charset="0"/>
-                <a:ea typeface="Times New Roman" pitchFamily="34" charset="-122"/>
-                <a:cs typeface="Times New Roman" pitchFamily="34" charset="-120"/>
-              </a:rPr>
-              <a:t>They are high waves with a strong backwash, and they erode beaches.</a:t>
-            </a:r>
-            <a:endParaRPr lang="en-US" sz="4000" dirty="0"/>
+              <a:t>Illustration: waves on the sea</a:t>
+            </a:r>
+            <a:endParaRPr lang="en-US" sz="1600" dirty="0"/>
           </a:p>
         </p:txBody>
       </p:sp>
@@ -13048,48 +13445,9 @@
           </a:p>
         </p:txBody>
       </p:sp>
-      <p:sp>
-        <p:nvSpPr>
-          <p:cNvPr id="3" name="Text 1"/>
-          <p:cNvSpPr/>
-          <p:nvPr/>
-        </p:nvSpPr>
-        <p:spPr>
-          <a:xfrm>
-            <a:off x="457200" y="1005840"/>
-            <a:ext cx="11277295" cy="731520"/>
-          </a:xfrm>
-          <a:prstGeom prst="rect">
-            <a:avLst/>
-          </a:prstGeom>
-          <a:noFill/>
-          <a:ln/>
-        </p:spPr>
-        <p:txBody>
-          <a:bodyPr wrap="square" lIns="0" tIns="0" rIns="0" bIns="0" rtlCol="0" anchor="ctr"/>
-          <a:lstStyle/>
-          <a:p>
-            <a:pPr algn="ctr" indent="0" marL="0">
-              <a:buNone/>
-            </a:pPr>
-            <a:r>
-              <a:rPr lang="en-US" sz="3600" b="1" dirty="0">
-                <a:solidFill>
-                  <a:srgbClr val="990011"/>
-                </a:solidFill>
-                <a:latin typeface="Times New Roman" pitchFamily="34" charset="0"/>
-                <a:ea typeface="Times New Roman" pitchFamily="34" charset="-122"/>
-                <a:cs typeface="Times New Roman" pitchFamily="34" charset="-120"/>
-              </a:rPr>
-              <a:t>3. Types of Waves</a:t>
-            </a:r>
-            <a:endParaRPr lang="en-US" sz="3600" dirty="0"/>
-          </a:p>
-        </p:txBody>
-      </p:sp>
       <p:pic>
         <p:nvPicPr>
-          <p:cNvPr id="4" name="Image 0" descr="/home/claude/f4/img/v2/waves_types_big.png">    </p:cNvPr>
+          <p:cNvPr id="3" name="Image 0" descr="/home/claude/f4/img/minesec_sheet.png">    </p:cNvPr>
           <p:cNvPicPr>
             <a:picLocks noChangeAspect="1"/>
           </p:cNvPicPr>
@@ -13103,8 +13461,8 @@
         </p:blipFill>
         <p:spPr>
           <a:xfrm>
-            <a:off x="629930" y="1783080"/>
-            <a:ext cx="10931835" cy="4270248"/>
+            <a:off x="0" y="658368"/>
+            <a:ext cx="5120640" cy="5833872"/>
           </a:xfrm>
           <a:prstGeom prst="rect">
             <a:avLst/>
@@ -13113,14 +13471,14 @@
       </p:pic>
       <p:sp>
         <p:nvSpPr>
-          <p:cNvPr id="5" name="Text 2"/>
+          <p:cNvPr id="4" name="Text 1"/>
           <p:cNvSpPr/>
           <p:nvPr/>
         </p:nvSpPr>
         <p:spPr>
           <a:xfrm>
-            <a:off x="457200" y="6089904"/>
-            <a:ext cx="11277295" cy="347472"/>
+            <a:off x="5349240" y="1005840"/>
+            <a:ext cx="6522415" cy="731520"/>
           </a:xfrm>
           <a:prstGeom prst="rect">
             <a:avLst/>
@@ -13129,24 +13487,124 @@
           <a:ln/>
         </p:spPr>
         <p:txBody>
-          <a:bodyPr wrap="square" lIns="0" tIns="0" rIns="0" bIns="0" rtlCol="0" anchor="ctr"/>
+          <a:bodyPr wrap="square" lIns="0" tIns="0" rIns="0" bIns="0" rtlCol="0" anchor="ctr">
+            <a:normAutofit/>
+          </a:bodyPr>
           <a:lstStyle/>
           <a:p>
             <a:pPr algn="ctr" indent="0" marL="0">
               <a:buNone/>
             </a:pPr>
             <a:r>
-              <a:rPr lang="en-US" sz="1800" i="1" dirty="0">
-                <a:solidFill>
-                  <a:srgbClr val="555555"/>
+              <a:rPr lang="en-US" sz="3600" b="1" dirty="0">
+                <a:solidFill>
+                  <a:srgbClr val="990011"/>
                 </a:solidFill>
                 <a:latin typeface="Times New Roman" pitchFamily="34" charset="0"/>
                 <a:ea typeface="Times New Roman" pitchFamily="34" charset="-122"/>
                 <a:cs typeface="Times New Roman" pitchFamily="34" charset="-120"/>
               </a:rPr>
-              <a:t>Illustration: constructive and destructive waves</a:t>
-            </a:r>
-            <a:endParaRPr lang="en-US" sz="1800" dirty="0"/>
+              <a:t>1. Meaning of Waves</a:t>
+            </a:r>
+            <a:endParaRPr lang="en-US" sz="3600" dirty="0"/>
+          </a:p>
+        </p:txBody>
+      </p:sp>
+      <p:sp>
+        <p:nvSpPr>
+          <p:cNvPr id="5" name="Text 2"/>
+          <p:cNvSpPr/>
+          <p:nvPr/>
+        </p:nvSpPr>
+        <p:spPr>
+          <a:xfrm>
+            <a:off x="5349240" y="1737360"/>
+            <a:ext cx="6522415" cy="457200"/>
+          </a:xfrm>
+          <a:prstGeom prst="rect">
+            <a:avLst/>
+          </a:prstGeom>
+          <a:noFill/>
+          <a:ln/>
+        </p:spPr>
+        <p:txBody>
+          <a:bodyPr wrap="square" lIns="0" tIns="0" rIns="0" bIns="0" rtlCol="0" anchor="ctr"/>
+          <a:lstStyle/>
+          <a:p>
+            <a:pPr algn="l" indent="0" marL="0">
+              <a:buNone/>
+            </a:pPr>
+            <a:r>
+              <a:rPr lang="en-US" sz="3200" b="1" dirty="0">
+                <a:solidFill>
+                  <a:srgbClr val="990011"/>
+                </a:solidFill>
+                <a:latin typeface="Times New Roman" pitchFamily="34" charset="0"/>
+                <a:ea typeface="Times New Roman" pitchFamily="34" charset="-122"/>
+                <a:cs typeface="Times New Roman" pitchFamily="34" charset="-120"/>
+              </a:rPr>
+              <a:t>A) Formation of Waves</a:t>
+            </a:r>
+            <a:endParaRPr lang="en-US" sz="3200" dirty="0"/>
+          </a:p>
+        </p:txBody>
+      </p:sp>
+      <p:sp>
+        <p:nvSpPr>
+          <p:cNvPr id="6" name="Text 3"/>
+          <p:cNvSpPr/>
+          <p:nvPr/>
+        </p:nvSpPr>
+        <p:spPr>
+          <a:xfrm>
+            <a:off x="5349240" y="2240280"/>
+            <a:ext cx="6522415" cy="4206240"/>
+          </a:xfrm>
+          <a:prstGeom prst="rect">
+            <a:avLst/>
+          </a:prstGeom>
+          <a:noFill/>
+          <a:ln/>
+        </p:spPr>
+        <p:txBody>
+          <a:bodyPr wrap="square" lIns="0" tIns="0" rIns="0" bIns="0" rtlCol="0" anchor="t"/>
+          <a:lstStyle/>
+          <a:p>
+            <a:pPr algn="l" indent="0" marL="0">
+              <a:spcAft>
+                <a:spcPts val="800"/>
+              </a:spcAft>
+              <a:buNone/>
+            </a:pPr>
+            <a:r>
+              <a:rPr lang="en-US" sz="4000" b="1" dirty="0">
+                <a:solidFill>
+                  <a:srgbClr val="111111"/>
+                </a:solidFill>
+                <a:latin typeface="Times New Roman" pitchFamily="34" charset="0"/>
+                <a:ea typeface="Times New Roman" pitchFamily="34" charset="-122"/>
+                <a:cs typeface="Times New Roman" pitchFamily="34" charset="-120"/>
+              </a:rPr>
+              <a:t>Breaking: </a:t>
+            </a:r>
+            <a:pPr algn="l" indent="0" marL="0">
+              <a:spcAft>
+                <a:spcPts val="800"/>
+              </a:spcAft>
+              <a:buNone/>
+            </a:pPr>
+            <a:r>
+              <a:rPr lang="en-US" sz="4000" dirty="0">
+                <a:solidFill>
+                  <a:srgbClr val="111111"/>
+                </a:solidFill>
+                <a:latin typeface="Times New Roman" pitchFamily="34" charset="0"/>
+                <a:ea typeface="Times New Roman" pitchFamily="34" charset="-122"/>
+                <a:cs typeface="Times New Roman" pitchFamily="34" charset="-120"/>
+              </a:rPr>
+              <a:t>Near the coast the water becomes shallow, the bottom of the wave slows down, and the top falls forward: the wave breaks.</a:t>
+            </a:r>
+            <a:endParaRPr lang="en-US" sz="4000" dirty="0"/>
           </a:p>
         </p:txBody>
       </p:sp>
@@ -13256,15 +13714,156 @@
                 <a:ea typeface="Calibri" pitchFamily="34" charset="-122"/>
                 <a:cs typeface="Calibri" pitchFamily="34" charset="-120"/>
               </a:rPr>
-              <a:t>FORMATIVE EVALUATION</a:t>
+              <a:t>BOARD SUMMARY</a:t>
             </a:r>
             <a:endParaRPr lang="en-US" sz="1400" dirty="0"/>
+          </a:p>
+        </p:txBody>
+      </p:sp>
+      <p:sp>
+        <p:nvSpPr>
+          <p:cNvPr id="3" name="Text 1"/>
+          <p:cNvSpPr/>
+          <p:nvPr/>
+        </p:nvSpPr>
+        <p:spPr>
+          <a:xfrm>
+            <a:off x="365760" y="1005840"/>
+            <a:ext cx="11460175" cy="731520"/>
+          </a:xfrm>
+          <a:prstGeom prst="rect">
+            <a:avLst/>
+          </a:prstGeom>
+          <a:noFill/>
+          <a:ln/>
+        </p:spPr>
+        <p:txBody>
+          <a:bodyPr wrap="square" lIns="0" tIns="0" rIns="0" bIns="0" rtlCol="0" anchor="ctr">
+            <a:normAutofit/>
+          </a:bodyPr>
+          <a:lstStyle/>
+          <a:p>
+            <a:pPr algn="ctr" indent="0" marL="0">
+              <a:buNone/>
+            </a:pPr>
+            <a:r>
+              <a:rPr lang="en-US" sz="3600" b="1" dirty="0">
+                <a:solidFill>
+                  <a:srgbClr val="990011"/>
+                </a:solidFill>
+                <a:latin typeface="Times New Roman" pitchFamily="34" charset="0"/>
+                <a:ea typeface="Times New Roman" pitchFamily="34" charset="-122"/>
+                <a:cs typeface="Times New Roman" pitchFamily="34" charset="-120"/>
+              </a:rPr>
+              <a:t>1. Meaning of Waves</a:t>
+            </a:r>
+            <a:endParaRPr lang="en-US" sz="3600" dirty="0"/>
+          </a:p>
+        </p:txBody>
+      </p:sp>
+      <p:sp>
+        <p:nvSpPr>
+          <p:cNvPr id="4" name="Text 2"/>
+          <p:cNvSpPr/>
+          <p:nvPr/>
+        </p:nvSpPr>
+        <p:spPr>
+          <a:xfrm>
+            <a:off x="365760" y="1737360"/>
+            <a:ext cx="5120640" cy="457200"/>
+          </a:xfrm>
+          <a:prstGeom prst="rect">
+            <a:avLst/>
+          </a:prstGeom>
+          <a:noFill/>
+          <a:ln/>
+        </p:spPr>
+        <p:txBody>
+          <a:bodyPr wrap="square" lIns="0" tIns="0" rIns="0" bIns="0" rtlCol="0" anchor="ctr">
+            <a:normAutofit/>
+          </a:bodyPr>
+          <a:lstStyle/>
+          <a:p>
+            <a:pPr algn="l" indent="0" marL="0">
+              <a:buNone/>
+            </a:pPr>
+            <a:r>
+              <a:rPr lang="en-US" sz="3000" b="1" dirty="0">
+                <a:solidFill>
+                  <a:srgbClr val="990011"/>
+                </a:solidFill>
+                <a:latin typeface="Times New Roman" pitchFamily="34" charset="0"/>
+                <a:ea typeface="Times New Roman" pitchFamily="34" charset="-122"/>
+                <a:cs typeface="Times New Roman" pitchFamily="34" charset="-120"/>
+              </a:rPr>
+              <a:t>A) Formation of Waves</a:t>
+            </a:r>
+            <a:endParaRPr lang="en-US" sz="3000" dirty="0"/>
+          </a:p>
+        </p:txBody>
+      </p:sp>
+      <p:sp>
+        <p:nvSpPr>
+          <p:cNvPr id="5" name="Text 3"/>
+          <p:cNvSpPr/>
+          <p:nvPr/>
+        </p:nvSpPr>
+        <p:spPr>
+          <a:xfrm>
+            <a:off x="365760" y="2240280"/>
+            <a:ext cx="4846320" cy="4160520"/>
+          </a:xfrm>
+          <a:prstGeom prst="rect">
+            <a:avLst/>
+          </a:prstGeom>
+          <a:noFill/>
+          <a:ln/>
+        </p:spPr>
+        <p:txBody>
+          <a:bodyPr wrap="square" lIns="0" tIns="0" rIns="0" bIns="0" rtlCol="0" anchor="t"/>
+          <a:lstStyle/>
+          <a:p>
+            <a:pPr algn="l" indent="0" marL="0">
+              <a:spcAft>
+                <a:spcPts val="800"/>
+              </a:spcAft>
+              <a:buNone/>
+            </a:pPr>
+            <a:r>
+              <a:rPr lang="en-US" sz="3600" b="1" dirty="0">
+                <a:solidFill>
+                  <a:srgbClr val="111111"/>
+                </a:solidFill>
+                <a:latin typeface="Times New Roman" pitchFamily="34" charset="0"/>
+                <a:ea typeface="Times New Roman" pitchFamily="34" charset="-122"/>
+                <a:cs typeface="Times New Roman" pitchFamily="34" charset="-120"/>
+              </a:rPr>
+              <a:t>Swash and backwash: </a:t>
+            </a:r>
+            <a:pPr algn="l" indent="0" marL="0">
+              <a:spcAft>
+                <a:spcPts val="800"/>
+              </a:spcAft>
+              <a:buNone/>
+            </a:pPr>
+            <a:r>
+              <a:rPr lang="en-US" sz="3600" dirty="0">
+                <a:solidFill>
+                  <a:srgbClr val="111111"/>
+                </a:solidFill>
+                <a:latin typeface="Times New Roman" pitchFamily="34" charset="0"/>
+                <a:ea typeface="Times New Roman" pitchFamily="34" charset="-122"/>
+                <a:cs typeface="Times New Roman" pitchFamily="34" charset="-120"/>
+              </a:rPr>
+              <a:t>The broken wave rushes up the beach as swash and returns as backwash.</a:t>
+            </a:r>
+            <a:endParaRPr lang="en-US" sz="3600" dirty="0"/>
           </a:p>
         </p:txBody>
       </p:sp>
       <p:pic>
         <p:nvPicPr>
-          <p:cNvPr id="3" name="Image 0" descr="/home/claude/f4/img/minesec_sheet.png">    </p:cNvPr>
+          <p:cNvPr id="6" name="Image 0" descr="/home/claude/f4/img/v2/swash_up.png">    </p:cNvPr>
           <p:cNvPicPr>
             <a:picLocks noChangeAspect="1"/>
           </p:cNvPicPr>
@@ -13278,8 +13877,8 @@
         </p:blipFill>
         <p:spPr>
           <a:xfrm>
-            <a:off x="0" y="658368"/>
-            <a:ext cx="5120640" cy="5833872"/>
+            <a:off x="5349240" y="2617506"/>
+            <a:ext cx="6659575" cy="2601397"/>
           </a:xfrm>
           <a:prstGeom prst="rect">
             <a:avLst/>
@@ -13288,14 +13887,14 @@
       </p:pic>
       <p:sp>
         <p:nvSpPr>
-          <p:cNvPr id="4" name="Text 1"/>
+          <p:cNvPr id="7" name="Text 4"/>
           <p:cNvSpPr/>
           <p:nvPr/>
         </p:nvSpPr>
         <p:spPr>
           <a:xfrm>
-            <a:off x="5349240" y="1005840"/>
-            <a:ext cx="6522415" cy="731520"/>
+            <a:off x="5349240" y="6089904"/>
+            <a:ext cx="6659575" cy="347472"/>
           </a:xfrm>
           <a:prstGeom prst="rect">
             <a:avLst/>
@@ -13304,68 +13903,24 @@
           <a:ln/>
         </p:spPr>
         <p:txBody>
-          <a:bodyPr wrap="square" lIns="0" tIns="0" rIns="0" bIns="0" rtlCol="0" anchor="ctr">
-            <a:normAutofit/>
-          </a:bodyPr>
+          <a:bodyPr wrap="square" lIns="0" tIns="0" rIns="0" bIns="0" rtlCol="0" anchor="ctr"/>
           <a:lstStyle/>
           <a:p>
             <a:pPr algn="ctr" indent="0" marL="0">
               <a:buNone/>
             </a:pPr>
             <a:r>
-              <a:rPr lang="en-US" sz="3600" b="1" dirty="0">
-                <a:solidFill>
-                  <a:srgbClr val="990011"/>
+              <a:rPr lang="en-US" sz="1600" i="1" dirty="0">
+                <a:solidFill>
+                  <a:srgbClr val="555555"/>
                 </a:solidFill>
                 <a:latin typeface="Times New Roman" pitchFamily="34" charset="0"/>
                 <a:ea typeface="Times New Roman" pitchFamily="34" charset="-122"/>
                 <a:cs typeface="Times New Roman" pitchFamily="34" charset="-120"/>
               </a:rPr>
-              <a:t>Evaluation 1</a:t>
-            </a:r>
-            <a:endParaRPr lang="en-US" sz="3600" dirty="0"/>
-          </a:p>
-        </p:txBody>
-      </p:sp>
-      <p:sp>
-        <p:nvSpPr>
-          <p:cNvPr id="5" name="Text 2"/>
-          <p:cNvSpPr/>
-          <p:nvPr/>
-        </p:nvSpPr>
-        <p:spPr>
-          <a:xfrm>
-            <a:off x="5349240" y="1783080"/>
-            <a:ext cx="6522415" cy="4663440"/>
-          </a:xfrm>
-          <a:prstGeom prst="rect">
-            <a:avLst/>
-          </a:prstGeom>
-          <a:noFill/>
-          <a:ln/>
-        </p:spPr>
-        <p:txBody>
-          <a:bodyPr wrap="square" lIns="0" tIns="0" rIns="0" bIns="0" rtlCol="0" anchor="t"/>
-          <a:lstStyle/>
-          <a:p>
-            <a:pPr algn="l" indent="0" marL="0">
-              <a:spcAft>
-                <a:spcPts val="800"/>
-              </a:spcAft>
-              <a:buNone/>
-            </a:pPr>
-            <a:r>
-              <a:rPr lang="en-US" sz="4000" dirty="0">
-                <a:solidFill>
-                  <a:srgbClr val="111111"/>
-                </a:solidFill>
-                <a:latin typeface="Times New Roman" pitchFamily="34" charset="0"/>
-                <a:ea typeface="Times New Roman" pitchFamily="34" charset="-122"/>
-                <a:cs typeface="Times New Roman" pitchFamily="34" charset="-120"/>
-              </a:rPr>
-              <a:t>What is the swash?</a:t>
-            </a:r>
-            <a:endParaRPr lang="en-US" sz="4000" dirty="0"/>
+              <a:t>Illustration: the swash</a:t>
+            </a:r>
+            <a:endParaRPr lang="en-US" sz="1600" dirty="0"/>
           </a:p>
         </p:txBody>
       </p:sp>
@@ -13475,7 +14030,7 @@
                 <a:ea typeface="Calibri" pitchFamily="34" charset="-122"/>
                 <a:cs typeface="Calibri" pitchFamily="34" charset="-120"/>
               </a:rPr>
-              <a:t>FORMATIVE EVALUATION</a:t>
+              <a:t>BOARD SUMMARY</a:t>
             </a:r>
             <a:endParaRPr lang="en-US" sz="1400" dirty="0"/>
           </a:p>
@@ -13498,7 +14053,7 @@
         <p:spPr>
           <a:xfrm>
             <a:off x="0" y="658368"/>
-            <a:ext cx="5120640" cy="5833872"/>
+            <a:ext cx="2468880" cy="5833872"/>
           </a:xfrm>
           <a:prstGeom prst="rect">
             <a:avLst/>
@@ -13513,8 +14068,8 @@
         </p:nvSpPr>
         <p:spPr>
           <a:xfrm>
-            <a:off x="5349240" y="1005840"/>
-            <a:ext cx="6522415" cy="731520"/>
+            <a:off x="2697480" y="1005840"/>
+            <a:ext cx="9174175" cy="731520"/>
           </a:xfrm>
           <a:prstGeom prst="rect">
             <a:avLst/>
@@ -13540,7 +14095,7 @@
                 <a:ea typeface="Times New Roman" pitchFamily="34" charset="-122"/>
                 <a:cs typeface="Times New Roman" pitchFamily="34" charset="-120"/>
               </a:rPr>
-              <a:t>Expected Answer</a:t>
+              <a:t>1. Meaning of Waves</a:t>
             </a:r>
             <a:endParaRPr lang="en-US" sz="3600" dirty="0"/>
           </a:p>
@@ -13554,8 +14109,47 @@
         </p:nvSpPr>
         <p:spPr>
           <a:xfrm>
-            <a:off x="5349240" y="1783080"/>
-            <a:ext cx="6522415" cy="4663440"/>
+            <a:off x="2697480" y="1737360"/>
+            <a:ext cx="9174175" cy="457200"/>
+          </a:xfrm>
+          <a:prstGeom prst="rect">
+            <a:avLst/>
+          </a:prstGeom>
+          <a:noFill/>
+          <a:ln/>
+        </p:spPr>
+        <p:txBody>
+          <a:bodyPr wrap="square" lIns="0" tIns="0" rIns="0" bIns="0" rtlCol="0" anchor="ctr"/>
+          <a:lstStyle/>
+          <a:p>
+            <a:pPr algn="l" indent="0" marL="0">
+              <a:buNone/>
+            </a:pPr>
+            <a:r>
+              <a:rPr lang="en-US" sz="3200" b="1" dirty="0">
+                <a:solidFill>
+                  <a:srgbClr val="990011"/>
+                </a:solidFill>
+                <a:latin typeface="Times New Roman" pitchFamily="34" charset="0"/>
+                <a:ea typeface="Times New Roman" pitchFamily="34" charset="-122"/>
+                <a:cs typeface="Times New Roman" pitchFamily="34" charset="-120"/>
+              </a:rPr>
+              <a:t>B) Factors of the Strength of Waves</a:t>
+            </a:r>
+            <a:endParaRPr lang="en-US" sz="3200" dirty="0"/>
+          </a:p>
+        </p:txBody>
+      </p:sp>
+      <p:sp>
+        <p:nvSpPr>
+          <p:cNvPr id="6" name="Text 3"/>
+          <p:cNvSpPr/>
+          <p:nvPr/>
+        </p:nvSpPr>
+        <p:spPr>
+          <a:xfrm>
+            <a:off x="2697480" y="2240280"/>
+            <a:ext cx="9174175" cy="4206240"/>
           </a:xfrm>
           <a:prstGeom prst="rect">
             <a:avLst/>
@@ -13574,7 +14168,7 @@
               <a:buNone/>
             </a:pPr>
             <a:r>
-              <a:rPr lang="en-US" sz="4000" dirty="0">
+              <a:rPr lang="en-US" sz="4000" i="1" dirty="0">
                 <a:solidFill>
                   <a:srgbClr val="111111"/>
                 </a:solidFill>
@@ -13582,7 +14176,81 @@
                 <a:ea typeface="Times New Roman" pitchFamily="34" charset="-122"/>
                 <a:cs typeface="Times New Roman" pitchFamily="34" charset="-120"/>
               </a:rPr>
-              <a:t>The water that goes up the beach.</a:t>
+              <a:t>The strength of waves depends on the following factors:</a:t>
+            </a:r>
+            <a:endParaRPr lang="en-US" sz="4000" dirty="0"/>
+          </a:p>
+          <a:p>
+            <a:pPr algn="l" indent="0" marL="0">
+              <a:spcAft>
+                <a:spcPts val="800"/>
+              </a:spcAft>
+              <a:buNone/>
+            </a:pPr>
+            <a:r>
+              <a:rPr lang="en-US" sz="4000" b="1" dirty="0">
+                <a:solidFill>
+                  <a:srgbClr val="111111"/>
+                </a:solidFill>
+                <a:latin typeface="Times New Roman" pitchFamily="34" charset="0"/>
+                <a:ea typeface="Times New Roman" pitchFamily="34" charset="-122"/>
+                <a:cs typeface="Times New Roman" pitchFamily="34" charset="-120"/>
+              </a:rPr>
+              <a:t>Wind speed: </a:t>
+            </a:r>
+            <a:pPr algn="l" indent="0" marL="0">
+              <a:spcAft>
+                <a:spcPts val="800"/>
+              </a:spcAft>
+              <a:buNone/>
+            </a:pPr>
+            <a:r>
+              <a:rPr lang="en-US" sz="4000" dirty="0">
+                <a:solidFill>
+                  <a:srgbClr val="111111"/>
+                </a:solidFill>
+                <a:latin typeface="Times New Roman" pitchFamily="34" charset="0"/>
+                <a:ea typeface="Times New Roman" pitchFamily="34" charset="-122"/>
+                <a:cs typeface="Times New Roman" pitchFamily="34" charset="-120"/>
+              </a:rPr>
+              <a:t>A stronger wind makes bigger waves.</a:t>
+            </a:r>
+            <a:endParaRPr lang="en-US" sz="4000" dirty="0"/>
+          </a:p>
+          <a:p>
+            <a:pPr algn="l" indent="0" marL="0">
+              <a:spcAft>
+                <a:spcPts val="800"/>
+              </a:spcAft>
+              <a:buNone/>
+            </a:pPr>
+            <a:r>
+              <a:rPr lang="en-US" sz="4000" b="1" dirty="0">
+                <a:solidFill>
+                  <a:srgbClr val="111111"/>
+                </a:solidFill>
+                <a:latin typeface="Times New Roman" pitchFamily="34" charset="0"/>
+                <a:ea typeface="Times New Roman" pitchFamily="34" charset="-122"/>
+                <a:cs typeface="Times New Roman" pitchFamily="34" charset="-120"/>
+              </a:rPr>
+              <a:t>Duration of the wind: </a:t>
+            </a:r>
+            <a:pPr algn="l" indent="0" marL="0">
+              <a:spcAft>
+                <a:spcPts val="800"/>
+              </a:spcAft>
+              <a:buNone/>
+            </a:pPr>
+            <a:r>
+              <a:rPr lang="en-US" sz="4000" dirty="0">
+                <a:solidFill>
+                  <a:srgbClr val="111111"/>
+                </a:solidFill>
+                <a:latin typeface="Times New Roman" pitchFamily="34" charset="0"/>
+                <a:ea typeface="Times New Roman" pitchFamily="34" charset="-122"/>
+                <a:cs typeface="Times New Roman" pitchFamily="34" charset="-120"/>
+              </a:rPr>
+              <a:t>The longer the wind blows, the bigger the waves.</a:t>
             </a:r>
             <a:endParaRPr lang="en-US" sz="4000" dirty="0"/>
           </a:p>
@@ -13694,7 +14362,7 @@
                 <a:ea typeface="Calibri" pitchFamily="34" charset="-122"/>
                 <a:cs typeface="Calibri" pitchFamily="34" charset="-120"/>
               </a:rPr>
-              <a:t>FORMATIVE EVALUATION</a:t>
+              <a:t>BOARD SUMMARY</a:t>
             </a:r>
             <a:endParaRPr lang="en-US" sz="1400" dirty="0"/>
           </a:p>
@@ -13717,7 +14385,7 @@
         <p:spPr>
           <a:xfrm>
             <a:off x="0" y="658368"/>
-            <a:ext cx="5120640" cy="5833872"/>
+            <a:ext cx="3840480" cy="5833872"/>
           </a:xfrm>
           <a:prstGeom prst="rect">
             <a:avLst/>
@@ -13732,8 +14400,8 @@
         </p:nvSpPr>
         <p:spPr>
           <a:xfrm>
-            <a:off x="5349240" y="1005840"/>
-            <a:ext cx="6522415" cy="731520"/>
+            <a:off x="4069080" y="1005840"/>
+            <a:ext cx="7802575" cy="731520"/>
           </a:xfrm>
           <a:prstGeom prst="rect">
             <a:avLst/>
@@ -13759,7 +14427,7 @@
                 <a:ea typeface="Times New Roman" pitchFamily="34" charset="-122"/>
                 <a:cs typeface="Times New Roman" pitchFamily="34" charset="-120"/>
               </a:rPr>
-              <a:t>Evaluation 2</a:t>
+              <a:t>1. Meaning of Waves</a:t>
             </a:r>
             <a:endParaRPr lang="en-US" sz="3600" dirty="0"/>
           </a:p>
@@ -13773,8 +14441,47 @@
         </p:nvSpPr>
         <p:spPr>
           <a:xfrm>
-            <a:off x="5349240" y="1783080"/>
-            <a:ext cx="6522415" cy="4663440"/>
+            <a:off x="4069080" y="1737360"/>
+            <a:ext cx="7802575" cy="457200"/>
+          </a:xfrm>
+          <a:prstGeom prst="rect">
+            <a:avLst/>
+          </a:prstGeom>
+          <a:noFill/>
+          <a:ln/>
+        </p:spPr>
+        <p:txBody>
+          <a:bodyPr wrap="square" lIns="0" tIns="0" rIns="0" bIns="0" rtlCol="0" anchor="ctr"/>
+          <a:lstStyle/>
+          <a:p>
+            <a:pPr algn="l" indent="0" marL="0">
+              <a:buNone/>
+            </a:pPr>
+            <a:r>
+              <a:rPr lang="en-US" sz="2600" b="1" dirty="0">
+                <a:solidFill>
+                  <a:srgbClr val="990011"/>
+                </a:solidFill>
+                <a:latin typeface="Times New Roman" pitchFamily="34" charset="0"/>
+                <a:ea typeface="Times New Roman" pitchFamily="34" charset="-122"/>
+                <a:cs typeface="Times New Roman" pitchFamily="34" charset="-120"/>
+              </a:rPr>
+              <a:t>B) Factors of the Strength of Waves (continued)</a:t>
+            </a:r>
+            <a:endParaRPr lang="en-US" sz="2600" dirty="0"/>
+          </a:p>
+        </p:txBody>
+      </p:sp>
+      <p:sp>
+        <p:nvSpPr>
+          <p:cNvPr id="6" name="Text 3"/>
+          <p:cNvSpPr/>
+          <p:nvPr/>
+        </p:nvSpPr>
+        <p:spPr>
+          <a:xfrm>
+            <a:off x="4069080" y="2240280"/>
+            <a:ext cx="7802575" cy="4206240"/>
           </a:xfrm>
           <a:prstGeom prst="rect">
             <a:avLst/>
@@ -13793,7 +14500,7 @@
               <a:buNone/>
             </a:pPr>
             <a:r>
-              <a:rPr lang="en-US" sz="4000" dirty="0">
+              <a:rPr lang="en-US" sz="4000" b="1" dirty="0">
                 <a:solidFill>
                   <a:srgbClr val="111111"/>
                 </a:solidFill>
@@ -13801,7 +14508,61 @@
                 <a:ea typeface="Times New Roman" pitchFamily="34" charset="-122"/>
                 <a:cs typeface="Times New Roman" pitchFamily="34" charset="-120"/>
               </a:rPr>
-              <a:t>Give one difference between constructive and destructive waves.</a:t>
+              <a:t>Length of the fetch: </a:t>
+            </a:r>
+            <a:pPr algn="l" indent="0" marL="0">
+              <a:spcAft>
+                <a:spcPts val="800"/>
+              </a:spcAft>
+              <a:buNone/>
+            </a:pPr>
+            <a:r>
+              <a:rPr lang="en-US" sz="4000" dirty="0">
+                <a:solidFill>
+                  <a:srgbClr val="111111"/>
+                </a:solidFill>
+                <a:latin typeface="Times New Roman" pitchFamily="34" charset="0"/>
+                <a:ea typeface="Times New Roman" pitchFamily="34" charset="-122"/>
+                <a:cs typeface="Times New Roman" pitchFamily="34" charset="-120"/>
+              </a:rPr>
+              <a:t>A long fetch over the open ocean gives big, powerful waves.</a:t>
+            </a:r>
+            <a:endParaRPr lang="en-US" sz="4000" dirty="0"/>
+          </a:p>
+          <a:p>
+            <a:pPr algn="l" indent="0" marL="0">
+              <a:spcAft>
+                <a:spcPts val="800"/>
+              </a:spcAft>
+              <a:buNone/>
+            </a:pPr>
+            <a:r>
+              <a:rPr lang="en-US" sz="4000" b="1" dirty="0">
+                <a:solidFill>
+                  <a:srgbClr val="111111"/>
+                </a:solidFill>
+                <a:latin typeface="Times New Roman" pitchFamily="34" charset="0"/>
+                <a:ea typeface="Times New Roman" pitchFamily="34" charset="-122"/>
+                <a:cs typeface="Times New Roman" pitchFamily="34" charset="-120"/>
+              </a:rPr>
+              <a:t>Depth of the sea: </a:t>
+            </a:r>
+            <a:pPr algn="l" indent="0" marL="0">
+              <a:spcAft>
+                <a:spcPts val="800"/>
+              </a:spcAft>
+              <a:buNone/>
+            </a:pPr>
+            <a:r>
+              <a:rPr lang="en-US" sz="4000" dirty="0">
+                <a:solidFill>
+                  <a:srgbClr val="111111"/>
+                </a:solidFill>
+                <a:latin typeface="Times New Roman" pitchFamily="34" charset="0"/>
+                <a:ea typeface="Times New Roman" pitchFamily="34" charset="-122"/>
+                <a:cs typeface="Times New Roman" pitchFamily="34" charset="-120"/>
+              </a:rPr>
+              <a:t>Waves break more strongly on steep coasts with deep water close to the shore.</a:t>
             </a:r>
             <a:endParaRPr lang="en-US" sz="4000" dirty="0"/>
           </a:p>
@@ -13913,15 +14674,135 @@
                 <a:ea typeface="Calibri" pitchFamily="34" charset="-122"/>
                 <a:cs typeface="Calibri" pitchFamily="34" charset="-120"/>
               </a:rPr>
-              <a:t>FORMATIVE EVALUATION</a:t>
+              <a:t>BOARD SUMMARY</a:t>
             </a:r>
             <a:endParaRPr lang="en-US" sz="1400" dirty="0"/>
+          </a:p>
+        </p:txBody>
+      </p:sp>
+      <p:sp>
+        <p:nvSpPr>
+          <p:cNvPr id="3" name="Text 1"/>
+          <p:cNvSpPr/>
+          <p:nvPr/>
+        </p:nvSpPr>
+        <p:spPr>
+          <a:xfrm>
+            <a:off x="365760" y="1005840"/>
+            <a:ext cx="11460175" cy="731520"/>
+          </a:xfrm>
+          <a:prstGeom prst="rect">
+            <a:avLst/>
+          </a:prstGeom>
+          <a:noFill/>
+          <a:ln/>
+        </p:spPr>
+        <p:txBody>
+          <a:bodyPr wrap="square" lIns="0" tIns="0" rIns="0" bIns="0" rtlCol="0" anchor="ctr">
+            <a:normAutofit/>
+          </a:bodyPr>
+          <a:lstStyle/>
+          <a:p>
+            <a:pPr algn="ctr" indent="0" marL="0">
+              <a:buNone/>
+            </a:pPr>
+            <a:r>
+              <a:rPr lang="en-US" sz="3600" b="1" dirty="0">
+                <a:solidFill>
+                  <a:srgbClr val="990011"/>
+                </a:solidFill>
+                <a:latin typeface="Times New Roman" pitchFamily="34" charset="0"/>
+                <a:ea typeface="Times New Roman" pitchFamily="34" charset="-122"/>
+                <a:cs typeface="Times New Roman" pitchFamily="34" charset="-120"/>
+              </a:rPr>
+              <a:t>2. Types of Waves</a:t>
+            </a:r>
+            <a:endParaRPr lang="en-US" sz="3600" dirty="0"/>
+          </a:p>
+        </p:txBody>
+      </p:sp>
+      <p:sp>
+        <p:nvSpPr>
+          <p:cNvPr id="4" name="Text 2"/>
+          <p:cNvSpPr/>
+          <p:nvPr/>
+        </p:nvSpPr>
+        <p:spPr>
+          <a:xfrm>
+            <a:off x="365760" y="1783080"/>
+            <a:ext cx="4846320" cy="4617720"/>
+          </a:xfrm>
+          <a:prstGeom prst="rect">
+            <a:avLst/>
+          </a:prstGeom>
+          <a:noFill/>
+          <a:ln/>
+        </p:spPr>
+        <p:txBody>
+          <a:bodyPr wrap="square" lIns="0" tIns="0" rIns="0" bIns="0" rtlCol="0" anchor="t"/>
+          <a:lstStyle/>
+          <a:p>
+            <a:pPr algn="l" indent="0" marL="0">
+              <a:spcAft>
+                <a:spcPts val="800"/>
+              </a:spcAft>
+              <a:buNone/>
+            </a:pPr>
+            <a:r>
+              <a:rPr lang="en-US" sz="3400" i="1" dirty="0">
+                <a:solidFill>
+                  <a:srgbClr val="111111"/>
+                </a:solidFill>
+                <a:latin typeface="Times New Roman" pitchFamily="34" charset="0"/>
+                <a:ea typeface="Times New Roman" pitchFamily="34" charset="-122"/>
+                <a:cs typeface="Times New Roman" pitchFamily="34" charset="-120"/>
+              </a:rPr>
+              <a:t>There are two types of waves:</a:t>
+            </a:r>
+            <a:endParaRPr lang="en-US" sz="3400" dirty="0"/>
+          </a:p>
+          <a:p>
+            <a:pPr algn="l" indent="0" marL="0">
+              <a:spcAft>
+                <a:spcPts val="800"/>
+              </a:spcAft>
+              <a:buNone/>
+            </a:pPr>
+            <a:r>
+              <a:rPr lang="en-US" sz="3400" b="1" dirty="0">
+                <a:solidFill>
+                  <a:srgbClr val="111111"/>
+                </a:solidFill>
+                <a:latin typeface="Times New Roman" pitchFamily="34" charset="0"/>
+                <a:ea typeface="Times New Roman" pitchFamily="34" charset="-122"/>
+                <a:cs typeface="Times New Roman" pitchFamily="34" charset="-120"/>
+              </a:rPr>
+              <a:t>Constructive waves: </a:t>
+            </a:r>
+            <a:pPr algn="l" indent="0" marL="0">
+              <a:spcAft>
+                <a:spcPts val="800"/>
+              </a:spcAft>
+              <a:buNone/>
+            </a:pPr>
+            <a:r>
+              <a:rPr lang="en-US" sz="3400" dirty="0">
+                <a:solidFill>
+                  <a:srgbClr val="111111"/>
+                </a:solidFill>
+                <a:latin typeface="Times New Roman" pitchFamily="34" charset="0"/>
+                <a:ea typeface="Times New Roman" pitchFamily="34" charset="-122"/>
+                <a:cs typeface="Times New Roman" pitchFamily="34" charset="-120"/>
+              </a:rPr>
+              <a:t>They are low, gentle waves that break far apart. Their swash is stronger than their backwash, so they build up beaches.</a:t>
+            </a:r>
+            <a:endParaRPr lang="en-US" sz="3400" dirty="0"/>
           </a:p>
         </p:txBody>
       </p:sp>
       <p:pic>
         <p:nvPicPr>
-          <p:cNvPr id="3" name="Image 0" descr="/home/claude/f4/img/minesec_sheet.png">    </p:cNvPr>
+          <p:cNvPr id="5" name="Image 0" descr="/home/claude/f4/img/v2/waves_types_big.png">    </p:cNvPr>
           <p:cNvPicPr>
             <a:picLocks noChangeAspect="1"/>
           </p:cNvPicPr>
@@ -13935,8 +14816,8 @@
         </p:blipFill>
         <p:spPr>
           <a:xfrm>
-            <a:off x="0" y="658368"/>
-            <a:ext cx="5120640" cy="5833872"/>
+            <a:off x="5349240" y="2617506"/>
+            <a:ext cx="6659575" cy="2601397"/>
           </a:xfrm>
           <a:prstGeom prst="rect">
             <a:avLst/>
@@ -13945,14 +14826,14 @@
       </p:pic>
       <p:sp>
         <p:nvSpPr>
-          <p:cNvPr id="4" name="Text 1"/>
+          <p:cNvPr id="6" name="Text 3"/>
           <p:cNvSpPr/>
           <p:nvPr/>
         </p:nvSpPr>
         <p:spPr>
           <a:xfrm>
-            <a:off x="5349240" y="1005840"/>
-            <a:ext cx="6522415" cy="731520"/>
+            <a:off x="5349240" y="6089904"/>
+            <a:ext cx="6659575" cy="347472"/>
           </a:xfrm>
           <a:prstGeom prst="rect">
             <a:avLst/>
@@ -13961,68 +14842,24 @@
           <a:ln/>
         </p:spPr>
         <p:txBody>
-          <a:bodyPr wrap="square" lIns="0" tIns="0" rIns="0" bIns="0" rtlCol="0" anchor="ctr">
-            <a:normAutofit/>
-          </a:bodyPr>
+          <a:bodyPr wrap="square" lIns="0" tIns="0" rIns="0" bIns="0" rtlCol="0" anchor="ctr"/>
           <a:lstStyle/>
           <a:p>
             <a:pPr algn="ctr" indent="0" marL="0">
               <a:buNone/>
             </a:pPr>
             <a:r>
-              <a:rPr lang="en-US" sz="3600" b="1" dirty="0">
-                <a:solidFill>
-                  <a:srgbClr val="990011"/>
+              <a:rPr lang="en-US" sz="1600" i="1" dirty="0">
+                <a:solidFill>
+                  <a:srgbClr val="555555"/>
                 </a:solidFill>
                 <a:latin typeface="Times New Roman" pitchFamily="34" charset="0"/>
                 <a:ea typeface="Times New Roman" pitchFamily="34" charset="-122"/>
                 <a:cs typeface="Times New Roman" pitchFamily="34" charset="-120"/>
               </a:rPr>
-              <a:t>Expected Answer</a:t>
-            </a:r>
-            <a:endParaRPr lang="en-US" sz="3600" dirty="0"/>
-          </a:p>
-        </p:txBody>
-      </p:sp>
-      <p:sp>
-        <p:nvSpPr>
-          <p:cNvPr id="5" name="Text 2"/>
-          <p:cNvSpPr/>
-          <p:nvPr/>
-        </p:nvSpPr>
-        <p:spPr>
-          <a:xfrm>
-            <a:off x="5349240" y="1783080"/>
-            <a:ext cx="6522415" cy="4663440"/>
-          </a:xfrm>
-          <a:prstGeom prst="rect">
-            <a:avLst/>
-          </a:prstGeom>
-          <a:noFill/>
-          <a:ln/>
-        </p:spPr>
-        <p:txBody>
-          <a:bodyPr wrap="square" lIns="0" tIns="0" rIns="0" bIns="0" rtlCol="0" anchor="t"/>
-          <a:lstStyle/>
-          <a:p>
-            <a:pPr algn="l" indent="0" marL="0">
-              <a:spcAft>
-                <a:spcPts val="800"/>
-              </a:spcAft>
-              <a:buNone/>
-            </a:pPr>
-            <a:r>
-              <a:rPr lang="en-US" sz="4000" dirty="0">
-                <a:solidFill>
-                  <a:srgbClr val="111111"/>
-                </a:solidFill>
-                <a:latin typeface="Times New Roman" pitchFamily="34" charset="0"/>
-                <a:ea typeface="Times New Roman" pitchFamily="34" charset="-122"/>
-                <a:cs typeface="Times New Roman" pitchFamily="34" charset="-120"/>
-              </a:rPr>
-              <a:t>Constructive waves build the beach; destructive waves destroy it.</a:t>
-            </a:r>
-            <a:endParaRPr lang="en-US" sz="4000" dirty="0"/>
+              <a:t>Illustration: constructive and destructive waves</a:t>
+            </a:r>
+            <a:endParaRPr lang="en-US" sz="1600" dirty="0"/>
           </a:p>
         </p:txBody>
       </p:sp>
@@ -14132,15 +14969,115 @@
                 <a:ea typeface="Calibri" pitchFamily="34" charset="-122"/>
                 <a:cs typeface="Calibri" pitchFamily="34" charset="-120"/>
               </a:rPr>
-              <a:t>REMEDIATION</a:t>
+              <a:t>BOARD SUMMARY</a:t>
             </a:r>
             <a:endParaRPr lang="en-US" sz="1400" dirty="0"/>
+          </a:p>
+        </p:txBody>
+      </p:sp>
+      <p:sp>
+        <p:nvSpPr>
+          <p:cNvPr id="3" name="Text 1"/>
+          <p:cNvSpPr/>
+          <p:nvPr/>
+        </p:nvSpPr>
+        <p:spPr>
+          <a:xfrm>
+            <a:off x="365760" y="1005840"/>
+            <a:ext cx="11460175" cy="731520"/>
+          </a:xfrm>
+          <a:prstGeom prst="rect">
+            <a:avLst/>
+          </a:prstGeom>
+          <a:noFill/>
+          <a:ln/>
+        </p:spPr>
+        <p:txBody>
+          <a:bodyPr wrap="square" lIns="0" tIns="0" rIns="0" bIns="0" rtlCol="0" anchor="ctr">
+            <a:normAutofit/>
+          </a:bodyPr>
+          <a:lstStyle/>
+          <a:p>
+            <a:pPr algn="ctr" indent="0" marL="0">
+              <a:buNone/>
+            </a:pPr>
+            <a:r>
+              <a:rPr lang="en-US" sz="3600" b="1" dirty="0">
+                <a:solidFill>
+                  <a:srgbClr val="990011"/>
+                </a:solidFill>
+                <a:latin typeface="Times New Roman" pitchFamily="34" charset="0"/>
+                <a:ea typeface="Times New Roman" pitchFamily="34" charset="-122"/>
+                <a:cs typeface="Times New Roman" pitchFamily="34" charset="-120"/>
+              </a:rPr>
+              <a:t>2. Types of Waves</a:t>
+            </a:r>
+            <a:endParaRPr lang="en-US" sz="3600" dirty="0"/>
+          </a:p>
+        </p:txBody>
+      </p:sp>
+      <p:sp>
+        <p:nvSpPr>
+          <p:cNvPr id="4" name="Text 2"/>
+          <p:cNvSpPr/>
+          <p:nvPr/>
+        </p:nvSpPr>
+        <p:spPr>
+          <a:xfrm>
+            <a:off x="365760" y="1783080"/>
+            <a:ext cx="4846320" cy="4617720"/>
+          </a:xfrm>
+          <a:prstGeom prst="rect">
+            <a:avLst/>
+          </a:prstGeom>
+          <a:noFill/>
+          <a:ln/>
+        </p:spPr>
+        <p:txBody>
+          <a:bodyPr wrap="square" lIns="0" tIns="0" rIns="0" bIns="0" rtlCol="0" anchor="t"/>
+          <a:lstStyle/>
+          <a:p>
+            <a:pPr algn="l" indent="0" marL="0">
+              <a:spcAft>
+                <a:spcPts val="800"/>
+              </a:spcAft>
+              <a:buNone/>
+            </a:pPr>
+            <a:r>
+              <a:rPr lang="en-US" sz="3600" b="1" dirty="0">
+                <a:solidFill>
+                  <a:srgbClr val="111111"/>
+                </a:solidFill>
+                <a:latin typeface="Times New Roman" pitchFamily="34" charset="0"/>
+                <a:ea typeface="Times New Roman" pitchFamily="34" charset="-122"/>
+                <a:cs typeface="Times New Roman" pitchFamily="34" charset="-120"/>
+              </a:rPr>
+              <a:t>Destructive waves: </a:t>
+            </a:r>
+            <a:pPr algn="l" indent="0" marL="0">
+              <a:spcAft>
+                <a:spcPts val="800"/>
+              </a:spcAft>
+              <a:buNone/>
+            </a:pPr>
+            <a:r>
+              <a:rPr lang="en-US" sz="3600" dirty="0">
+                <a:solidFill>
+                  <a:srgbClr val="111111"/>
+                </a:solidFill>
+                <a:latin typeface="Times New Roman" pitchFamily="34" charset="0"/>
+                <a:ea typeface="Times New Roman" pitchFamily="34" charset="-122"/>
+                <a:cs typeface="Times New Roman" pitchFamily="34" charset="-120"/>
+              </a:rPr>
+              <a:t>They are high, steep waves that break close together. Their backwash is stronger than their swash, so they erode beaches.</a:t>
+            </a:r>
+            <a:endParaRPr lang="en-US" sz="3600" dirty="0"/>
           </a:p>
         </p:txBody>
       </p:sp>
       <p:pic>
         <p:nvPicPr>
-          <p:cNvPr id="3" name="Image 0" descr="/home/claude/f4/img/minesec_sheet.png">    </p:cNvPr>
+          <p:cNvPr id="5" name="Image 0" descr="/home/claude/f4/img/v2/f4_bigwaves.jpg">    </p:cNvPr>
           <p:cNvPicPr>
             <a:picLocks noChangeAspect="1"/>
           </p:cNvPicPr>
@@ -14154,8 +15091,8 @@
         </p:blipFill>
         <p:spPr>
           <a:xfrm>
-            <a:off x="0" y="658368"/>
-            <a:ext cx="2468880" cy="5833872"/>
+            <a:off x="5349240" y="2071212"/>
+            <a:ext cx="6659575" cy="3693983"/>
           </a:xfrm>
           <a:prstGeom prst="rect">
             <a:avLst/>
@@ -14164,14 +15101,14 @@
       </p:pic>
       <p:sp>
         <p:nvSpPr>
-          <p:cNvPr id="4" name="Text 1"/>
+          <p:cNvPr id="6" name="Text 3"/>
           <p:cNvSpPr/>
           <p:nvPr/>
         </p:nvSpPr>
         <p:spPr>
           <a:xfrm>
-            <a:off x="2697480" y="1005840"/>
-            <a:ext cx="9174175" cy="731520"/>
+            <a:off x="5349240" y="6089904"/>
+            <a:ext cx="6659575" cy="347472"/>
           </a:xfrm>
           <a:prstGeom prst="rect">
             <a:avLst/>
@@ -14180,134 +15117,24 @@
           <a:ln/>
         </p:spPr>
         <p:txBody>
-          <a:bodyPr wrap="square" lIns="0" tIns="0" rIns="0" bIns="0" rtlCol="0" anchor="ctr">
-            <a:normAutofit/>
-          </a:bodyPr>
+          <a:bodyPr wrap="square" lIns="0" tIns="0" rIns="0" bIns="0" rtlCol="0" anchor="ctr"/>
           <a:lstStyle/>
           <a:p>
             <a:pPr algn="ctr" indent="0" marL="0">
               <a:buNone/>
             </a:pPr>
             <a:r>
-              <a:rPr lang="en-US" sz="3600" b="1" dirty="0">
-                <a:solidFill>
-                  <a:srgbClr val="990011"/>
+              <a:rPr lang="en-US" sz="1600" i="1" dirty="0">
+                <a:solidFill>
+                  <a:srgbClr val="555555"/>
                 </a:solidFill>
                 <a:latin typeface="Times New Roman" pitchFamily="34" charset="0"/>
                 <a:ea typeface="Times New Roman" pitchFamily="34" charset="-122"/>
                 <a:cs typeface="Times New Roman" pitchFamily="34" charset="-120"/>
               </a:rPr>
-              <a:t>Remediation</a:t>
-            </a:r>
-            <a:endParaRPr lang="en-US" sz="3600" dirty="0"/>
-          </a:p>
-        </p:txBody>
-      </p:sp>
-      <p:sp>
-        <p:nvSpPr>
-          <p:cNvPr id="5" name="Text 2"/>
-          <p:cNvSpPr/>
-          <p:nvPr/>
-        </p:nvSpPr>
-        <p:spPr>
-          <a:xfrm>
-            <a:off x="2697480" y="1783080"/>
-            <a:ext cx="9174175" cy="4663440"/>
-          </a:xfrm>
-          <a:prstGeom prst="rect">
-            <a:avLst/>
-          </a:prstGeom>
-          <a:noFill/>
-          <a:ln/>
-        </p:spPr>
-        <p:txBody>
-          <a:bodyPr wrap="square" lIns="0" tIns="0" rIns="0" bIns="0" rtlCol="0" anchor="t"/>
-          <a:lstStyle/>
-          <a:p>
-            <a:pPr algn="l" indent="0" marL="0">
-              <a:spcAft>
-                <a:spcPts val="800"/>
-              </a:spcAft>
-              <a:buNone/>
-            </a:pPr>
-            <a:r>
-              <a:rPr lang="en-US" sz="4000" b="1" dirty="0">
-                <a:solidFill>
-                  <a:srgbClr val="111111"/>
-                </a:solidFill>
-                <a:latin typeface="Times New Roman" pitchFamily="34" charset="0"/>
-                <a:ea typeface="Times New Roman" pitchFamily="34" charset="-122"/>
-                <a:cs typeface="Times New Roman" pitchFamily="34" charset="-120"/>
-              </a:rPr>
-              <a:t>Fill in the blanks:</a:t>
-            </a:r>
-            <a:endParaRPr lang="en-US" sz="4000" dirty="0"/>
-          </a:p>
-          <a:p>
-            <a:pPr algn="l" marL="342900" indent="-342900">
-              <a:spcAft>
-                <a:spcPts val="800"/>
-              </a:spcAft>
-              <a:buSzPct val="100000"/>
-              <a:buFont typeface="+mj-lt"/>
-              <a:buAutoNum type="arabicPeriod" startAt="1"/>
-            </a:pPr>
-            <a:r>
-              <a:rPr lang="en-US" sz="4000" dirty="0">
-                <a:solidFill>
-                  <a:srgbClr val="111111"/>
-                </a:solidFill>
-                <a:latin typeface="Times New Roman" pitchFamily="34" charset="0"/>
-                <a:ea typeface="Times New Roman" pitchFamily="34" charset="-122"/>
-                <a:cs typeface="Times New Roman" pitchFamily="34" charset="-120"/>
-              </a:rPr>
-              <a:t>Most waves are caused by the ______.</a:t>
-            </a:r>
-            <a:endParaRPr lang="en-US" sz="4000" dirty="0"/>
-          </a:p>
-          <a:p>
-            <a:pPr algn="l" marL="342900" indent="-342900">
-              <a:spcAft>
-                <a:spcPts val="800"/>
-              </a:spcAft>
-              <a:buSzPct val="100000"/>
-              <a:buFont typeface="+mj-lt"/>
-              <a:buAutoNum type="arabicPeriod" startAt="1"/>
-            </a:pPr>
-            <a:r>
-              <a:rPr lang="en-US" sz="4000" dirty="0">
-                <a:solidFill>
-                  <a:srgbClr val="111111"/>
-                </a:solidFill>
-                <a:latin typeface="Times New Roman" pitchFamily="34" charset="0"/>
-                <a:ea typeface="Times New Roman" pitchFamily="34" charset="-122"/>
-                <a:cs typeface="Times New Roman" pitchFamily="34" charset="-120"/>
-              </a:rPr>
-              <a:t>Water going back to the sea is the ______.</a:t>
-            </a:r>
-            <a:endParaRPr lang="en-US" sz="4000" dirty="0"/>
-          </a:p>
-          <a:p>
-            <a:pPr algn="l" marL="342900" indent="-342900">
-              <a:spcAft>
-                <a:spcPts val="800"/>
-              </a:spcAft>
-              <a:buSzPct val="100000"/>
-              <a:buFont typeface="+mj-lt"/>
-              <a:buAutoNum type="arabicPeriod" startAt="1"/>
-            </a:pPr>
-            <a:r>
-              <a:rPr lang="en-US" sz="4000" dirty="0">
-                <a:solidFill>
-                  <a:srgbClr val="111111"/>
-                </a:solidFill>
-                <a:latin typeface="Times New Roman" pitchFamily="34" charset="0"/>
-                <a:ea typeface="Times New Roman" pitchFamily="34" charset="-122"/>
-                <a:cs typeface="Times New Roman" pitchFamily="34" charset="-120"/>
-              </a:rPr>
-              <a:t>High waves that destroy the beach are ______ waves.</a:t>
-            </a:r>
-            <a:endParaRPr lang="en-US" sz="4000" dirty="0"/>
+              <a:t>Illustration: high waves</a:t>
+            </a:r>
+            <a:endParaRPr lang="en-US" sz="1600" dirty="0"/>
           </a:p>
         </p:txBody>
       </p:sp>
@@ -14656,7 +15483,7 @@
                 <a:ea typeface="Calibri" pitchFamily="34" charset="-122"/>
                 <a:cs typeface="Calibri" pitchFamily="34" charset="-120"/>
               </a:rPr>
-              <a:t>HOMEWORK</a:t>
+              <a:t>FORMATIVE EVALUATION</a:t>
             </a:r>
             <a:endParaRPr lang="en-US" sz="1400" dirty="0"/>
           </a:p>
@@ -14721,7 +15548,7 @@
                 <a:ea typeface="Times New Roman" pitchFamily="34" charset="-122"/>
                 <a:cs typeface="Times New Roman" pitchFamily="34" charset="-120"/>
               </a:rPr>
-              <a:t>Homework</a:t>
+              <a:t>Evaluation 1</a:t>
             </a:r>
             <a:endParaRPr lang="en-US" sz="3600" dirty="0"/>
           </a:p>
@@ -14763,7 +15590,7 @@
                 <a:ea typeface="Times New Roman" pitchFamily="34" charset="-122"/>
                 <a:cs typeface="Times New Roman" pitchFamily="34" charset="-120"/>
               </a:rPr>
-              <a:t>Look at photos of the coast of Limbe or Kribi. Draw a rocky part of the coast and name any holes, arches or rocks in the sea that you see.</a:t>
+              <a:t>What is the swash?</a:t>
             </a:r>
             <a:endParaRPr lang="en-US" sz="4000" dirty="0"/>
           </a:p>
@@ -14875,7 +15702,7 @@
                 <a:ea typeface="Calibri" pitchFamily="34" charset="-122"/>
                 <a:cs typeface="Calibri" pitchFamily="34" charset="-120"/>
               </a:rPr>
-              <a:t>NEXT LESSON</a:t>
+              <a:t>FORMATIVE EVALUATION</a:t>
             </a:r>
             <a:endParaRPr lang="en-US" sz="1400" dirty="0"/>
           </a:p>
@@ -14940,7 +15767,7 @@
                 <a:ea typeface="Times New Roman" pitchFamily="34" charset="-122"/>
                 <a:cs typeface="Times New Roman" pitchFamily="34" charset="-120"/>
               </a:rPr>
-              <a:t>Next Lesson</a:t>
+              <a:t>Expected Answer</a:t>
             </a:r>
             <a:endParaRPr lang="en-US" sz="3600" dirty="0"/>
           </a:p>
@@ -14964,17 +15791,17 @@
           <a:ln/>
         </p:spPr>
         <p:txBody>
-          <a:bodyPr wrap="square" lIns="0" tIns="0" rIns="0" bIns="0" rtlCol="0" anchor="ctr"/>
-          <a:lstStyle/>
-          <a:p>
-            <a:pPr algn="ctr" indent="0" marL="0">
+          <a:bodyPr wrap="square" lIns="0" tIns="0" rIns="0" bIns="0" rtlCol="0" anchor="t"/>
+          <a:lstStyle/>
+          <a:p>
+            <a:pPr algn="l" indent="0" marL="0">
               <a:spcAft>
                 <a:spcPts val="800"/>
               </a:spcAft>
               <a:buNone/>
             </a:pPr>
             <a:r>
-              <a:rPr lang="en-US" sz="4000" b="1" dirty="0">
+              <a:rPr lang="en-US" sz="4000" dirty="0">
                 <a:solidFill>
                   <a:srgbClr val="111111"/>
                 </a:solidFill>
@@ -14982,27 +15809,7 @@
                 <a:ea typeface="Times New Roman" pitchFamily="34" charset="-122"/>
                 <a:cs typeface="Times New Roman" pitchFamily="34" charset="-120"/>
               </a:rPr>
-              <a:t>Our next lesson will be on:</a:t>
-            </a:r>
-            <a:endParaRPr lang="en-US" sz="4000" dirty="0"/>
-          </a:p>
-          <a:p>
-            <a:pPr algn="ctr" indent="0" marL="0">
-              <a:spcAft>
-                <a:spcPts val="800"/>
-              </a:spcAft>
-              <a:buNone/>
-            </a:pPr>
-            <a:r>
-              <a:rPr lang="en-US" sz="4000" b="1" dirty="0">
-                <a:solidFill>
-                  <a:srgbClr val="990011"/>
-                </a:solidFill>
-                <a:latin typeface="Times New Roman" pitchFamily="34" charset="0"/>
-                <a:ea typeface="Times New Roman" pitchFamily="34" charset="-122"/>
-                <a:cs typeface="Times New Roman" pitchFamily="34" charset="-120"/>
-              </a:rPr>
-              <a:t>Lesson 24: Main Erosional Processes and Features of Wave Action</a:t>
+              <a:t>The water that goes up the beach.</a:t>
             </a:r>
             <a:endParaRPr lang="en-US" sz="4000" dirty="0"/>
           </a:p>
@@ -15114,6 +15921,1187 @@
                 <a:ea typeface="Calibri" pitchFamily="34" charset="-122"/>
                 <a:cs typeface="Calibri" pitchFamily="34" charset="-120"/>
               </a:rPr>
+              <a:t>FORMATIVE EVALUATION</a:t>
+            </a:r>
+            <a:endParaRPr lang="en-US" sz="1400" dirty="0"/>
+          </a:p>
+        </p:txBody>
+      </p:sp>
+      <p:pic>
+        <p:nvPicPr>
+          <p:cNvPr id="3" name="Image 0" descr="/home/claude/f4/img/minesec_sheet.png">    </p:cNvPr>
+          <p:cNvPicPr>
+            <a:picLocks noChangeAspect="1"/>
+          </p:cNvPicPr>
+          <p:nvPr/>
+        </p:nvPicPr>
+        <p:blipFill>
+          <a:blip r:embed="rId1"/>
+          <a:stretch>
+            <a:fillRect/>
+          </a:stretch>
+        </p:blipFill>
+        <p:spPr>
+          <a:xfrm>
+            <a:off x="0" y="658368"/>
+            <a:ext cx="5120640" cy="5833872"/>
+          </a:xfrm>
+          <a:prstGeom prst="rect">
+            <a:avLst/>
+          </a:prstGeom>
+        </p:spPr>
+      </p:pic>
+      <p:sp>
+        <p:nvSpPr>
+          <p:cNvPr id="4" name="Text 1"/>
+          <p:cNvSpPr/>
+          <p:nvPr/>
+        </p:nvSpPr>
+        <p:spPr>
+          <a:xfrm>
+            <a:off x="5349240" y="1005840"/>
+            <a:ext cx="6522415" cy="731520"/>
+          </a:xfrm>
+          <a:prstGeom prst="rect">
+            <a:avLst/>
+          </a:prstGeom>
+          <a:noFill/>
+          <a:ln/>
+        </p:spPr>
+        <p:txBody>
+          <a:bodyPr wrap="square" lIns="0" tIns="0" rIns="0" bIns="0" rtlCol="0" anchor="ctr">
+            <a:normAutofit/>
+          </a:bodyPr>
+          <a:lstStyle/>
+          <a:p>
+            <a:pPr algn="ctr" indent="0" marL="0">
+              <a:buNone/>
+            </a:pPr>
+            <a:r>
+              <a:rPr lang="en-US" sz="3600" b="1" dirty="0">
+                <a:solidFill>
+                  <a:srgbClr val="990011"/>
+                </a:solidFill>
+                <a:latin typeface="Times New Roman" pitchFamily="34" charset="0"/>
+                <a:ea typeface="Times New Roman" pitchFamily="34" charset="-122"/>
+                <a:cs typeface="Times New Roman" pitchFamily="34" charset="-120"/>
+              </a:rPr>
+              <a:t>Evaluation 2</a:t>
+            </a:r>
+            <a:endParaRPr lang="en-US" sz="3600" dirty="0"/>
+          </a:p>
+        </p:txBody>
+      </p:sp>
+      <p:sp>
+        <p:nvSpPr>
+          <p:cNvPr id="5" name="Text 2"/>
+          <p:cNvSpPr/>
+          <p:nvPr/>
+        </p:nvSpPr>
+        <p:spPr>
+          <a:xfrm>
+            <a:off x="5349240" y="1783080"/>
+            <a:ext cx="6522415" cy="4663440"/>
+          </a:xfrm>
+          <a:prstGeom prst="rect">
+            <a:avLst/>
+          </a:prstGeom>
+          <a:noFill/>
+          <a:ln/>
+        </p:spPr>
+        <p:txBody>
+          <a:bodyPr wrap="square" lIns="0" tIns="0" rIns="0" bIns="0" rtlCol="0" anchor="t"/>
+          <a:lstStyle/>
+          <a:p>
+            <a:pPr algn="l" indent="0" marL="0">
+              <a:spcAft>
+                <a:spcPts val="800"/>
+              </a:spcAft>
+              <a:buNone/>
+            </a:pPr>
+            <a:r>
+              <a:rPr lang="en-US" sz="4000" dirty="0">
+                <a:solidFill>
+                  <a:srgbClr val="111111"/>
+                </a:solidFill>
+                <a:latin typeface="Times New Roman" pitchFamily="34" charset="0"/>
+                <a:ea typeface="Times New Roman" pitchFamily="34" charset="-122"/>
+                <a:cs typeface="Times New Roman" pitchFamily="34" charset="-120"/>
+              </a:rPr>
+              <a:t>Give one difference between constructive and destructive waves.</a:t>
+            </a:r>
+            <a:endParaRPr lang="en-US" sz="4000" dirty="0"/>
+          </a:p>
+        </p:txBody>
+      </p:sp>
+      <p:sp>
+        <p:nvSpPr>
+          <p:cNvPr id="25" name="Slide Number Placeholder 0"/>
+          <p:cNvSpPr>
+            <a:spLocks noGrp="1"/>
+          </p:cNvSpPr>
+          <p:nvPr>
+            <p:ph type="sldNum" sz="quarter" idx="4294967295"/>
+          </p:nvPr>
+        </p:nvSpPr>
+        <p:spPr>
+          <a:xfrm>
+            <a:off x="27432" y="91440"/>
+            <a:ext cx="585216" cy="475488"/>
+          </a:xfrm>
+          <a:prstGeom prst="rect">
+            <a:avLst/>
+          </a:prstGeom>
+          <a:extLst>
+            <a:ext uri="{C572A759-6A51-4108-AA02-DFA0A04FC94B}">
+              <ma14:wrappingTextBoxFlag xmlns:ma14="http://schemas.microsoft.com/office/mac/drawingml/2011/main" val="0"/>
+            </a:ext>
+          </a:extLst>
+        </p:spPr>
+        <p:txBody>
+          <a:bodyPr/>
+          <a:lstStyle>
+            <a:lvl1pPr>
+              <a:defRPr sz="2000">
+                <a:solidFill>
+                  <a:srgbClr val="FFFFFF"/>
+                </a:solidFill>
+                <a:latin typeface="Calibri"/>
+                <a:ea typeface="Calibri"/>
+                <a:cs typeface="Calibri"/>
+              </a:defRPr>
+            </a:lvl1pPr>
+          </a:lstStyle>
+          <a:p>
+            <a:pPr algn="ctr"/>
+            <a:fld id="{F7021451-1387-4CA6-816F-3879F97B5CBC}" type="slidenum">
+              <a:rPr b="1" lang="en-US"/>
+              <a:t>42</a:t>
+            </a:fld>
+            <a:endParaRPr lang="en-US"/>
+          </a:p>
+        </p:txBody>
+      </p:sp>
+    </p:spTree>
+  </p:cSld>
+  <p:clrMapOvr>
+    <a:masterClrMapping/>
+  </p:clrMapOvr>
+</p:sld>
+</file>
+
+<file path=ppt/slides/slide43.xml><?xml version="1.0" encoding="utf-8"?>
+<p:sld xmlns:a="http://schemas.openxmlformats.org/drawingml/2006/main" xmlns:r="http://schemas.openxmlformats.org/officeDocument/2006/relationships" xmlns:p="http://schemas.openxmlformats.org/presentationml/2006/main">
+  <p:cSld name="Slide 43">
+    <p:spTree>
+      <p:nvGrpSpPr>
+        <p:cNvPr id="1" name=""/>
+        <p:cNvGrpSpPr/>
+        <p:nvPr/>
+      </p:nvGrpSpPr>
+      <p:grpSpPr>
+        <a:xfrm>
+          <a:off x="0" y="0"/>
+          <a:ext cx="0" cy="0"/>
+          <a:chOff x="0" y="0"/>
+          <a:chExt cx="0" cy="0"/>
+        </a:xfrm>
+      </p:grpSpPr>
+      <p:sp>
+        <p:nvSpPr>
+          <p:cNvPr id="2" name="Text 0"/>
+          <p:cNvSpPr/>
+          <p:nvPr/>
+        </p:nvSpPr>
+        <p:spPr>
+          <a:xfrm>
+            <a:off x="457200" y="713232"/>
+            <a:ext cx="11368735" cy="274320"/>
+          </a:xfrm>
+          <a:prstGeom prst="rect">
+            <a:avLst/>
+          </a:prstGeom>
+          <a:noFill/>
+          <a:ln/>
+        </p:spPr>
+        <p:txBody>
+          <a:bodyPr wrap="square" lIns="0" tIns="0" rIns="0" bIns="0" rtlCol="0" anchor="ctr"/>
+          <a:lstStyle/>
+          <a:p>
+            <a:pPr algn="r" indent="0" marL="0">
+              <a:buNone/>
+            </a:pPr>
+            <a:r>
+              <a:rPr lang="en-US" sz="1400" b="1" dirty="0">
+                <a:solidFill>
+                  <a:srgbClr val="1C3F6E"/>
+                </a:solidFill>
+                <a:latin typeface="Calibri" pitchFamily="34" charset="0"/>
+                <a:ea typeface="Calibri" pitchFamily="34" charset="-122"/>
+                <a:cs typeface="Calibri" pitchFamily="34" charset="-120"/>
+              </a:rPr>
+              <a:t>FORMATIVE EVALUATION</a:t>
+            </a:r>
+            <a:endParaRPr lang="en-US" sz="1400" dirty="0"/>
+          </a:p>
+        </p:txBody>
+      </p:sp>
+      <p:pic>
+        <p:nvPicPr>
+          <p:cNvPr id="3" name="Image 0" descr="/home/claude/f4/img/minesec_sheet.png">    </p:cNvPr>
+          <p:cNvPicPr>
+            <a:picLocks noChangeAspect="1"/>
+          </p:cNvPicPr>
+          <p:nvPr/>
+        </p:nvPicPr>
+        <p:blipFill>
+          <a:blip r:embed="rId1"/>
+          <a:stretch>
+            <a:fillRect/>
+          </a:stretch>
+        </p:blipFill>
+        <p:spPr>
+          <a:xfrm>
+            <a:off x="0" y="658368"/>
+            <a:ext cx="5120640" cy="5833872"/>
+          </a:xfrm>
+          <a:prstGeom prst="rect">
+            <a:avLst/>
+          </a:prstGeom>
+        </p:spPr>
+      </p:pic>
+      <p:sp>
+        <p:nvSpPr>
+          <p:cNvPr id="4" name="Text 1"/>
+          <p:cNvSpPr/>
+          <p:nvPr/>
+        </p:nvSpPr>
+        <p:spPr>
+          <a:xfrm>
+            <a:off x="5349240" y="1005840"/>
+            <a:ext cx="6522415" cy="731520"/>
+          </a:xfrm>
+          <a:prstGeom prst="rect">
+            <a:avLst/>
+          </a:prstGeom>
+          <a:noFill/>
+          <a:ln/>
+        </p:spPr>
+        <p:txBody>
+          <a:bodyPr wrap="square" lIns="0" tIns="0" rIns="0" bIns="0" rtlCol="0" anchor="ctr">
+            <a:normAutofit/>
+          </a:bodyPr>
+          <a:lstStyle/>
+          <a:p>
+            <a:pPr algn="ctr" indent="0" marL="0">
+              <a:buNone/>
+            </a:pPr>
+            <a:r>
+              <a:rPr lang="en-US" sz="3600" b="1" dirty="0">
+                <a:solidFill>
+                  <a:srgbClr val="990011"/>
+                </a:solidFill>
+                <a:latin typeface="Times New Roman" pitchFamily="34" charset="0"/>
+                <a:ea typeface="Times New Roman" pitchFamily="34" charset="-122"/>
+                <a:cs typeface="Times New Roman" pitchFamily="34" charset="-120"/>
+              </a:rPr>
+              <a:t>Expected Answer</a:t>
+            </a:r>
+            <a:endParaRPr lang="en-US" sz="3600" dirty="0"/>
+          </a:p>
+        </p:txBody>
+      </p:sp>
+      <p:sp>
+        <p:nvSpPr>
+          <p:cNvPr id="5" name="Text 2"/>
+          <p:cNvSpPr/>
+          <p:nvPr/>
+        </p:nvSpPr>
+        <p:spPr>
+          <a:xfrm>
+            <a:off x="5349240" y="1783080"/>
+            <a:ext cx="6522415" cy="4663440"/>
+          </a:xfrm>
+          <a:prstGeom prst="rect">
+            <a:avLst/>
+          </a:prstGeom>
+          <a:noFill/>
+          <a:ln/>
+        </p:spPr>
+        <p:txBody>
+          <a:bodyPr wrap="square" lIns="0" tIns="0" rIns="0" bIns="0" rtlCol="0" anchor="t"/>
+          <a:lstStyle/>
+          <a:p>
+            <a:pPr algn="l" indent="0" marL="0">
+              <a:spcAft>
+                <a:spcPts val="800"/>
+              </a:spcAft>
+              <a:buNone/>
+            </a:pPr>
+            <a:r>
+              <a:rPr lang="en-US" sz="4000" dirty="0">
+                <a:solidFill>
+                  <a:srgbClr val="111111"/>
+                </a:solidFill>
+                <a:latin typeface="Times New Roman" pitchFamily="34" charset="0"/>
+                <a:ea typeface="Times New Roman" pitchFamily="34" charset="-122"/>
+                <a:cs typeface="Times New Roman" pitchFamily="34" charset="-120"/>
+              </a:rPr>
+              <a:t>Constructive waves build the beach; destructive waves destroy it.</a:t>
+            </a:r>
+            <a:endParaRPr lang="en-US" sz="4000" dirty="0"/>
+          </a:p>
+        </p:txBody>
+      </p:sp>
+      <p:sp>
+        <p:nvSpPr>
+          <p:cNvPr id="25" name="Slide Number Placeholder 0"/>
+          <p:cNvSpPr>
+            <a:spLocks noGrp="1"/>
+          </p:cNvSpPr>
+          <p:nvPr>
+            <p:ph type="sldNum" sz="quarter" idx="4294967295"/>
+          </p:nvPr>
+        </p:nvSpPr>
+        <p:spPr>
+          <a:xfrm>
+            <a:off x="27432" y="91440"/>
+            <a:ext cx="585216" cy="475488"/>
+          </a:xfrm>
+          <a:prstGeom prst="rect">
+            <a:avLst/>
+          </a:prstGeom>
+          <a:extLst>
+            <a:ext uri="{C572A759-6A51-4108-AA02-DFA0A04FC94B}">
+              <ma14:wrappingTextBoxFlag xmlns:ma14="http://schemas.microsoft.com/office/mac/drawingml/2011/main" val="0"/>
+            </a:ext>
+          </a:extLst>
+        </p:spPr>
+        <p:txBody>
+          <a:bodyPr/>
+          <a:lstStyle>
+            <a:lvl1pPr>
+              <a:defRPr sz="2000">
+                <a:solidFill>
+                  <a:srgbClr val="FFFFFF"/>
+                </a:solidFill>
+                <a:latin typeface="Calibri"/>
+                <a:ea typeface="Calibri"/>
+                <a:cs typeface="Calibri"/>
+              </a:defRPr>
+            </a:lvl1pPr>
+          </a:lstStyle>
+          <a:p>
+            <a:pPr algn="ctr"/>
+            <a:fld id="{F7021451-1387-4CA6-816F-3879F97B5CBC}" type="slidenum">
+              <a:rPr b="1" lang="en-US"/>
+              <a:t>43</a:t>
+            </a:fld>
+            <a:endParaRPr lang="en-US"/>
+          </a:p>
+        </p:txBody>
+      </p:sp>
+    </p:spTree>
+  </p:cSld>
+  <p:clrMapOvr>
+    <a:masterClrMapping/>
+  </p:clrMapOvr>
+</p:sld>
+</file>
+
+<file path=ppt/slides/slide44.xml><?xml version="1.0" encoding="utf-8"?>
+<p:sld xmlns:a="http://schemas.openxmlformats.org/drawingml/2006/main" xmlns:r="http://schemas.openxmlformats.org/officeDocument/2006/relationships" xmlns:p="http://schemas.openxmlformats.org/presentationml/2006/main">
+  <p:cSld name="Slide 44">
+    <p:spTree>
+      <p:nvGrpSpPr>
+        <p:cNvPr id="1" name=""/>
+        <p:cNvGrpSpPr/>
+        <p:nvPr/>
+      </p:nvGrpSpPr>
+      <p:grpSpPr>
+        <a:xfrm>
+          <a:off x="0" y="0"/>
+          <a:ext cx="0" cy="0"/>
+          <a:chOff x="0" y="0"/>
+          <a:chExt cx="0" cy="0"/>
+        </a:xfrm>
+      </p:grpSpPr>
+      <p:sp>
+        <p:nvSpPr>
+          <p:cNvPr id="2" name="Text 0"/>
+          <p:cNvSpPr/>
+          <p:nvPr/>
+        </p:nvSpPr>
+        <p:spPr>
+          <a:xfrm>
+            <a:off x="457200" y="713232"/>
+            <a:ext cx="11368735" cy="274320"/>
+          </a:xfrm>
+          <a:prstGeom prst="rect">
+            <a:avLst/>
+          </a:prstGeom>
+          <a:noFill/>
+          <a:ln/>
+        </p:spPr>
+        <p:txBody>
+          <a:bodyPr wrap="square" lIns="0" tIns="0" rIns="0" bIns="0" rtlCol="0" anchor="ctr"/>
+          <a:lstStyle/>
+          <a:p>
+            <a:pPr algn="r" indent="0" marL="0">
+              <a:buNone/>
+            </a:pPr>
+            <a:r>
+              <a:rPr lang="en-US" sz="1400" b="1" dirty="0">
+                <a:solidFill>
+                  <a:srgbClr val="1C3F6E"/>
+                </a:solidFill>
+                <a:latin typeface="Calibri" pitchFamily="34" charset="0"/>
+                <a:ea typeface="Calibri" pitchFamily="34" charset="-122"/>
+                <a:cs typeface="Calibri" pitchFamily="34" charset="-120"/>
+              </a:rPr>
+              <a:t>REMEDIATION</a:t>
+            </a:r>
+            <a:endParaRPr lang="en-US" sz="1400" dirty="0"/>
+          </a:p>
+        </p:txBody>
+      </p:sp>
+      <p:pic>
+        <p:nvPicPr>
+          <p:cNvPr id="3" name="Image 0" descr="/home/claude/f4/img/minesec_sheet.png">    </p:cNvPr>
+          <p:cNvPicPr>
+            <a:picLocks noChangeAspect="1"/>
+          </p:cNvPicPr>
+          <p:nvPr/>
+        </p:nvPicPr>
+        <p:blipFill>
+          <a:blip r:embed="rId1"/>
+          <a:stretch>
+            <a:fillRect/>
+          </a:stretch>
+        </p:blipFill>
+        <p:spPr>
+          <a:xfrm>
+            <a:off x="0" y="658368"/>
+            <a:ext cx="2468880" cy="5833872"/>
+          </a:xfrm>
+          <a:prstGeom prst="rect">
+            <a:avLst/>
+          </a:prstGeom>
+        </p:spPr>
+      </p:pic>
+      <p:sp>
+        <p:nvSpPr>
+          <p:cNvPr id="4" name="Text 1"/>
+          <p:cNvSpPr/>
+          <p:nvPr/>
+        </p:nvSpPr>
+        <p:spPr>
+          <a:xfrm>
+            <a:off x="2697480" y="1005840"/>
+            <a:ext cx="9174175" cy="731520"/>
+          </a:xfrm>
+          <a:prstGeom prst="rect">
+            <a:avLst/>
+          </a:prstGeom>
+          <a:noFill/>
+          <a:ln/>
+        </p:spPr>
+        <p:txBody>
+          <a:bodyPr wrap="square" lIns="0" tIns="0" rIns="0" bIns="0" rtlCol="0" anchor="ctr">
+            <a:normAutofit/>
+          </a:bodyPr>
+          <a:lstStyle/>
+          <a:p>
+            <a:pPr algn="ctr" indent="0" marL="0">
+              <a:buNone/>
+            </a:pPr>
+            <a:r>
+              <a:rPr lang="en-US" sz="3600" b="1" dirty="0">
+                <a:solidFill>
+                  <a:srgbClr val="990011"/>
+                </a:solidFill>
+                <a:latin typeface="Times New Roman" pitchFamily="34" charset="0"/>
+                <a:ea typeface="Times New Roman" pitchFamily="34" charset="-122"/>
+                <a:cs typeface="Times New Roman" pitchFamily="34" charset="-120"/>
+              </a:rPr>
+              <a:t>Remediation</a:t>
+            </a:r>
+            <a:endParaRPr lang="en-US" sz="3600" dirty="0"/>
+          </a:p>
+        </p:txBody>
+      </p:sp>
+      <p:sp>
+        <p:nvSpPr>
+          <p:cNvPr id="5" name="Text 2"/>
+          <p:cNvSpPr/>
+          <p:nvPr/>
+        </p:nvSpPr>
+        <p:spPr>
+          <a:xfrm>
+            <a:off x="2697480" y="1783080"/>
+            <a:ext cx="9174175" cy="4663440"/>
+          </a:xfrm>
+          <a:prstGeom prst="rect">
+            <a:avLst/>
+          </a:prstGeom>
+          <a:noFill/>
+          <a:ln/>
+        </p:spPr>
+        <p:txBody>
+          <a:bodyPr wrap="square" lIns="0" tIns="0" rIns="0" bIns="0" rtlCol="0" anchor="t"/>
+          <a:lstStyle/>
+          <a:p>
+            <a:pPr algn="l" indent="0" marL="0">
+              <a:spcAft>
+                <a:spcPts val="800"/>
+              </a:spcAft>
+              <a:buNone/>
+            </a:pPr>
+            <a:r>
+              <a:rPr lang="en-US" sz="4000" b="1" dirty="0">
+                <a:solidFill>
+                  <a:srgbClr val="111111"/>
+                </a:solidFill>
+                <a:latin typeface="Times New Roman" pitchFamily="34" charset="0"/>
+                <a:ea typeface="Times New Roman" pitchFamily="34" charset="-122"/>
+                <a:cs typeface="Times New Roman" pitchFamily="34" charset="-120"/>
+              </a:rPr>
+              <a:t>Fill in the blanks:</a:t>
+            </a:r>
+            <a:endParaRPr lang="en-US" sz="4000" dirty="0"/>
+          </a:p>
+          <a:p>
+            <a:pPr algn="l" marL="342900" indent="-342900">
+              <a:spcAft>
+                <a:spcPts val="800"/>
+              </a:spcAft>
+              <a:buSzPct val="100000"/>
+              <a:buFont typeface="+mj-lt"/>
+              <a:buAutoNum type="arabicPeriod" startAt="1"/>
+            </a:pPr>
+            <a:r>
+              <a:rPr lang="en-US" sz="4000" dirty="0">
+                <a:solidFill>
+                  <a:srgbClr val="111111"/>
+                </a:solidFill>
+                <a:latin typeface="Times New Roman" pitchFamily="34" charset="0"/>
+                <a:ea typeface="Times New Roman" pitchFamily="34" charset="-122"/>
+                <a:cs typeface="Times New Roman" pitchFamily="34" charset="-120"/>
+              </a:rPr>
+              <a:t>Most waves are caused by the ______.</a:t>
+            </a:r>
+            <a:endParaRPr lang="en-US" sz="4000" dirty="0"/>
+          </a:p>
+          <a:p>
+            <a:pPr algn="l" marL="342900" indent="-342900">
+              <a:spcAft>
+                <a:spcPts val="800"/>
+              </a:spcAft>
+              <a:buSzPct val="100000"/>
+              <a:buFont typeface="+mj-lt"/>
+              <a:buAutoNum type="arabicPeriod" startAt="1"/>
+            </a:pPr>
+            <a:r>
+              <a:rPr lang="en-US" sz="4000" dirty="0">
+                <a:solidFill>
+                  <a:srgbClr val="111111"/>
+                </a:solidFill>
+                <a:latin typeface="Times New Roman" pitchFamily="34" charset="0"/>
+                <a:ea typeface="Times New Roman" pitchFamily="34" charset="-122"/>
+                <a:cs typeface="Times New Roman" pitchFamily="34" charset="-120"/>
+              </a:rPr>
+              <a:t>Water going back to the sea is the ______.</a:t>
+            </a:r>
+            <a:endParaRPr lang="en-US" sz="4000" dirty="0"/>
+          </a:p>
+          <a:p>
+            <a:pPr algn="l" marL="342900" indent="-342900">
+              <a:spcAft>
+                <a:spcPts val="800"/>
+              </a:spcAft>
+              <a:buSzPct val="100000"/>
+              <a:buFont typeface="+mj-lt"/>
+              <a:buAutoNum type="arabicPeriod" startAt="1"/>
+            </a:pPr>
+            <a:r>
+              <a:rPr lang="en-US" sz="4000" dirty="0">
+                <a:solidFill>
+                  <a:srgbClr val="111111"/>
+                </a:solidFill>
+                <a:latin typeface="Times New Roman" pitchFamily="34" charset="0"/>
+                <a:ea typeface="Times New Roman" pitchFamily="34" charset="-122"/>
+                <a:cs typeface="Times New Roman" pitchFamily="34" charset="-120"/>
+              </a:rPr>
+              <a:t>High waves that destroy the beach are ______ waves.</a:t>
+            </a:r>
+            <a:endParaRPr lang="en-US" sz="4000" dirty="0"/>
+          </a:p>
+        </p:txBody>
+      </p:sp>
+      <p:sp>
+        <p:nvSpPr>
+          <p:cNvPr id="25" name="Slide Number Placeholder 0"/>
+          <p:cNvSpPr>
+            <a:spLocks noGrp="1"/>
+          </p:cNvSpPr>
+          <p:nvPr>
+            <p:ph type="sldNum" sz="quarter" idx="4294967295"/>
+          </p:nvPr>
+        </p:nvSpPr>
+        <p:spPr>
+          <a:xfrm>
+            <a:off x="27432" y="91440"/>
+            <a:ext cx="585216" cy="475488"/>
+          </a:xfrm>
+          <a:prstGeom prst="rect">
+            <a:avLst/>
+          </a:prstGeom>
+          <a:extLst>
+            <a:ext uri="{C572A759-6A51-4108-AA02-DFA0A04FC94B}">
+              <ma14:wrappingTextBoxFlag xmlns:ma14="http://schemas.microsoft.com/office/mac/drawingml/2011/main" val="0"/>
+            </a:ext>
+          </a:extLst>
+        </p:spPr>
+        <p:txBody>
+          <a:bodyPr/>
+          <a:lstStyle>
+            <a:lvl1pPr>
+              <a:defRPr sz="2000">
+                <a:solidFill>
+                  <a:srgbClr val="FFFFFF"/>
+                </a:solidFill>
+                <a:latin typeface="Calibri"/>
+                <a:ea typeface="Calibri"/>
+                <a:cs typeface="Calibri"/>
+              </a:defRPr>
+            </a:lvl1pPr>
+          </a:lstStyle>
+          <a:p>
+            <a:pPr algn="ctr"/>
+            <a:fld id="{F7021451-1387-4CA6-816F-3879F97B5CBC}" type="slidenum">
+              <a:rPr b="1" lang="en-US"/>
+              <a:t>44</a:t>
+            </a:fld>
+            <a:endParaRPr lang="en-US"/>
+          </a:p>
+        </p:txBody>
+      </p:sp>
+    </p:spTree>
+  </p:cSld>
+  <p:clrMapOvr>
+    <a:masterClrMapping/>
+  </p:clrMapOvr>
+</p:sld>
+</file>
+
+<file path=ppt/slides/slide45.xml><?xml version="1.0" encoding="utf-8"?>
+<p:sld xmlns:a="http://schemas.openxmlformats.org/drawingml/2006/main" xmlns:r="http://schemas.openxmlformats.org/officeDocument/2006/relationships" xmlns:p="http://schemas.openxmlformats.org/presentationml/2006/main">
+  <p:cSld name="Slide 45">
+    <p:spTree>
+      <p:nvGrpSpPr>
+        <p:cNvPr id="1" name=""/>
+        <p:cNvGrpSpPr/>
+        <p:nvPr/>
+      </p:nvGrpSpPr>
+      <p:grpSpPr>
+        <a:xfrm>
+          <a:off x="0" y="0"/>
+          <a:ext cx="0" cy="0"/>
+          <a:chOff x="0" y="0"/>
+          <a:chExt cx="0" cy="0"/>
+        </a:xfrm>
+      </p:grpSpPr>
+      <p:sp>
+        <p:nvSpPr>
+          <p:cNvPr id="2" name="Text 0"/>
+          <p:cNvSpPr/>
+          <p:nvPr/>
+        </p:nvSpPr>
+        <p:spPr>
+          <a:xfrm>
+            <a:off x="457200" y="713232"/>
+            <a:ext cx="11368735" cy="274320"/>
+          </a:xfrm>
+          <a:prstGeom prst="rect">
+            <a:avLst/>
+          </a:prstGeom>
+          <a:noFill/>
+          <a:ln/>
+        </p:spPr>
+        <p:txBody>
+          <a:bodyPr wrap="square" lIns="0" tIns="0" rIns="0" bIns="0" rtlCol="0" anchor="ctr"/>
+          <a:lstStyle/>
+          <a:p>
+            <a:pPr algn="r" indent="0" marL="0">
+              <a:buNone/>
+            </a:pPr>
+            <a:r>
+              <a:rPr lang="en-US" sz="1400" b="1" dirty="0">
+                <a:solidFill>
+                  <a:srgbClr val="1C3F6E"/>
+                </a:solidFill>
+                <a:latin typeface="Calibri" pitchFamily="34" charset="0"/>
+                <a:ea typeface="Calibri" pitchFamily="34" charset="-122"/>
+                <a:cs typeface="Calibri" pitchFamily="34" charset="-120"/>
+              </a:rPr>
+              <a:t>HOMEWORK</a:t>
+            </a:r>
+            <a:endParaRPr lang="en-US" sz="1400" dirty="0"/>
+          </a:p>
+        </p:txBody>
+      </p:sp>
+      <p:pic>
+        <p:nvPicPr>
+          <p:cNvPr id="3" name="Image 0" descr="/home/claude/f4/img/minesec_sheet.png">    </p:cNvPr>
+          <p:cNvPicPr>
+            <a:picLocks noChangeAspect="1"/>
+          </p:cNvPicPr>
+          <p:nvPr/>
+        </p:nvPicPr>
+        <p:blipFill>
+          <a:blip r:embed="rId1"/>
+          <a:stretch>
+            <a:fillRect/>
+          </a:stretch>
+        </p:blipFill>
+        <p:spPr>
+          <a:xfrm>
+            <a:off x="0" y="658368"/>
+            <a:ext cx="5120640" cy="5833872"/>
+          </a:xfrm>
+          <a:prstGeom prst="rect">
+            <a:avLst/>
+          </a:prstGeom>
+        </p:spPr>
+      </p:pic>
+      <p:sp>
+        <p:nvSpPr>
+          <p:cNvPr id="4" name="Text 1"/>
+          <p:cNvSpPr/>
+          <p:nvPr/>
+        </p:nvSpPr>
+        <p:spPr>
+          <a:xfrm>
+            <a:off x="5349240" y="1005840"/>
+            <a:ext cx="6522415" cy="731520"/>
+          </a:xfrm>
+          <a:prstGeom prst="rect">
+            <a:avLst/>
+          </a:prstGeom>
+          <a:noFill/>
+          <a:ln/>
+        </p:spPr>
+        <p:txBody>
+          <a:bodyPr wrap="square" lIns="0" tIns="0" rIns="0" bIns="0" rtlCol="0" anchor="ctr">
+            <a:normAutofit/>
+          </a:bodyPr>
+          <a:lstStyle/>
+          <a:p>
+            <a:pPr algn="ctr" indent="0" marL="0">
+              <a:buNone/>
+            </a:pPr>
+            <a:r>
+              <a:rPr lang="en-US" sz="3600" b="1" dirty="0">
+                <a:solidFill>
+                  <a:srgbClr val="990011"/>
+                </a:solidFill>
+                <a:latin typeface="Times New Roman" pitchFamily="34" charset="0"/>
+                <a:ea typeface="Times New Roman" pitchFamily="34" charset="-122"/>
+                <a:cs typeface="Times New Roman" pitchFamily="34" charset="-120"/>
+              </a:rPr>
+              <a:t>Homework</a:t>
+            </a:r>
+            <a:endParaRPr lang="en-US" sz="3600" dirty="0"/>
+          </a:p>
+        </p:txBody>
+      </p:sp>
+      <p:sp>
+        <p:nvSpPr>
+          <p:cNvPr id="5" name="Text 2"/>
+          <p:cNvSpPr/>
+          <p:nvPr/>
+        </p:nvSpPr>
+        <p:spPr>
+          <a:xfrm>
+            <a:off x="5349240" y="1783080"/>
+            <a:ext cx="6522415" cy="4663440"/>
+          </a:xfrm>
+          <a:prstGeom prst="rect">
+            <a:avLst/>
+          </a:prstGeom>
+          <a:noFill/>
+          <a:ln/>
+        </p:spPr>
+        <p:txBody>
+          <a:bodyPr wrap="square" lIns="0" tIns="0" rIns="0" bIns="0" rtlCol="0" anchor="t"/>
+          <a:lstStyle/>
+          <a:p>
+            <a:pPr algn="l" indent="0" marL="0">
+              <a:spcAft>
+                <a:spcPts val="800"/>
+              </a:spcAft>
+              <a:buNone/>
+            </a:pPr>
+            <a:r>
+              <a:rPr lang="en-US" sz="4000" dirty="0">
+                <a:solidFill>
+                  <a:srgbClr val="111111"/>
+                </a:solidFill>
+                <a:latin typeface="Times New Roman" pitchFamily="34" charset="0"/>
+                <a:ea typeface="Times New Roman" pitchFamily="34" charset="-122"/>
+                <a:cs typeface="Times New Roman" pitchFamily="34" charset="-120"/>
+              </a:rPr>
+              <a:t>Look at photos of the coast of Limbe or Kribi. Draw a rocky part of the coast and name any holes, arches or rocks in the sea that you see.</a:t>
+            </a:r>
+            <a:endParaRPr lang="en-US" sz="4000" dirty="0"/>
+          </a:p>
+        </p:txBody>
+      </p:sp>
+      <p:sp>
+        <p:nvSpPr>
+          <p:cNvPr id="25" name="Slide Number Placeholder 0"/>
+          <p:cNvSpPr>
+            <a:spLocks noGrp="1"/>
+          </p:cNvSpPr>
+          <p:nvPr>
+            <p:ph type="sldNum" sz="quarter" idx="4294967295"/>
+          </p:nvPr>
+        </p:nvSpPr>
+        <p:spPr>
+          <a:xfrm>
+            <a:off x="27432" y="91440"/>
+            <a:ext cx="585216" cy="475488"/>
+          </a:xfrm>
+          <a:prstGeom prst="rect">
+            <a:avLst/>
+          </a:prstGeom>
+          <a:extLst>
+            <a:ext uri="{C572A759-6A51-4108-AA02-DFA0A04FC94B}">
+              <ma14:wrappingTextBoxFlag xmlns:ma14="http://schemas.microsoft.com/office/mac/drawingml/2011/main" val="0"/>
+            </a:ext>
+          </a:extLst>
+        </p:spPr>
+        <p:txBody>
+          <a:bodyPr/>
+          <a:lstStyle>
+            <a:lvl1pPr>
+              <a:defRPr sz="2000">
+                <a:solidFill>
+                  <a:srgbClr val="FFFFFF"/>
+                </a:solidFill>
+                <a:latin typeface="Calibri"/>
+                <a:ea typeface="Calibri"/>
+                <a:cs typeface="Calibri"/>
+              </a:defRPr>
+            </a:lvl1pPr>
+          </a:lstStyle>
+          <a:p>
+            <a:pPr algn="ctr"/>
+            <a:fld id="{F7021451-1387-4CA6-816F-3879F97B5CBC}" type="slidenum">
+              <a:rPr b="1" lang="en-US"/>
+              <a:t>45</a:t>
+            </a:fld>
+            <a:endParaRPr lang="en-US"/>
+          </a:p>
+        </p:txBody>
+      </p:sp>
+    </p:spTree>
+  </p:cSld>
+  <p:clrMapOvr>
+    <a:masterClrMapping/>
+  </p:clrMapOvr>
+</p:sld>
+</file>
+
+<file path=ppt/slides/slide46.xml><?xml version="1.0" encoding="utf-8"?>
+<p:sld xmlns:a="http://schemas.openxmlformats.org/drawingml/2006/main" xmlns:r="http://schemas.openxmlformats.org/officeDocument/2006/relationships" xmlns:p="http://schemas.openxmlformats.org/presentationml/2006/main">
+  <p:cSld name="Slide 46">
+    <p:spTree>
+      <p:nvGrpSpPr>
+        <p:cNvPr id="1" name=""/>
+        <p:cNvGrpSpPr/>
+        <p:nvPr/>
+      </p:nvGrpSpPr>
+      <p:grpSpPr>
+        <a:xfrm>
+          <a:off x="0" y="0"/>
+          <a:ext cx="0" cy="0"/>
+          <a:chOff x="0" y="0"/>
+          <a:chExt cx="0" cy="0"/>
+        </a:xfrm>
+      </p:grpSpPr>
+      <p:sp>
+        <p:nvSpPr>
+          <p:cNvPr id="2" name="Text 0"/>
+          <p:cNvSpPr/>
+          <p:nvPr/>
+        </p:nvSpPr>
+        <p:spPr>
+          <a:xfrm>
+            <a:off x="457200" y="713232"/>
+            <a:ext cx="11368735" cy="274320"/>
+          </a:xfrm>
+          <a:prstGeom prst="rect">
+            <a:avLst/>
+          </a:prstGeom>
+          <a:noFill/>
+          <a:ln/>
+        </p:spPr>
+        <p:txBody>
+          <a:bodyPr wrap="square" lIns="0" tIns="0" rIns="0" bIns="0" rtlCol="0" anchor="ctr"/>
+          <a:lstStyle/>
+          <a:p>
+            <a:pPr algn="r" indent="0" marL="0">
+              <a:buNone/>
+            </a:pPr>
+            <a:r>
+              <a:rPr lang="en-US" sz="1400" b="1" dirty="0">
+                <a:solidFill>
+                  <a:srgbClr val="1C3F6E"/>
+                </a:solidFill>
+                <a:latin typeface="Calibri" pitchFamily="34" charset="0"/>
+                <a:ea typeface="Calibri" pitchFamily="34" charset="-122"/>
+                <a:cs typeface="Calibri" pitchFamily="34" charset="-120"/>
+              </a:rPr>
+              <a:t>NEXT LESSON</a:t>
+            </a:r>
+            <a:endParaRPr lang="en-US" sz="1400" dirty="0"/>
+          </a:p>
+        </p:txBody>
+      </p:sp>
+      <p:pic>
+        <p:nvPicPr>
+          <p:cNvPr id="3" name="Image 0" descr="/home/claude/f4/img/minesec_sheet.png">    </p:cNvPr>
+          <p:cNvPicPr>
+            <a:picLocks noChangeAspect="1"/>
+          </p:cNvPicPr>
+          <p:nvPr/>
+        </p:nvPicPr>
+        <p:blipFill>
+          <a:blip r:embed="rId1"/>
+          <a:stretch>
+            <a:fillRect/>
+          </a:stretch>
+        </p:blipFill>
+        <p:spPr>
+          <a:xfrm>
+            <a:off x="0" y="658368"/>
+            <a:ext cx="5120640" cy="5833872"/>
+          </a:xfrm>
+          <a:prstGeom prst="rect">
+            <a:avLst/>
+          </a:prstGeom>
+        </p:spPr>
+      </p:pic>
+      <p:sp>
+        <p:nvSpPr>
+          <p:cNvPr id="4" name="Text 1"/>
+          <p:cNvSpPr/>
+          <p:nvPr/>
+        </p:nvSpPr>
+        <p:spPr>
+          <a:xfrm>
+            <a:off x="5349240" y="1005840"/>
+            <a:ext cx="6522415" cy="731520"/>
+          </a:xfrm>
+          <a:prstGeom prst="rect">
+            <a:avLst/>
+          </a:prstGeom>
+          <a:noFill/>
+          <a:ln/>
+        </p:spPr>
+        <p:txBody>
+          <a:bodyPr wrap="square" lIns="0" tIns="0" rIns="0" bIns="0" rtlCol="0" anchor="ctr">
+            <a:normAutofit/>
+          </a:bodyPr>
+          <a:lstStyle/>
+          <a:p>
+            <a:pPr algn="ctr" indent="0" marL="0">
+              <a:buNone/>
+            </a:pPr>
+            <a:r>
+              <a:rPr lang="en-US" sz="3600" b="1" dirty="0">
+                <a:solidFill>
+                  <a:srgbClr val="990011"/>
+                </a:solidFill>
+                <a:latin typeface="Times New Roman" pitchFamily="34" charset="0"/>
+                <a:ea typeface="Times New Roman" pitchFamily="34" charset="-122"/>
+                <a:cs typeface="Times New Roman" pitchFamily="34" charset="-120"/>
+              </a:rPr>
+              <a:t>Next Lesson</a:t>
+            </a:r>
+            <a:endParaRPr lang="en-US" sz="3600" dirty="0"/>
+          </a:p>
+        </p:txBody>
+      </p:sp>
+      <p:sp>
+        <p:nvSpPr>
+          <p:cNvPr id="5" name="Text 2"/>
+          <p:cNvSpPr/>
+          <p:nvPr/>
+        </p:nvSpPr>
+        <p:spPr>
+          <a:xfrm>
+            <a:off x="5349240" y="1783080"/>
+            <a:ext cx="6522415" cy="4663440"/>
+          </a:xfrm>
+          <a:prstGeom prst="rect">
+            <a:avLst/>
+          </a:prstGeom>
+          <a:noFill/>
+          <a:ln/>
+        </p:spPr>
+        <p:txBody>
+          <a:bodyPr wrap="square" lIns="0" tIns="0" rIns="0" bIns="0" rtlCol="0" anchor="ctr"/>
+          <a:lstStyle/>
+          <a:p>
+            <a:pPr algn="ctr" indent="0" marL="0">
+              <a:spcAft>
+                <a:spcPts val="800"/>
+              </a:spcAft>
+              <a:buNone/>
+            </a:pPr>
+            <a:r>
+              <a:rPr lang="en-US" sz="4000" b="1" dirty="0">
+                <a:solidFill>
+                  <a:srgbClr val="111111"/>
+                </a:solidFill>
+                <a:latin typeface="Times New Roman" pitchFamily="34" charset="0"/>
+                <a:ea typeface="Times New Roman" pitchFamily="34" charset="-122"/>
+                <a:cs typeface="Times New Roman" pitchFamily="34" charset="-120"/>
+              </a:rPr>
+              <a:t>Our next lesson will be on:</a:t>
+            </a:r>
+            <a:endParaRPr lang="en-US" sz="4000" dirty="0"/>
+          </a:p>
+          <a:p>
+            <a:pPr algn="ctr" indent="0" marL="0">
+              <a:spcAft>
+                <a:spcPts val="800"/>
+              </a:spcAft>
+              <a:buNone/>
+            </a:pPr>
+            <a:r>
+              <a:rPr lang="en-US" sz="4000" b="1" dirty="0">
+                <a:solidFill>
+                  <a:srgbClr val="990011"/>
+                </a:solidFill>
+                <a:latin typeface="Times New Roman" pitchFamily="34" charset="0"/>
+                <a:ea typeface="Times New Roman" pitchFamily="34" charset="-122"/>
+                <a:cs typeface="Times New Roman" pitchFamily="34" charset="-120"/>
+              </a:rPr>
+              <a:t>Lesson 24: Main Erosional Processes and Features of Wave Action</a:t>
+            </a:r>
+            <a:endParaRPr lang="en-US" sz="4000" dirty="0"/>
+          </a:p>
+        </p:txBody>
+      </p:sp>
+      <p:sp>
+        <p:nvSpPr>
+          <p:cNvPr id="25" name="Slide Number Placeholder 0"/>
+          <p:cNvSpPr>
+            <a:spLocks noGrp="1"/>
+          </p:cNvSpPr>
+          <p:nvPr>
+            <p:ph type="sldNum" sz="quarter" idx="4294967295"/>
+          </p:nvPr>
+        </p:nvSpPr>
+        <p:spPr>
+          <a:xfrm>
+            <a:off x="27432" y="91440"/>
+            <a:ext cx="585216" cy="475488"/>
+          </a:xfrm>
+          <a:prstGeom prst="rect">
+            <a:avLst/>
+          </a:prstGeom>
+          <a:extLst>
+            <a:ext uri="{C572A759-6A51-4108-AA02-DFA0A04FC94B}">
+              <ma14:wrappingTextBoxFlag xmlns:ma14="http://schemas.microsoft.com/office/mac/drawingml/2011/main" val="0"/>
+            </a:ext>
+          </a:extLst>
+        </p:spPr>
+        <p:txBody>
+          <a:bodyPr/>
+          <a:lstStyle>
+            <a:lvl1pPr>
+              <a:defRPr sz="2000">
+                <a:solidFill>
+                  <a:srgbClr val="FFFFFF"/>
+                </a:solidFill>
+                <a:latin typeface="Calibri"/>
+                <a:ea typeface="Calibri"/>
+                <a:cs typeface="Calibri"/>
+              </a:defRPr>
+            </a:lvl1pPr>
+          </a:lstStyle>
+          <a:p>
+            <a:pPr algn="ctr"/>
+            <a:fld id="{F7021451-1387-4CA6-816F-3879F97B5CBC}" type="slidenum">
+              <a:rPr b="1" lang="en-US"/>
+              <a:t>46</a:t>
+            </a:fld>
+            <a:endParaRPr lang="en-US"/>
+          </a:p>
+        </p:txBody>
+      </p:sp>
+    </p:spTree>
+  </p:cSld>
+  <p:clrMapOvr>
+    <a:masterClrMapping/>
+  </p:clrMapOvr>
+</p:sld>
+</file>
+
+<file path=ppt/slides/slide47.xml><?xml version="1.0" encoding="utf-8"?>
+<p:sld xmlns:a="http://schemas.openxmlformats.org/drawingml/2006/main" xmlns:r="http://schemas.openxmlformats.org/officeDocument/2006/relationships" xmlns:p="http://schemas.openxmlformats.org/presentationml/2006/main">
+  <p:cSld name="Slide 47">
+    <p:spTree>
+      <p:nvGrpSpPr>
+        <p:cNvPr id="1" name=""/>
+        <p:cNvGrpSpPr/>
+        <p:nvPr/>
+      </p:nvGrpSpPr>
+      <p:grpSpPr>
+        <a:xfrm>
+          <a:off x="0" y="0"/>
+          <a:ext cx="0" cy="0"/>
+          <a:chOff x="0" y="0"/>
+          <a:chExt cx="0" cy="0"/>
+        </a:xfrm>
+      </p:grpSpPr>
+      <p:sp>
+        <p:nvSpPr>
+          <p:cNvPr id="2" name="Text 0"/>
+          <p:cNvSpPr/>
+          <p:nvPr/>
+        </p:nvSpPr>
+        <p:spPr>
+          <a:xfrm>
+            <a:off x="457200" y="713232"/>
+            <a:ext cx="11368735" cy="274320"/>
+          </a:xfrm>
+          <a:prstGeom prst="rect">
+            <a:avLst/>
+          </a:prstGeom>
+          <a:noFill/>
+          <a:ln/>
+        </p:spPr>
+        <p:txBody>
+          <a:bodyPr wrap="square" lIns="0" tIns="0" rIns="0" bIns="0" rtlCol="0" anchor="ctr"/>
+          <a:lstStyle/>
+          <a:p>
+            <a:pPr algn="r" indent="0" marL="0">
+              <a:buNone/>
+            </a:pPr>
+            <a:r>
+              <a:rPr lang="en-US" sz="1400" b="1" dirty="0">
+                <a:solidFill>
+                  <a:srgbClr val="1C3F6E"/>
+                </a:solidFill>
+                <a:latin typeface="Calibri" pitchFamily="34" charset="0"/>
+                <a:ea typeface="Calibri" pitchFamily="34" charset="-122"/>
+                <a:cs typeface="Calibri" pitchFamily="34" charset="-120"/>
+              </a:rPr>
               <a:t>BILINGUAL GAME</a:t>
             </a:r>
             <a:endParaRPr lang="en-US" sz="1400" dirty="0"/>
@@ -15161,7 +17149,7 @@
       </p:sp>
       <p:graphicFrame>
         <p:nvGraphicFramePr>
-          <p:cNvPr id="43" name="Table 0"/>
+          <p:cNvPr id="48" name="Table 0"/>
           <p:cNvGraphicFramePr>
             <a:graphicFrameLocks noGrp="1"/>
           </p:cNvGraphicFramePr>
@@ -16473,7 +18461,7 @@
             <a:pPr algn="ctr"/>
             <a:fld id="{F7021451-1387-4CA6-816F-3879F97B5CBC}" type="slidenum">
               <a:rPr b="1" lang="en-US"/>
-              <a:t>42</a:t>
+              <a:t>47</a:t>
             </a:fld>
             <a:endParaRPr lang="en-US"/>
           </a:p>
@@ -16487,9 +18475,9 @@
 </p:sld>
 </file>
 
-<file path=ppt/slides/slide43.xml><?xml version="1.0" encoding="utf-8"?>
+<file path=ppt/slides/slide48.xml><?xml version="1.0" encoding="utf-8"?>
 <p:sld xmlns:a="http://schemas.openxmlformats.org/drawingml/2006/main" xmlns:r="http://schemas.openxmlformats.org/officeDocument/2006/relationships" xmlns:p="http://schemas.openxmlformats.org/presentationml/2006/main">
-  <p:cSld name="Slide 43">
+  <p:cSld name="Slide 48">
     <p:spTree>
       <p:nvGrpSpPr>
         <p:cNvPr id="1" name=""/>
@@ -16584,7 +18572,7 @@
       </p:sp>
       <p:graphicFrame>
         <p:nvGraphicFramePr>
-          <p:cNvPr id="44" name="Table 0"/>
+          <p:cNvPr id="49" name="Table 0"/>
           <p:cNvGraphicFramePr>
             <a:graphicFrameLocks noGrp="1"/>
           </p:cNvGraphicFramePr>
@@ -17206,7 +19194,7 @@
             <a:pPr algn="ctr"/>
             <a:fld id="{F7021451-1387-4CA6-816F-3879F97B5CBC}" type="slidenum">
               <a:rPr b="1" lang="en-US"/>
-              <a:t>43</a:t>
+              <a:t>48</a:t>
             </a:fld>
             <a:endParaRPr lang="en-US"/>
           </a:p>
@@ -17220,9 +19208,9 @@
 </p:sld>
 </file>
 
-<file path=ppt/slides/slide44.xml><?xml version="1.0" encoding="utf-8"?>
+<file path=ppt/slides/slide49.xml><?xml version="1.0" encoding="utf-8"?>
 <p:sld xmlns:a="http://schemas.openxmlformats.org/drawingml/2006/main" xmlns:r="http://schemas.openxmlformats.org/officeDocument/2006/relationships" xmlns:p="http://schemas.openxmlformats.org/presentationml/2006/main">
-  <p:cSld name="Slide 44">
+  <p:cSld name="Slide 49">
     <p:spTree>
       <p:nvGrpSpPr>
         <p:cNvPr id="1" name=""/>
@@ -17317,7 +19305,7 @@
       </p:sp>
       <p:graphicFrame>
         <p:nvGraphicFramePr>
-          <p:cNvPr id="45" name="Table 0"/>
+          <p:cNvPr id="50" name="Table 0"/>
           <p:cNvGraphicFramePr>
             <a:graphicFrameLocks noGrp="1"/>
           </p:cNvGraphicFramePr>
@@ -17427,7 +19415,7 @@
                           <a:ea typeface="Calibri" pitchFamily="34" charset="-122"/>
                           <a:cs typeface="Calibri" pitchFamily="34" charset="-120"/>
                         </a:rPr>
-                        <a:t>Meaning of Waves; Strength of Waves; Types of Waves.</a:t>
+                        <a:t>DEFINITIONS; Formation of Waves; Factors of the Strength of Waves; Types of Waves.</a:t>
                       </a:r>
                       <a:endParaRPr lang="en-US" sz="1600" dirty="0">
                         <a:latin typeface="Calibri" charset="0"/>
@@ -18077,615 +20065,7 @@
             <a:pPr algn="ctr"/>
             <a:fld id="{F7021451-1387-4CA6-816F-3879F97B5CBC}" type="slidenum">
               <a:rPr b="1" lang="en-US"/>
-              <a:t>44</a:t>
-            </a:fld>
-            <a:endParaRPr lang="en-US"/>
-          </a:p>
-        </p:txBody>
-      </p:sp>
-    </p:spTree>
-  </p:cSld>
-  <p:clrMapOvr>
-    <a:masterClrMapping/>
-  </p:clrMapOvr>
-</p:sld>
-</file>
-
-<file path=ppt/slides/slide45.xml><?xml version="1.0" encoding="utf-8"?>
-<p:sld xmlns:a="http://schemas.openxmlformats.org/drawingml/2006/main" xmlns:r="http://schemas.openxmlformats.org/officeDocument/2006/relationships" xmlns:p="http://schemas.openxmlformats.org/presentationml/2006/main">
-  <p:cSld name="Slide 45">
-    <p:spTree>
-      <p:nvGrpSpPr>
-        <p:cNvPr id="1" name=""/>
-        <p:cNvGrpSpPr/>
-        <p:nvPr/>
-      </p:nvGrpSpPr>
-      <p:grpSpPr>
-        <a:xfrm>
-          <a:off x="0" y="0"/>
-          <a:ext cx="0" cy="0"/>
-          <a:chOff x="0" y="0"/>
-          <a:chExt cx="0" cy="0"/>
-        </a:xfrm>
-      </p:grpSpPr>
-      <p:sp>
-        <p:nvSpPr>
-          <p:cNvPr id="2" name="Text 0"/>
-          <p:cNvSpPr/>
-          <p:nvPr/>
-        </p:nvSpPr>
-        <p:spPr>
-          <a:xfrm>
-            <a:off x="457200" y="713232"/>
-            <a:ext cx="11368735" cy="274320"/>
-          </a:xfrm>
-          <a:prstGeom prst="rect">
-            <a:avLst/>
-          </a:prstGeom>
-          <a:noFill/>
-          <a:ln/>
-        </p:spPr>
-        <p:txBody>
-          <a:bodyPr wrap="square" lIns="0" tIns="0" rIns="0" bIns="0" rtlCol="0" anchor="ctr"/>
-          <a:lstStyle/>
-          <a:p>
-            <a:pPr algn="r" indent="0" marL="0">
-              <a:buNone/>
-            </a:pPr>
-            <a:r>
-              <a:rPr lang="en-US" sz="1400" b="1" dirty="0">
-                <a:solidFill>
-                  <a:srgbClr val="1C3F6E"/>
-                </a:solidFill>
-                <a:latin typeface="Calibri" pitchFamily="34" charset="0"/>
-                <a:ea typeface="Calibri" pitchFamily="34" charset="-122"/>
-                <a:cs typeface="Calibri" pitchFamily="34" charset="-120"/>
-              </a:rPr>
-              <a:t>TEACHER'S NOTE</a:t>
-            </a:r>
-            <a:endParaRPr lang="en-US" sz="1400" dirty="0"/>
-          </a:p>
-        </p:txBody>
-      </p:sp>
-      <p:pic>
-        <p:nvPicPr>
-          <p:cNvPr id="3" name="Image 0" descr="/home/claude/f4/img/minesec_sheet.png">    </p:cNvPr>
-          <p:cNvPicPr>
-            <a:picLocks noChangeAspect="1"/>
-          </p:cNvPicPr>
-          <p:nvPr/>
-        </p:nvPicPr>
-        <p:blipFill>
-          <a:blip r:embed="rId1"/>
-          <a:stretch>
-            <a:fillRect/>
-          </a:stretch>
-        </p:blipFill>
-        <p:spPr>
-          <a:xfrm>
-            <a:off x="0" y="658368"/>
-            <a:ext cx="5120640" cy="5833872"/>
-          </a:xfrm>
-          <a:prstGeom prst="rect">
-            <a:avLst/>
-          </a:prstGeom>
-        </p:spPr>
-      </p:pic>
-      <p:sp>
-        <p:nvSpPr>
-          <p:cNvPr id="4" name="Text 1"/>
-          <p:cNvSpPr/>
-          <p:nvPr/>
-        </p:nvSpPr>
-        <p:spPr>
-          <a:xfrm>
-            <a:off x="5349240" y="1005840"/>
-            <a:ext cx="6522415" cy="731520"/>
-          </a:xfrm>
-          <a:prstGeom prst="rect">
-            <a:avLst/>
-          </a:prstGeom>
-          <a:noFill/>
-          <a:ln/>
-        </p:spPr>
-        <p:txBody>
-          <a:bodyPr wrap="square" lIns="0" tIns="0" rIns="0" bIns="0" rtlCol="0" anchor="ctr">
-            <a:normAutofit/>
-          </a:bodyPr>
-          <a:lstStyle/>
-          <a:p>
-            <a:pPr algn="ctr" indent="0" marL="0">
-              <a:buNone/>
-            </a:pPr>
-            <a:r>
-              <a:rPr lang="en-US" sz="3600" b="1" dirty="0">
-                <a:solidFill>
-                  <a:srgbClr val="990011"/>
-                </a:solidFill>
-                <a:latin typeface="Times New Roman" pitchFamily="34" charset="0"/>
-                <a:ea typeface="Times New Roman" pitchFamily="34" charset="-122"/>
-                <a:cs typeface="Times New Roman" pitchFamily="34" charset="-120"/>
-              </a:rPr>
-              <a:t>Teacher's Note</a:t>
-            </a:r>
-            <a:endParaRPr lang="en-US" sz="3600" dirty="0"/>
-          </a:p>
-        </p:txBody>
-      </p:sp>
-      <p:sp>
-        <p:nvSpPr>
-          <p:cNvPr id="5" name="Text 2"/>
-          <p:cNvSpPr/>
-          <p:nvPr/>
-        </p:nvSpPr>
-        <p:spPr>
-          <a:xfrm>
-            <a:off x="5349240" y="1783080"/>
-            <a:ext cx="6522415" cy="4663440"/>
-          </a:xfrm>
-          <a:prstGeom prst="rect">
-            <a:avLst/>
-          </a:prstGeom>
-          <a:noFill/>
-          <a:ln/>
-        </p:spPr>
-        <p:txBody>
-          <a:bodyPr wrap="square" lIns="0" tIns="0" rIns="0" bIns="0" rtlCol="0" anchor="t"/>
-          <a:lstStyle/>
-          <a:p>
-            <a:pPr algn="l" marL="342900" indent="-342900">
-              <a:spcAft>
-                <a:spcPts val="800"/>
-              </a:spcAft>
-              <a:buSzPct val="100000"/>
-              <a:buChar char="•"/>
-            </a:pPr>
-            <a:r>
-              <a:rPr lang="en-US" sz="2000" dirty="0">
-                <a:solidFill>
-                  <a:srgbClr val="111111"/>
-                </a:solidFill>
-                <a:latin typeface="Calibri" pitchFamily="34" charset="0"/>
-                <a:ea typeface="Calibri" pitchFamily="34" charset="-122"/>
-                <a:cs typeface="Calibri" pitchFamily="34" charset="-120"/>
-              </a:rPr>
-              <a:t>Timing: Homework correction, plan, objectives 4 min | Recall, situation, action 6 min | 3 activities 12 min | Board summary (copying) 15 min | Evaluation, remediation 5 min | Homework, next lesson 3 min | Logbook 5 min</a:t>
-            </a:r>
-            <a:endParaRPr lang="en-US" sz="2000" dirty="0"/>
-          </a:p>
-          <a:p>
-            <a:pPr algn="l" marL="342900" indent="-342900">
-              <a:spcAft>
-                <a:spcPts val="800"/>
-              </a:spcAft>
-              <a:buSzPct val="100000"/>
-              <a:buChar char="•"/>
-            </a:pPr>
-            <a:r>
-              <a:rPr lang="en-US" sz="2000" dirty="0">
-                <a:solidFill>
-                  <a:srgbClr val="111111"/>
-                </a:solidFill>
-                <a:latin typeface="Calibri" pitchFamily="34" charset="0"/>
-                <a:ea typeface="Calibri" pitchFamily="34" charset="-122"/>
-                <a:cs typeface="Calibri" pitchFamily="34" charset="-120"/>
-              </a:rPr>
-              <a:t>Activity 2 is an animation (GIF): it plays automatically in slide-show mode.</a:t>
-            </a:r>
-            <a:endParaRPr lang="en-US" sz="2000" dirty="0"/>
-          </a:p>
-          <a:p>
-            <a:pPr algn="l" marL="342900" indent="-342900">
-              <a:spcAft>
-                <a:spcPts val="800"/>
-              </a:spcAft>
-              <a:buSzPct val="100000"/>
-              <a:buChar char="•"/>
-            </a:pPr>
-            <a:r>
-              <a:rPr lang="en-US" sz="2000" dirty="0">
-                <a:solidFill>
-                  <a:srgbClr val="111111"/>
-                </a:solidFill>
-                <a:latin typeface="Calibri" pitchFamily="34" charset="0"/>
-                <a:ea typeface="Calibri" pitchFamily="34" charset="-122"/>
-                <a:cs typeface="Calibri" pitchFamily="34" charset="-120"/>
-              </a:rPr>
-              <a:t>Without the projector (Activity 1): blow on a plate of water.</a:t>
-            </a:r>
-            <a:endParaRPr lang="en-US" sz="2000" dirty="0"/>
-          </a:p>
-          <a:p>
-            <a:pPr algn="l" marL="342900" indent="-342900">
-              <a:spcAft>
-                <a:spcPts val="800"/>
-              </a:spcAft>
-              <a:buSzPct val="100000"/>
-              <a:buChar char="•"/>
-            </a:pPr>
-            <a:r>
-              <a:rPr lang="en-US" sz="2000" dirty="0">
-                <a:solidFill>
-                  <a:srgbClr val="111111"/>
-                </a:solidFill>
-                <a:latin typeface="Calibri" pitchFamily="34" charset="0"/>
-                <a:ea typeface="Calibri" pitchFamily="34" charset="-122"/>
-                <a:cs typeface="Calibri" pitchFamily="34" charset="-120"/>
-              </a:rPr>
-              <a:t>Without the projector (Activity 2): draw a beach with an arrow up and an arrow down.</a:t>
-            </a:r>
-            <a:endParaRPr lang="en-US" sz="2000" dirty="0"/>
-          </a:p>
-          <a:p>
-            <a:pPr algn="l" marL="342900" indent="-342900">
-              <a:spcAft>
-                <a:spcPts val="800"/>
-              </a:spcAft>
-              <a:buSzPct val="100000"/>
-              <a:buChar char="•"/>
-            </a:pPr>
-            <a:r>
-              <a:rPr lang="en-US" sz="2000" dirty="0">
-                <a:solidFill>
-                  <a:srgbClr val="111111"/>
-                </a:solidFill>
-                <a:latin typeface="Calibri" pitchFamily="34" charset="0"/>
-                <a:ea typeface="Calibri" pitchFamily="34" charset="-122"/>
-                <a:cs typeface="Calibri" pitchFamily="34" charset="-120"/>
-              </a:rPr>
-              <a:t>Without the projector (Activity 3): compare a calm day and a stormy day at the beach.</a:t>
-            </a:r>
-            <a:endParaRPr lang="en-US" sz="2000" dirty="0"/>
-          </a:p>
-        </p:txBody>
-      </p:sp>
-      <p:sp>
-        <p:nvSpPr>
-          <p:cNvPr id="25" name="Slide Number Placeholder 0"/>
-          <p:cNvSpPr>
-            <a:spLocks noGrp="1"/>
-          </p:cNvSpPr>
-          <p:nvPr>
-            <p:ph type="sldNum" sz="quarter" idx="4294967295"/>
-          </p:nvPr>
-        </p:nvSpPr>
-        <p:spPr>
-          <a:xfrm>
-            <a:off x="27432" y="91440"/>
-            <a:ext cx="585216" cy="475488"/>
-          </a:xfrm>
-          <a:prstGeom prst="rect">
-            <a:avLst/>
-          </a:prstGeom>
-          <a:extLst>
-            <a:ext uri="{C572A759-6A51-4108-AA02-DFA0A04FC94B}">
-              <ma14:wrappingTextBoxFlag xmlns:ma14="http://schemas.microsoft.com/office/mac/drawingml/2011/main" val="0"/>
-            </a:ext>
-          </a:extLst>
-        </p:spPr>
-        <p:txBody>
-          <a:bodyPr/>
-          <a:lstStyle>
-            <a:lvl1pPr>
-              <a:defRPr sz="2000">
-                <a:solidFill>
-                  <a:srgbClr val="FFFFFF"/>
-                </a:solidFill>
-                <a:latin typeface="Calibri"/>
-                <a:ea typeface="Calibri"/>
-                <a:cs typeface="Calibri"/>
-              </a:defRPr>
-            </a:lvl1pPr>
-          </a:lstStyle>
-          <a:p>
-            <a:pPr algn="ctr"/>
-            <a:fld id="{F7021451-1387-4CA6-816F-3879F97B5CBC}" type="slidenum">
-              <a:rPr b="1" lang="en-US"/>
-              <a:t>45</a:t>
-            </a:fld>
-            <a:endParaRPr lang="en-US"/>
-          </a:p>
-        </p:txBody>
-      </p:sp>
-    </p:spTree>
-  </p:cSld>
-  <p:clrMapOvr>
-    <a:masterClrMapping/>
-  </p:clrMapOvr>
-</p:sld>
-</file>
-
-<file path=ppt/slides/slide46.xml><?xml version="1.0" encoding="utf-8"?>
-<p:sld xmlns:a="http://schemas.openxmlformats.org/drawingml/2006/main" xmlns:r="http://schemas.openxmlformats.org/officeDocument/2006/relationships" xmlns:p="http://schemas.openxmlformats.org/presentationml/2006/main">
-  <p:cSld name="Slide 46">
-    <p:spTree>
-      <p:nvGrpSpPr>
-        <p:cNvPr id="1" name=""/>
-        <p:cNvGrpSpPr/>
-        <p:nvPr/>
-      </p:nvGrpSpPr>
-      <p:grpSpPr>
-        <a:xfrm>
-          <a:off x="0" y="0"/>
-          <a:ext cx="0" cy="0"/>
-          <a:chOff x="0" y="0"/>
-          <a:chExt cx="0" cy="0"/>
-        </a:xfrm>
-      </p:grpSpPr>
-      <p:sp>
-        <p:nvSpPr>
-          <p:cNvPr id="2" name="Text 0"/>
-          <p:cNvSpPr/>
-          <p:nvPr/>
-        </p:nvSpPr>
-        <p:spPr>
-          <a:xfrm>
-            <a:off x="457200" y="713232"/>
-            <a:ext cx="11368735" cy="274320"/>
-          </a:xfrm>
-          <a:prstGeom prst="rect">
-            <a:avLst/>
-          </a:prstGeom>
-          <a:noFill/>
-          <a:ln/>
-        </p:spPr>
-        <p:txBody>
-          <a:bodyPr wrap="square" lIns="0" tIns="0" rIns="0" bIns="0" rtlCol="0" anchor="ctr"/>
-          <a:lstStyle/>
-          <a:p>
-            <a:pPr algn="r" indent="0" marL="0">
-              <a:buNone/>
-            </a:pPr>
-            <a:r>
-              <a:rPr lang="en-US" sz="1400" b="1" dirty="0">
-                <a:solidFill>
-                  <a:srgbClr val="1C3F6E"/>
-                </a:solidFill>
-                <a:latin typeface="Calibri" pitchFamily="34" charset="0"/>
-                <a:ea typeface="Calibri" pitchFamily="34" charset="-122"/>
-                <a:cs typeface="Calibri" pitchFamily="34" charset="-120"/>
-              </a:rPr>
-              <a:t>REFERENCES</a:t>
-            </a:r>
-            <a:endParaRPr lang="en-US" sz="1400" dirty="0"/>
-          </a:p>
-        </p:txBody>
-      </p:sp>
-      <p:pic>
-        <p:nvPicPr>
-          <p:cNvPr id="3" name="Image 0" descr="/home/claude/f4/img/minesec_sheet.png">    </p:cNvPr>
-          <p:cNvPicPr>
-            <a:picLocks noChangeAspect="1"/>
-          </p:cNvPicPr>
-          <p:nvPr/>
-        </p:nvPicPr>
-        <p:blipFill>
-          <a:blip r:embed="rId1"/>
-          <a:stretch>
-            <a:fillRect/>
-          </a:stretch>
-        </p:blipFill>
-        <p:spPr>
-          <a:xfrm>
-            <a:off x="0" y="658368"/>
-            <a:ext cx="5120640" cy="5833872"/>
-          </a:xfrm>
-          <a:prstGeom prst="rect">
-            <a:avLst/>
-          </a:prstGeom>
-        </p:spPr>
-      </p:pic>
-      <p:sp>
-        <p:nvSpPr>
-          <p:cNvPr id="4" name="Text 1"/>
-          <p:cNvSpPr/>
-          <p:nvPr/>
-        </p:nvSpPr>
-        <p:spPr>
-          <a:xfrm>
-            <a:off x="5349240" y="1005840"/>
-            <a:ext cx="6522415" cy="731520"/>
-          </a:xfrm>
-          <a:prstGeom prst="rect">
-            <a:avLst/>
-          </a:prstGeom>
-          <a:noFill/>
-          <a:ln/>
-        </p:spPr>
-        <p:txBody>
-          <a:bodyPr wrap="square" lIns="0" tIns="0" rIns="0" bIns="0" rtlCol="0" anchor="ctr">
-            <a:normAutofit/>
-          </a:bodyPr>
-          <a:lstStyle/>
-          <a:p>
-            <a:pPr algn="ctr" indent="0" marL="0">
-              <a:buNone/>
-            </a:pPr>
-            <a:r>
-              <a:rPr lang="en-US" sz="3600" b="1" dirty="0">
-                <a:solidFill>
-                  <a:srgbClr val="990011"/>
-                </a:solidFill>
-                <a:latin typeface="Times New Roman" pitchFamily="34" charset="0"/>
-                <a:ea typeface="Times New Roman" pitchFamily="34" charset="-122"/>
-                <a:cs typeface="Times New Roman" pitchFamily="34" charset="-120"/>
-              </a:rPr>
-              <a:t>References</a:t>
-            </a:r>
-            <a:endParaRPr lang="en-US" sz="3600" dirty="0"/>
-          </a:p>
-        </p:txBody>
-      </p:sp>
-      <p:sp>
-        <p:nvSpPr>
-          <p:cNvPr id="5" name="Text 2"/>
-          <p:cNvSpPr/>
-          <p:nvPr/>
-        </p:nvSpPr>
-        <p:spPr>
-          <a:xfrm>
-            <a:off x="5349240" y="1783080"/>
-            <a:ext cx="6522415" cy="4663440"/>
-          </a:xfrm>
-          <a:prstGeom prst="rect">
-            <a:avLst/>
-          </a:prstGeom>
-          <a:noFill/>
-          <a:ln/>
-        </p:spPr>
-        <p:txBody>
-          <a:bodyPr wrap="square" lIns="0" tIns="0" rIns="0" bIns="0" rtlCol="0" anchor="t"/>
-          <a:lstStyle/>
-          <a:p>
-            <a:pPr algn="l" marL="342900" indent="-342900">
-              <a:spcAft>
-                <a:spcPts val="800"/>
-              </a:spcAft>
-              <a:buSzPct val="100000"/>
-              <a:buChar char="•"/>
-            </a:pPr>
-            <a:r>
-              <a:rPr lang="en-US" sz="1800" dirty="0">
-                <a:solidFill>
-                  <a:srgbClr val="111111"/>
-                </a:solidFill>
-                <a:latin typeface="Calibri" pitchFamily="34" charset="0"/>
-                <a:ea typeface="Calibri" pitchFamily="34" charset="-122"/>
-                <a:cs typeface="Calibri" pitchFamily="34" charset="-120"/>
-              </a:rPr>
-              <a:t>National Geography Syllabus (MINESEC), Form 4 — Denudation Processes, Landforms and Impacts on Man.</a:t>
-            </a:r>
-            <a:endParaRPr lang="en-US" sz="1800" dirty="0"/>
-          </a:p>
-          <a:p>
-            <a:pPr algn="l" marL="342900" indent="-342900">
-              <a:spcAft>
-                <a:spcPts val="800"/>
-              </a:spcAft>
-              <a:buSzPct val="100000"/>
-              <a:buChar char="•"/>
-            </a:pPr>
-            <a:r>
-              <a:rPr lang="en-US" sz="1800" dirty="0">
-                <a:solidFill>
-                  <a:srgbClr val="111111"/>
-                </a:solidFill>
-                <a:latin typeface="Calibri" pitchFamily="34" charset="0"/>
-                <a:ea typeface="Calibri" pitchFamily="34" charset="-122"/>
-                <a:cs typeface="Calibri" pitchFamily="34" charset="-120"/>
-              </a:rPr>
-              <a:t>Teacher's lesson notes (Form 4), checked and corrected where necessary.</a:t>
-            </a:r>
-            <a:endParaRPr lang="en-US" sz="1800" dirty="0"/>
-          </a:p>
-          <a:p>
-            <a:pPr algn="l" marL="342900" indent="-342900">
-              <a:spcAft>
-                <a:spcPts val="800"/>
-              </a:spcAft>
-              <a:buSzPct val="100000"/>
-              <a:buChar char="•"/>
-            </a:pPr>
-            <a:r>
-              <a:rPr lang="en-US" sz="1800" dirty="0">
-                <a:solidFill>
-                  <a:srgbClr val="111111"/>
-                </a:solidFill>
-                <a:latin typeface="Calibri" pitchFamily="34" charset="0"/>
-                <a:ea typeface="Calibri" pitchFamily="34" charset="-122"/>
-                <a:cs typeface="Calibri" pitchFamily="34" charset="-120"/>
-              </a:rPr>
-              <a:t>Photo, Activity 1: “Carpinteria Bluffs, California (5)” by Ken Lund, CC BY-SA 2.0, via Flickr (https://www.flickr.com/photos/75683070@N00/4063056130)</a:t>
-            </a:r>
-            <a:endParaRPr lang="en-US" sz="1800" dirty="0"/>
-          </a:p>
-          <a:p>
-            <a:pPr algn="l" marL="342900" indent="-342900">
-              <a:spcAft>
-                <a:spcPts val="800"/>
-              </a:spcAft>
-              <a:buSzPct val="100000"/>
-              <a:buChar char="•"/>
-            </a:pPr>
-            <a:r>
-              <a:rPr lang="en-US" sz="1800" dirty="0">
-                <a:solidFill>
-                  <a:srgbClr val="111111"/>
-                </a:solidFill>
-                <a:latin typeface="Calibri" pitchFamily="34" charset="0"/>
-                <a:ea typeface="Calibri" pitchFamily="34" charset="-122"/>
-                <a:cs typeface="Calibri" pitchFamily="34" charset="-120"/>
-              </a:rPr>
-              <a:t>Photo, Activity 3: “Wave Explosion, Monterey Bay, California” by John William Hammond, CC BY-NC-SA 2.0, via Flickr (https://www.flickr.com/photos/8398907@N02/16328053911)</a:t>
-            </a:r>
-            <a:endParaRPr lang="en-US" sz="1800" dirty="0"/>
-          </a:p>
-          <a:p>
-            <a:pPr algn="l" marL="342900" indent="-342900">
-              <a:spcAft>
-                <a:spcPts val="800"/>
-              </a:spcAft>
-              <a:buSzPct val="100000"/>
-              <a:buChar char="•"/>
-            </a:pPr>
-            <a:r>
-              <a:rPr lang="en-US" sz="1800" dirty="0">
-                <a:solidFill>
-                  <a:srgbClr val="111111"/>
-                </a:solidFill>
-                <a:latin typeface="Calibri" pitchFamily="34" charset="0"/>
-                <a:ea typeface="Calibri" pitchFamily="34" charset="-122"/>
-                <a:cs typeface="Calibri" pitchFamily="34" charset="-120"/>
-              </a:rPr>
-              <a:t>Diagrams and animations: drawn for this lesson (Geography Department).</a:t>
-            </a:r>
-            <a:endParaRPr lang="en-US" sz="1800" dirty="0"/>
-          </a:p>
-        </p:txBody>
-      </p:sp>
-      <p:sp>
-        <p:nvSpPr>
-          <p:cNvPr id="25" name="Slide Number Placeholder 0"/>
-          <p:cNvSpPr>
-            <a:spLocks noGrp="1"/>
-          </p:cNvSpPr>
-          <p:nvPr>
-            <p:ph type="sldNum" sz="quarter" idx="4294967295"/>
-          </p:nvPr>
-        </p:nvSpPr>
-        <p:spPr>
-          <a:xfrm>
-            <a:off x="27432" y="91440"/>
-            <a:ext cx="585216" cy="475488"/>
-          </a:xfrm>
-          <a:prstGeom prst="rect">
-            <a:avLst/>
-          </a:prstGeom>
-          <a:extLst>
-            <a:ext uri="{C572A759-6A51-4108-AA02-DFA0A04FC94B}">
-              <ma14:wrappingTextBoxFlag xmlns:ma14="http://schemas.microsoft.com/office/mac/drawingml/2011/main" val="0"/>
-            </a:ext>
-          </a:extLst>
-        </p:spPr>
-        <p:txBody>
-          <a:bodyPr/>
-          <a:lstStyle>
-            <a:lvl1pPr>
-              <a:defRPr sz="2000">
-                <a:solidFill>
-                  <a:srgbClr val="FFFFFF"/>
-                </a:solidFill>
-                <a:latin typeface="Calibri"/>
-                <a:ea typeface="Calibri"/>
-                <a:cs typeface="Calibri"/>
-              </a:defRPr>
-            </a:lvl1pPr>
-          </a:lstStyle>
-          <a:p>
-            <a:pPr algn="ctr"/>
-            <a:fld id="{F7021451-1387-4CA6-816F-3879F97B5CBC}" type="slidenum">
-              <a:rPr b="1" lang="en-US"/>
-              <a:t>46</a:t>
+              <a:t>49</a:t>
             </a:fld>
             <a:endParaRPr lang="en-US"/>
           </a:p>
@@ -18905,6 +20285,614 @@
             <a:fld id="{F7021451-1387-4CA6-816F-3879F97B5CBC}" type="slidenum">
               <a:rPr b="1" lang="en-US"/>
               <a:t>5</a:t>
+            </a:fld>
+            <a:endParaRPr lang="en-US"/>
+          </a:p>
+        </p:txBody>
+      </p:sp>
+    </p:spTree>
+  </p:cSld>
+  <p:clrMapOvr>
+    <a:masterClrMapping/>
+  </p:clrMapOvr>
+</p:sld>
+</file>
+
+<file path=ppt/slides/slide50.xml><?xml version="1.0" encoding="utf-8"?>
+<p:sld xmlns:a="http://schemas.openxmlformats.org/drawingml/2006/main" xmlns:r="http://schemas.openxmlformats.org/officeDocument/2006/relationships" xmlns:p="http://schemas.openxmlformats.org/presentationml/2006/main">
+  <p:cSld name="Slide 50">
+    <p:spTree>
+      <p:nvGrpSpPr>
+        <p:cNvPr id="1" name=""/>
+        <p:cNvGrpSpPr/>
+        <p:nvPr/>
+      </p:nvGrpSpPr>
+      <p:grpSpPr>
+        <a:xfrm>
+          <a:off x="0" y="0"/>
+          <a:ext cx="0" cy="0"/>
+          <a:chOff x="0" y="0"/>
+          <a:chExt cx="0" cy="0"/>
+        </a:xfrm>
+      </p:grpSpPr>
+      <p:sp>
+        <p:nvSpPr>
+          <p:cNvPr id="2" name="Text 0"/>
+          <p:cNvSpPr/>
+          <p:nvPr/>
+        </p:nvSpPr>
+        <p:spPr>
+          <a:xfrm>
+            <a:off x="457200" y="713232"/>
+            <a:ext cx="11368735" cy="274320"/>
+          </a:xfrm>
+          <a:prstGeom prst="rect">
+            <a:avLst/>
+          </a:prstGeom>
+          <a:noFill/>
+          <a:ln/>
+        </p:spPr>
+        <p:txBody>
+          <a:bodyPr wrap="square" lIns="0" tIns="0" rIns="0" bIns="0" rtlCol="0" anchor="ctr"/>
+          <a:lstStyle/>
+          <a:p>
+            <a:pPr algn="r" indent="0" marL="0">
+              <a:buNone/>
+            </a:pPr>
+            <a:r>
+              <a:rPr lang="en-US" sz="1400" b="1" dirty="0">
+                <a:solidFill>
+                  <a:srgbClr val="1C3F6E"/>
+                </a:solidFill>
+                <a:latin typeface="Calibri" pitchFamily="34" charset="0"/>
+                <a:ea typeface="Calibri" pitchFamily="34" charset="-122"/>
+                <a:cs typeface="Calibri" pitchFamily="34" charset="-120"/>
+              </a:rPr>
+              <a:t>TEACHER'S NOTE</a:t>
+            </a:r>
+            <a:endParaRPr lang="en-US" sz="1400" dirty="0"/>
+          </a:p>
+        </p:txBody>
+      </p:sp>
+      <p:pic>
+        <p:nvPicPr>
+          <p:cNvPr id="3" name="Image 0" descr="/home/claude/f4/img/minesec_sheet.png">    </p:cNvPr>
+          <p:cNvPicPr>
+            <a:picLocks noChangeAspect="1"/>
+          </p:cNvPicPr>
+          <p:nvPr/>
+        </p:nvPicPr>
+        <p:blipFill>
+          <a:blip r:embed="rId1"/>
+          <a:stretch>
+            <a:fillRect/>
+          </a:stretch>
+        </p:blipFill>
+        <p:spPr>
+          <a:xfrm>
+            <a:off x="0" y="658368"/>
+            <a:ext cx="5120640" cy="5833872"/>
+          </a:xfrm>
+          <a:prstGeom prst="rect">
+            <a:avLst/>
+          </a:prstGeom>
+        </p:spPr>
+      </p:pic>
+      <p:sp>
+        <p:nvSpPr>
+          <p:cNvPr id="4" name="Text 1"/>
+          <p:cNvSpPr/>
+          <p:nvPr/>
+        </p:nvSpPr>
+        <p:spPr>
+          <a:xfrm>
+            <a:off x="5349240" y="1005840"/>
+            <a:ext cx="6522415" cy="731520"/>
+          </a:xfrm>
+          <a:prstGeom prst="rect">
+            <a:avLst/>
+          </a:prstGeom>
+          <a:noFill/>
+          <a:ln/>
+        </p:spPr>
+        <p:txBody>
+          <a:bodyPr wrap="square" lIns="0" tIns="0" rIns="0" bIns="0" rtlCol="0" anchor="ctr">
+            <a:normAutofit/>
+          </a:bodyPr>
+          <a:lstStyle/>
+          <a:p>
+            <a:pPr algn="ctr" indent="0" marL="0">
+              <a:buNone/>
+            </a:pPr>
+            <a:r>
+              <a:rPr lang="en-US" sz="3600" b="1" dirty="0">
+                <a:solidFill>
+                  <a:srgbClr val="990011"/>
+                </a:solidFill>
+                <a:latin typeface="Times New Roman" pitchFamily="34" charset="0"/>
+                <a:ea typeface="Times New Roman" pitchFamily="34" charset="-122"/>
+                <a:cs typeface="Times New Roman" pitchFamily="34" charset="-120"/>
+              </a:rPr>
+              <a:t>Teacher's Note</a:t>
+            </a:r>
+            <a:endParaRPr lang="en-US" sz="3600" dirty="0"/>
+          </a:p>
+        </p:txBody>
+      </p:sp>
+      <p:sp>
+        <p:nvSpPr>
+          <p:cNvPr id="5" name="Text 2"/>
+          <p:cNvSpPr/>
+          <p:nvPr/>
+        </p:nvSpPr>
+        <p:spPr>
+          <a:xfrm>
+            <a:off x="5349240" y="1783080"/>
+            <a:ext cx="6522415" cy="4663440"/>
+          </a:xfrm>
+          <a:prstGeom prst="rect">
+            <a:avLst/>
+          </a:prstGeom>
+          <a:noFill/>
+          <a:ln/>
+        </p:spPr>
+        <p:txBody>
+          <a:bodyPr wrap="square" lIns="0" tIns="0" rIns="0" bIns="0" rtlCol="0" anchor="t"/>
+          <a:lstStyle/>
+          <a:p>
+            <a:pPr algn="l" marL="342900" indent="-342900">
+              <a:spcAft>
+                <a:spcPts val="800"/>
+              </a:spcAft>
+              <a:buSzPct val="100000"/>
+              <a:buChar char="•"/>
+            </a:pPr>
+            <a:r>
+              <a:rPr lang="en-US" sz="2000" dirty="0">
+                <a:solidFill>
+                  <a:srgbClr val="111111"/>
+                </a:solidFill>
+                <a:latin typeface="Calibri" pitchFamily="34" charset="0"/>
+                <a:ea typeface="Calibri" pitchFamily="34" charset="-122"/>
+                <a:cs typeface="Calibri" pitchFamily="34" charset="-120"/>
+              </a:rPr>
+              <a:t>Timing: Homework correction, plan, objectives 4 min | Recall, situation, action 6 min | 3 activities 12 min | Board summary (copying) 15 min | Evaluation, remediation 5 min | Homework, next lesson 3 min | Logbook 5 min</a:t>
+            </a:r>
+            <a:endParaRPr lang="en-US" sz="2000" dirty="0"/>
+          </a:p>
+          <a:p>
+            <a:pPr algn="l" marL="342900" indent="-342900">
+              <a:spcAft>
+                <a:spcPts val="800"/>
+              </a:spcAft>
+              <a:buSzPct val="100000"/>
+              <a:buChar char="•"/>
+            </a:pPr>
+            <a:r>
+              <a:rPr lang="en-US" sz="2000" dirty="0">
+                <a:solidFill>
+                  <a:srgbClr val="111111"/>
+                </a:solidFill>
+                <a:latin typeface="Calibri" pitchFamily="34" charset="0"/>
+                <a:ea typeface="Calibri" pitchFamily="34" charset="-122"/>
+                <a:cs typeface="Calibri" pitchFamily="34" charset="-120"/>
+              </a:rPr>
+              <a:t>Activity 2 is an animation (GIF): it plays automatically in slide-show mode.</a:t>
+            </a:r>
+            <a:endParaRPr lang="en-US" sz="2000" dirty="0"/>
+          </a:p>
+          <a:p>
+            <a:pPr algn="l" marL="342900" indent="-342900">
+              <a:spcAft>
+                <a:spcPts val="800"/>
+              </a:spcAft>
+              <a:buSzPct val="100000"/>
+              <a:buChar char="•"/>
+            </a:pPr>
+            <a:r>
+              <a:rPr lang="en-US" sz="2000" dirty="0">
+                <a:solidFill>
+                  <a:srgbClr val="111111"/>
+                </a:solidFill>
+                <a:latin typeface="Calibri" pitchFamily="34" charset="0"/>
+                <a:ea typeface="Calibri" pitchFamily="34" charset="-122"/>
+                <a:cs typeface="Calibri" pitchFamily="34" charset="-120"/>
+              </a:rPr>
+              <a:t>Without the projector (Activity 1): blow over a basin of water.</a:t>
+            </a:r>
+            <a:endParaRPr lang="en-US" sz="2000" dirty="0"/>
+          </a:p>
+          <a:p>
+            <a:pPr algn="l" marL="342900" indent="-342900">
+              <a:spcAft>
+                <a:spcPts val="800"/>
+              </a:spcAft>
+              <a:buSzPct val="100000"/>
+              <a:buChar char="•"/>
+            </a:pPr>
+            <a:r>
+              <a:rPr lang="en-US" sz="2000" dirty="0">
+                <a:solidFill>
+                  <a:srgbClr val="111111"/>
+                </a:solidFill>
+                <a:latin typeface="Calibri" pitchFamily="34" charset="0"/>
+                <a:ea typeface="Calibri" pitchFamily="34" charset="-122"/>
+                <a:cs typeface="Calibri" pitchFamily="34" charset="-120"/>
+              </a:rPr>
+              <a:t>Without the projector (Activity 2): draw a beach with two arrows.</a:t>
+            </a:r>
+            <a:endParaRPr lang="en-US" sz="2000" dirty="0"/>
+          </a:p>
+          <a:p>
+            <a:pPr algn="l" marL="342900" indent="-342900">
+              <a:spcAft>
+                <a:spcPts val="800"/>
+              </a:spcAft>
+              <a:buSzPct val="100000"/>
+              <a:buChar char="•"/>
+            </a:pPr>
+            <a:r>
+              <a:rPr lang="en-US" sz="2000" dirty="0">
+                <a:solidFill>
+                  <a:srgbClr val="111111"/>
+                </a:solidFill>
+                <a:latin typeface="Calibri" pitchFamily="34" charset="0"/>
+                <a:ea typeface="Calibri" pitchFamily="34" charset="-122"/>
+                <a:cs typeface="Calibri" pitchFamily="34" charset="-120"/>
+              </a:rPr>
+              <a:t>Without the projector (Activity 3): describe the sea at Kribi in the rainy season.</a:t>
+            </a:r>
+            <a:endParaRPr lang="en-US" sz="2000" dirty="0"/>
+          </a:p>
+        </p:txBody>
+      </p:sp>
+      <p:sp>
+        <p:nvSpPr>
+          <p:cNvPr id="25" name="Slide Number Placeholder 0"/>
+          <p:cNvSpPr>
+            <a:spLocks noGrp="1"/>
+          </p:cNvSpPr>
+          <p:nvPr>
+            <p:ph type="sldNum" sz="quarter" idx="4294967295"/>
+          </p:nvPr>
+        </p:nvSpPr>
+        <p:spPr>
+          <a:xfrm>
+            <a:off x="27432" y="91440"/>
+            <a:ext cx="585216" cy="475488"/>
+          </a:xfrm>
+          <a:prstGeom prst="rect">
+            <a:avLst/>
+          </a:prstGeom>
+          <a:extLst>
+            <a:ext uri="{C572A759-6A51-4108-AA02-DFA0A04FC94B}">
+              <ma14:wrappingTextBoxFlag xmlns:ma14="http://schemas.microsoft.com/office/mac/drawingml/2011/main" val="0"/>
+            </a:ext>
+          </a:extLst>
+        </p:spPr>
+        <p:txBody>
+          <a:bodyPr/>
+          <a:lstStyle>
+            <a:lvl1pPr>
+              <a:defRPr sz="2000">
+                <a:solidFill>
+                  <a:srgbClr val="FFFFFF"/>
+                </a:solidFill>
+                <a:latin typeface="Calibri"/>
+                <a:ea typeface="Calibri"/>
+                <a:cs typeface="Calibri"/>
+              </a:defRPr>
+            </a:lvl1pPr>
+          </a:lstStyle>
+          <a:p>
+            <a:pPr algn="ctr"/>
+            <a:fld id="{F7021451-1387-4CA6-816F-3879F97B5CBC}" type="slidenum">
+              <a:rPr b="1" lang="en-US"/>
+              <a:t>50</a:t>
+            </a:fld>
+            <a:endParaRPr lang="en-US"/>
+          </a:p>
+        </p:txBody>
+      </p:sp>
+    </p:spTree>
+  </p:cSld>
+  <p:clrMapOvr>
+    <a:masterClrMapping/>
+  </p:clrMapOvr>
+</p:sld>
+</file>
+
+<file path=ppt/slides/slide51.xml><?xml version="1.0" encoding="utf-8"?>
+<p:sld xmlns:a="http://schemas.openxmlformats.org/drawingml/2006/main" xmlns:r="http://schemas.openxmlformats.org/officeDocument/2006/relationships" xmlns:p="http://schemas.openxmlformats.org/presentationml/2006/main">
+  <p:cSld name="Slide 51">
+    <p:spTree>
+      <p:nvGrpSpPr>
+        <p:cNvPr id="1" name=""/>
+        <p:cNvGrpSpPr/>
+        <p:nvPr/>
+      </p:nvGrpSpPr>
+      <p:grpSpPr>
+        <a:xfrm>
+          <a:off x="0" y="0"/>
+          <a:ext cx="0" cy="0"/>
+          <a:chOff x="0" y="0"/>
+          <a:chExt cx="0" cy="0"/>
+        </a:xfrm>
+      </p:grpSpPr>
+      <p:sp>
+        <p:nvSpPr>
+          <p:cNvPr id="2" name="Text 0"/>
+          <p:cNvSpPr/>
+          <p:nvPr/>
+        </p:nvSpPr>
+        <p:spPr>
+          <a:xfrm>
+            <a:off x="457200" y="713232"/>
+            <a:ext cx="11368735" cy="274320"/>
+          </a:xfrm>
+          <a:prstGeom prst="rect">
+            <a:avLst/>
+          </a:prstGeom>
+          <a:noFill/>
+          <a:ln/>
+        </p:spPr>
+        <p:txBody>
+          <a:bodyPr wrap="square" lIns="0" tIns="0" rIns="0" bIns="0" rtlCol="0" anchor="ctr"/>
+          <a:lstStyle/>
+          <a:p>
+            <a:pPr algn="r" indent="0" marL="0">
+              <a:buNone/>
+            </a:pPr>
+            <a:r>
+              <a:rPr lang="en-US" sz="1400" b="1" dirty="0">
+                <a:solidFill>
+                  <a:srgbClr val="1C3F6E"/>
+                </a:solidFill>
+                <a:latin typeface="Calibri" pitchFamily="34" charset="0"/>
+                <a:ea typeface="Calibri" pitchFamily="34" charset="-122"/>
+                <a:cs typeface="Calibri" pitchFamily="34" charset="-120"/>
+              </a:rPr>
+              <a:t>REFERENCES</a:t>
+            </a:r>
+            <a:endParaRPr lang="en-US" sz="1400" dirty="0"/>
+          </a:p>
+        </p:txBody>
+      </p:sp>
+      <p:pic>
+        <p:nvPicPr>
+          <p:cNvPr id="3" name="Image 0" descr="/home/claude/f4/img/minesec_sheet.png">    </p:cNvPr>
+          <p:cNvPicPr>
+            <a:picLocks noChangeAspect="1"/>
+          </p:cNvPicPr>
+          <p:nvPr/>
+        </p:nvPicPr>
+        <p:blipFill>
+          <a:blip r:embed="rId1"/>
+          <a:stretch>
+            <a:fillRect/>
+          </a:stretch>
+        </p:blipFill>
+        <p:spPr>
+          <a:xfrm>
+            <a:off x="0" y="658368"/>
+            <a:ext cx="5120640" cy="5833872"/>
+          </a:xfrm>
+          <a:prstGeom prst="rect">
+            <a:avLst/>
+          </a:prstGeom>
+        </p:spPr>
+      </p:pic>
+      <p:sp>
+        <p:nvSpPr>
+          <p:cNvPr id="4" name="Text 1"/>
+          <p:cNvSpPr/>
+          <p:nvPr/>
+        </p:nvSpPr>
+        <p:spPr>
+          <a:xfrm>
+            <a:off x="5349240" y="1005840"/>
+            <a:ext cx="6522415" cy="731520"/>
+          </a:xfrm>
+          <a:prstGeom prst="rect">
+            <a:avLst/>
+          </a:prstGeom>
+          <a:noFill/>
+          <a:ln/>
+        </p:spPr>
+        <p:txBody>
+          <a:bodyPr wrap="square" lIns="0" tIns="0" rIns="0" bIns="0" rtlCol="0" anchor="ctr">
+            <a:normAutofit/>
+          </a:bodyPr>
+          <a:lstStyle/>
+          <a:p>
+            <a:pPr algn="ctr" indent="0" marL="0">
+              <a:buNone/>
+            </a:pPr>
+            <a:r>
+              <a:rPr lang="en-US" sz="3600" b="1" dirty="0">
+                <a:solidFill>
+                  <a:srgbClr val="990011"/>
+                </a:solidFill>
+                <a:latin typeface="Times New Roman" pitchFamily="34" charset="0"/>
+                <a:ea typeface="Times New Roman" pitchFamily="34" charset="-122"/>
+                <a:cs typeface="Times New Roman" pitchFamily="34" charset="-120"/>
+              </a:rPr>
+              <a:t>References</a:t>
+            </a:r>
+            <a:endParaRPr lang="en-US" sz="3600" dirty="0"/>
+          </a:p>
+        </p:txBody>
+      </p:sp>
+      <p:sp>
+        <p:nvSpPr>
+          <p:cNvPr id="5" name="Text 2"/>
+          <p:cNvSpPr/>
+          <p:nvPr/>
+        </p:nvSpPr>
+        <p:spPr>
+          <a:xfrm>
+            <a:off x="5349240" y="1783080"/>
+            <a:ext cx="6522415" cy="4663440"/>
+          </a:xfrm>
+          <a:prstGeom prst="rect">
+            <a:avLst/>
+          </a:prstGeom>
+          <a:noFill/>
+          <a:ln/>
+        </p:spPr>
+        <p:txBody>
+          <a:bodyPr wrap="square" lIns="0" tIns="0" rIns="0" bIns="0" rtlCol="0" anchor="t"/>
+          <a:lstStyle/>
+          <a:p>
+            <a:pPr algn="l" marL="342900" indent="-342900">
+              <a:spcAft>
+                <a:spcPts val="800"/>
+              </a:spcAft>
+              <a:buSzPct val="100000"/>
+              <a:buChar char="•"/>
+            </a:pPr>
+            <a:r>
+              <a:rPr lang="en-US" sz="1800" dirty="0">
+                <a:solidFill>
+                  <a:srgbClr val="111111"/>
+                </a:solidFill>
+                <a:latin typeface="Calibri" pitchFamily="34" charset="0"/>
+                <a:ea typeface="Calibri" pitchFamily="34" charset="-122"/>
+                <a:cs typeface="Calibri" pitchFamily="34" charset="-120"/>
+              </a:rPr>
+              <a:t>National Geography Syllabus (MINESEC), Form 4 — Denudation Processes, Landforms and Impacts on Man.</a:t>
+            </a:r>
+            <a:endParaRPr lang="en-US" sz="1800" dirty="0"/>
+          </a:p>
+          <a:p>
+            <a:pPr algn="l" marL="342900" indent="-342900">
+              <a:spcAft>
+                <a:spcPts val="800"/>
+              </a:spcAft>
+              <a:buSzPct val="100000"/>
+              <a:buChar char="•"/>
+            </a:pPr>
+            <a:r>
+              <a:rPr lang="en-US" sz="1800" dirty="0">
+                <a:solidFill>
+                  <a:srgbClr val="111111"/>
+                </a:solidFill>
+                <a:latin typeface="Calibri" pitchFamily="34" charset="0"/>
+                <a:ea typeface="Calibri" pitchFamily="34" charset="-122"/>
+                <a:cs typeface="Calibri" pitchFamily="34" charset="-120"/>
+              </a:rPr>
+              <a:t>Teacher's lesson notes (Form 4), checked and corrected where necessary.</a:t>
+            </a:r>
+            <a:endParaRPr lang="en-US" sz="1800" dirty="0"/>
+          </a:p>
+          <a:p>
+            <a:pPr algn="l" marL="342900" indent="-342900">
+              <a:spcAft>
+                <a:spcPts val="800"/>
+              </a:spcAft>
+              <a:buSzPct val="100000"/>
+              <a:buChar char="•"/>
+            </a:pPr>
+            <a:r>
+              <a:rPr lang="en-US" sz="1800" dirty="0">
+                <a:solidFill>
+                  <a:srgbClr val="111111"/>
+                </a:solidFill>
+                <a:latin typeface="Calibri" pitchFamily="34" charset="0"/>
+                <a:ea typeface="Calibri" pitchFamily="34" charset="-122"/>
+                <a:cs typeface="Calibri" pitchFamily="34" charset="-120"/>
+              </a:rPr>
+              <a:t>Photo, Activity 1: “Carpinteria Bluffs, California (5)” by Ken Lund, CC BY-SA 2.0, via Flickr (https://www.flickr.com/photos/75683070@N00/4063056130)</a:t>
+            </a:r>
+            <a:endParaRPr lang="en-US" sz="1800" dirty="0"/>
+          </a:p>
+          <a:p>
+            <a:pPr algn="l" marL="342900" indent="-342900">
+              <a:spcAft>
+                <a:spcPts val="800"/>
+              </a:spcAft>
+              <a:buSzPct val="100000"/>
+              <a:buChar char="•"/>
+            </a:pPr>
+            <a:r>
+              <a:rPr lang="en-US" sz="1800" dirty="0">
+                <a:solidFill>
+                  <a:srgbClr val="111111"/>
+                </a:solidFill>
+                <a:latin typeface="Calibri" pitchFamily="34" charset="0"/>
+                <a:ea typeface="Calibri" pitchFamily="34" charset="-122"/>
+                <a:cs typeface="Calibri" pitchFamily="34" charset="-120"/>
+              </a:rPr>
+              <a:t>Photo, Activity 3: “Wave Explosion, Monterey Bay, California” by John William Hammond, CC BY-NC-SA 2.0, via Flickr (https://www.flickr.com/photos/8398907@N02/16328053911)</a:t>
+            </a:r>
+            <a:endParaRPr lang="en-US" sz="1800" dirty="0"/>
+          </a:p>
+          <a:p>
+            <a:pPr algn="l" marL="342900" indent="-342900">
+              <a:spcAft>
+                <a:spcPts val="800"/>
+              </a:spcAft>
+              <a:buSzPct val="100000"/>
+              <a:buChar char="•"/>
+            </a:pPr>
+            <a:r>
+              <a:rPr lang="en-US" sz="1800" dirty="0">
+                <a:solidFill>
+                  <a:srgbClr val="111111"/>
+                </a:solidFill>
+                <a:latin typeface="Calibri" pitchFamily="34" charset="0"/>
+                <a:ea typeface="Calibri" pitchFamily="34" charset="-122"/>
+                <a:cs typeface="Calibri" pitchFamily="34" charset="-120"/>
+              </a:rPr>
+              <a:t>Diagrams and animations: drawn for this lesson (Geography Department).</a:t>
+            </a:r>
+            <a:endParaRPr lang="en-US" sz="1800" dirty="0"/>
+          </a:p>
+        </p:txBody>
+      </p:sp>
+      <p:sp>
+        <p:nvSpPr>
+          <p:cNvPr id="25" name="Slide Number Placeholder 0"/>
+          <p:cNvSpPr>
+            <a:spLocks noGrp="1"/>
+          </p:cNvSpPr>
+          <p:nvPr>
+            <p:ph type="sldNum" sz="quarter" idx="4294967295"/>
+          </p:nvPr>
+        </p:nvSpPr>
+        <p:spPr>
+          <a:xfrm>
+            <a:off x="27432" y="91440"/>
+            <a:ext cx="585216" cy="475488"/>
+          </a:xfrm>
+          <a:prstGeom prst="rect">
+            <a:avLst/>
+          </a:prstGeom>
+          <a:extLst>
+            <a:ext uri="{C572A759-6A51-4108-AA02-DFA0A04FC94B}">
+              <ma14:wrappingTextBoxFlag xmlns:ma14="http://schemas.microsoft.com/office/mac/drawingml/2011/main" val="0"/>
+            </a:ext>
+          </a:extLst>
+        </p:spPr>
+        <p:txBody>
+          <a:bodyPr/>
+          <a:lstStyle>
+            <a:lvl1pPr>
+              <a:defRPr sz="2000">
+                <a:solidFill>
+                  <a:srgbClr val="FFFFFF"/>
+                </a:solidFill>
+                <a:latin typeface="Calibri"/>
+                <a:ea typeface="Calibri"/>
+                <a:cs typeface="Calibri"/>
+              </a:defRPr>
+            </a:lvl1pPr>
+          </a:lstStyle>
+          <a:p>
+            <a:pPr algn="ctr"/>
+            <a:fld id="{F7021451-1387-4CA6-816F-3879F97B5CBC}" type="slidenum">
+              <a:rPr b="1" lang="en-US"/>
+              <a:t>51</a:t>
             </a:fld>
             <a:endParaRPr lang="en-US"/>
           </a:p>

--- a/lecons/F3/27_FORM4_LESSON23_Wave_Action_in_Coastal_Areas.pptx
+++ b/lecons/F3/27_FORM4_LESSON23_Wave_Action_in_Coastal_Areas.pptx
@@ -3456,7 +3456,7 @@
           <a:p>
             <a:r>
               <a:rPr lang="en-US" dirty="0"/>
-              <a:t>Before we start the new lesson, let us correct the homework I gave you at the end of Lesson 22: Man and Floodplain Interactions. The question was: Watch the wind blowing on the water of the Benue or of a big basin of water. Write how the waves form and in which direction they move. Take out your exercise books.</a:t>
+              <a:t>Before we start the new lesson, let us correct the homework I gave you at the end of Lesson 22: Man and Floodplain Interactions. The question was: Name the two types of waves. Take out your exercise books.</a:t>
             </a:r>
             <a:endParaRPr lang="en-US" dirty="0"/>
           </a:p>
@@ -3984,7 +3984,7 @@
           <a:p>
             <a:r>
               <a:rPr lang="en-US" dirty="0"/>
-              <a:t>For your homework: Look at photos of the coast of Limbe or Kribi. Draw a rocky part of the coast and name any holes, arches or rocks in the sea that you see. We shall correct it at the beginning of our next lesson.</a:t>
+              <a:t>For your homework: Name three erosional features of waves. We shall correct it at the beginning of our next lesson.</a:t>
             </a:r>
             <a:endParaRPr lang="en-US" dirty="0"/>
           </a:p>
@@ -4424,7 +4424,7 @@
           <a:p>
             <a:r>
               <a:rPr lang="en-US" dirty="0"/>
-              <a:t>Here is a good answer. The wind blows over the water and pushes it into small waves (ripples). The waves move in the direction the wind is blowing; a stronger wind gives bigger waves. Compare it with your own answer and correct your work in red.</a:t>
+              <a:t>Here is a good answer. Constructive waves and destructive waves. Compare it with your own answer and correct your work in red.</a:t>
             </a:r>
             <a:endParaRPr lang="en-US" dirty="0"/>
           </a:p>
@@ -15371,7 +15371,7 @@
                 <a:ea typeface="Times New Roman" pitchFamily="34" charset="-122"/>
                 <a:cs typeface="Times New Roman" pitchFamily="34" charset="-120"/>
               </a:rPr>
-              <a:t>Watch the wind blowing on the water of the Benue or of a big basin of water. Write how the waves form and in which direction they move.</a:t>
+              <a:t>Name the two types of waves.</a:t>
             </a:r>
             <a:endParaRPr lang="en-US" sz="4000" dirty="0"/>
           </a:p>
@@ -16751,7 +16751,7 @@
                 <a:ea typeface="Times New Roman" pitchFamily="34" charset="-122"/>
                 <a:cs typeface="Times New Roman" pitchFamily="34" charset="-120"/>
               </a:rPr>
-              <a:t>Look at photos of the coast of Limbe or Kribi. Draw a rocky part of the coast and name any holes, arches or rocks in the sea that you see.</a:t>
+              <a:t>Name three erosional features of waves.</a:t>
             </a:r>
             <a:endParaRPr lang="en-US" sz="4000" dirty="0"/>
           </a:p>
@@ -19691,7 +19691,7 @@
                           <a:ea typeface="Calibri" pitchFamily="34" charset="-122"/>
                           <a:cs typeface="Calibri" pitchFamily="34" charset="-120"/>
                         </a:rPr>
-                        <a:t>Look at photos of the coast of Limbe or Kribi. Draw a rocky part of the coast and name any holes, arches or rocks in the sea that you see.</a:t>
+                        <a:t>Name three erosional features of waves.</a:t>
                       </a:r>
                       <a:endParaRPr lang="en-US" sz="1600" dirty="0">
                         <a:latin typeface="Calibri" charset="0"/>
@@ -20236,7 +20236,7 @@
                 <a:ea typeface="Times New Roman" pitchFamily="34" charset="-122"/>
                 <a:cs typeface="Times New Roman" pitchFamily="34" charset="-120"/>
               </a:rPr>
-              <a:t>The wind blows over the water and pushes it into small waves (ripples). The waves move in the direction the wind is blowing; a stronger wind gives bigger waves.</a:t>
+              <a:t>Constructive waves and destructive waves.</a:t>
             </a:r>
             <a:endParaRPr lang="en-US" sz="4000" dirty="0"/>
           </a:p>
